--- a/slides/modules/m21-eventing-deep-dive.pptx
+++ b/slides/modules/m21-eventing-deep-dive.pptx
@@ -14,6 +14,7 @@
     <p:sldId id="262" r:id="rId14"/>
     <p:sldId id="263" r:id="rId15"/>
     <p:sldId id="264" r:id="rId16"/>
+    <p:sldId id="265" r:id="rId17"/>
   </p:sldIdLst>
   <p:sldSz cx="12191695" cy="6858000" type="screen4x3"/>
   <p:notesSz cx="6858000" cy="9144000"/>
@@ -1001,6 +1002,76 @@
           <a:p>
             <a:r>
               <a:t>Close on the decision and the transfer. Reach for Broker plus Triggers — this module — when you react to a fact, fan out to many consumers, and filter per consumer; that's the app-integration case. Reach for Channel plus Subscriptions for an ordered, linear pipeline. For events you cannot afford to lose, that's a Kafka broker, an add-on on a Streams subscription. For a multi-step process with branches and timeouts, that's orchestration with SonataFlow, also an add-on. And know the wrong tools: a step-by-step CI/CD build is Pipelines from Pipelines Fundamentals, not eventing; bulk parallel work with admission control is Jobs plus Kueue from Jobs, Batch &amp; Queued Workloads; and when a caller needs an answer NOW from one service, a direct synchronous call is simpler than emitting an event and correlating a reply. Then take the questions back to your org: where does adding a consumer force a change to the producer? Which synchronous calls fail the user because a downstream is slow? Where does routing live — in triggers or in if-statements? How would you know you were silently losing events — do you have a dead-letter sink and an alert on it? And which of your events actually need Kafka, and do you know it's a separate subscription? The honest boundary of the module: the source here was a seeded ticker because the app doesn't emit yet — making parasol-claims emit real claim events and repointing the triggers is one app change from closed.</a:t>
+            </a:r>
+          </a:p>
+        </p:txBody>
+      </p:sp>
+      <p:sp>
+        <p:nvSpPr>
+          <p:cNvPr id="4" name="Slide Number Placeholder 3"/>
+          <p:cNvSpPr>
+            <a:spLocks noGrp="1"/>
+          </p:cNvSpPr>
+          <p:nvPr>
+            <p:ph type="sldNum" idx="5" sz="quarter"/>
+          </p:nvPr>
+        </p:nvSpPr>
+        <p:spPr/>
+      </p:sp>
+    </p:spTree>
+  </p:cSld>
+  <p:clrMapOvr>
+    <a:masterClrMapping/>
+  </p:clrMapOvr>
+</p:notes>
+</file>
+
+<file path=ppt/notesSlides/notesSlide9.xml><?xml version="1.0" encoding="utf-8"?>
+<p:notes xmlns:a="http://schemas.openxmlformats.org/drawingml/2006/main" xmlns:p="http://schemas.openxmlformats.org/presentationml/2006/main" xmlns:r="http://schemas.openxmlformats.org/officeDocument/2006/relationships">
+  <p:cSld>
+    <p:spTree>
+      <p:nvGrpSpPr>
+        <p:cNvPr id="1" name=""/>
+        <p:cNvGrpSpPr/>
+        <p:nvPr/>
+      </p:nvGrpSpPr>
+      <p:grpSpPr>
+        <a:xfrm>
+          <a:off x="0" y="0"/>
+          <a:ext cx="0" cy="0"/>
+          <a:chOff x="0" y="0"/>
+          <a:chExt cx="0" cy="0"/>
+        </a:xfrm>
+      </p:grpSpPr>
+      <p:sp>
+        <p:nvSpPr>
+          <p:cNvPr id="2" name="Slide Image Placeholder 1"/>
+          <p:cNvSpPr>
+            <a:spLocks noGrp="1"/>
+          </p:cNvSpPr>
+          <p:nvPr>
+            <p:ph type="sldImg" idx="2"/>
+          </p:nvPr>
+        </p:nvSpPr>
+        <p:spPr/>
+      </p:sp>
+      <p:sp>
+        <p:nvSpPr>
+          <p:cNvPr id="3" name="Notes Placeholder 2"/>
+          <p:cNvSpPr>
+            <a:spLocks noGrp="1"/>
+          </p:cNvSpPr>
+          <p:nvPr>
+            <p:ph type="body" idx="3" sz="quarter"/>
+          </p:nvPr>
+        </p:nvSpPr>
+        <p:spPr/>
+        <p:txBody>
+          <a:bodyPr/>
+          <a:lstStyle/>
+          <a:p>
+            <a:r>
+              <a:t>Concept diagram: What you built.</a:t>
             </a:r>
           </a:p>
         </p:txBody>
@@ -4254,6 +4325,372 @@
 </p:sld>
 </file>
 
+<file path=ppt/slides/slide10.xml><?xml version="1.0" encoding="utf-8"?>
+<p:sld xmlns:a="http://schemas.openxmlformats.org/drawingml/2006/main" xmlns:p="http://schemas.openxmlformats.org/presentationml/2006/main" xmlns:r="http://schemas.openxmlformats.org/officeDocument/2006/relationships">
+  <p:cSld>
+    <p:spTree>
+      <p:nvGrpSpPr>
+        <p:cNvPr id="1" name=""/>
+        <p:cNvGrpSpPr/>
+        <p:nvPr/>
+      </p:nvGrpSpPr>
+      <p:grpSpPr/>
+      <p:pic>
+        <p:nvPicPr>
+          <p:cNvPr id="2" name="Picture 1" descr="redhat_logo.jpg"/>
+          <p:cNvPicPr>
+            <a:picLocks noChangeAspect="1"/>
+          </p:cNvPicPr>
+          <p:nvPr/>
+        </p:nvPicPr>
+        <p:blipFill>
+          <a:blip r:embed="rId2"/>
+          <a:stretch>
+            <a:fillRect/>
+          </a:stretch>
+        </p:blipFill>
+        <p:spPr>
+          <a:xfrm>
+            <a:off x="10326319" y="475488"/>
+            <a:ext cx="1024128" cy="242248"/>
+          </a:xfrm>
+          <a:prstGeom prst="rect">
+            <a:avLst/>
+          </a:prstGeom>
+        </p:spPr>
+      </p:pic>
+      <p:sp>
+        <p:nvSpPr>
+          <p:cNvPr id="3" name="TextBox 2"/>
+          <p:cNvSpPr txBox="1"/>
+          <p:nvPr/>
+        </p:nvSpPr>
+        <p:spPr>
+          <a:xfrm>
+            <a:off x="841248" y="548640"/>
+            <a:ext cx="8595360" cy="274320"/>
+          </a:xfrm>
+          <a:prstGeom prst="rect">
+            <a:avLst/>
+          </a:prstGeom>
+          <a:noFill/>
+        </p:spPr>
+        <p:txBody>
+          <a:bodyPr wrap="square" anchor="t" lIns="0" rIns="0" tIns="0" bIns="0">
+            <a:spAutoFit/>
+          </a:bodyPr>
+          <a:lstStyle/>
+          <a:p>
+            <a:pPr algn="l">
+              <a:lnSpc>
+                <a:spcPct val="106000"/>
+              </a:lnSpc>
+              <a:spcBef>
+                <a:spcPts val="0"/>
+              </a:spcBef>
+              <a:spcAft>
+                <a:spcPts val="0"/>
+              </a:spcAft>
+            </a:pPr>
+            <a:r>
+              <a:rPr sz="1250" b="1" spc="220">
+                <a:solidFill>
+                  <a:srgbClr val="EE0000"/>
+                </a:solidFill>
+                <a:latin typeface="Red Hat Display"/>
+              </a:rPr>
+              <a:t>M21 · EVENTING DEEP-DIVE &amp; SERVERLESS WORKFLOWS</a:t>
+            </a:r>
+          </a:p>
+        </p:txBody>
+      </p:sp>
+      <p:sp>
+        <p:nvSpPr>
+          <p:cNvPr id="4" name="TextBox 3"/>
+          <p:cNvSpPr txBox="1"/>
+          <p:nvPr/>
+        </p:nvSpPr>
+        <p:spPr>
+          <a:xfrm>
+            <a:off x="841248" y="877824"/>
+            <a:ext cx="10515600" cy="548640"/>
+          </a:xfrm>
+          <a:prstGeom prst="rect">
+            <a:avLst/>
+          </a:prstGeom>
+          <a:noFill/>
+        </p:spPr>
+        <p:txBody>
+          <a:bodyPr wrap="none" anchor="t" lIns="0" rIns="0" tIns="0" bIns="0">
+            <a:spAutoFit/>
+          </a:bodyPr>
+          <a:lstStyle/>
+          <a:p>
+            <a:pPr algn="l">
+              <a:lnSpc>
+                <a:spcPct val="100000"/>
+              </a:lnSpc>
+              <a:spcBef>
+                <a:spcPts val="0"/>
+              </a:spcBef>
+              <a:spcAft>
+                <a:spcPts val="0"/>
+              </a:spcAft>
+            </a:pPr>
+            <a:r>
+              <a:rPr sz="2500" b="1">
+                <a:solidFill>
+                  <a:srgbClr val="1A1A1A"/>
+                </a:solidFill>
+                <a:latin typeface="Red Hat Display"/>
+              </a:rPr>
+              <a:t>What you built</a:t>
+            </a:r>
+          </a:p>
+        </p:txBody>
+      </p:sp>
+      <p:cxnSp>
+        <p:nvCxnSpPr>
+          <p:cNvPr id="5" name="Connector 4"/>
+          <p:cNvCxnSpPr/>
+          <p:nvPr/>
+        </p:nvCxnSpPr>
+        <p:spPr>
+          <a:xfrm>
+            <a:off x="841248" y="1554480"/>
+            <a:ext cx="1371600" cy="0"/>
+          </a:xfrm>
+          <a:prstGeom prst="bentConnector3">
+            <a:avLst/>
+          </a:prstGeom>
+          <a:ln w="31750">
+            <a:solidFill>
+              <a:srgbClr val="EE0000"/>
+            </a:solidFill>
+          </a:ln>
+          <a:effectLst/>
+        </p:spPr>
+        <p:style>
+          <a:lnRef idx="2">
+            <a:schemeClr val="accent1"/>
+          </a:lnRef>
+          <a:fillRef idx="0">
+            <a:schemeClr val="accent1"/>
+          </a:fillRef>
+          <a:effectRef idx="1">
+            <a:schemeClr val="accent1"/>
+          </a:effectRef>
+          <a:fontRef idx="minor">
+            <a:schemeClr val="tx1"/>
+          </a:fontRef>
+        </p:style>
+      </p:cxnSp>
+      <p:sp>
+        <p:nvSpPr>
+          <p:cNvPr id="6" name="Rounded Rectangle 5"/>
+          <p:cNvSpPr/>
+          <p:nvPr/>
+        </p:nvSpPr>
+        <p:spPr>
+          <a:xfrm>
+            <a:off x="841248" y="2331720"/>
+            <a:ext cx="10509199" cy="3794760"/>
+          </a:xfrm>
+          <a:prstGeom prst="roundRect">
+            <a:avLst>
+              <a:gd name="adj" fmla="val 4000"/>
+            </a:avLst>
+          </a:prstGeom>
+          <a:solidFill>
+            <a:srgbClr val="FFFFFF"/>
+          </a:solidFill>
+          <a:ln w="15240">
+            <a:solidFill>
+              <a:srgbClr val="DDE1E6"/>
+            </a:solidFill>
+          </a:ln>
+          <a:effectLst/>
+        </p:spPr>
+        <p:style>
+          <a:lnRef idx="1">
+            <a:schemeClr val="accent1"/>
+          </a:lnRef>
+          <a:fillRef idx="3">
+            <a:schemeClr val="accent1"/>
+          </a:fillRef>
+          <a:effectRef idx="2">
+            <a:schemeClr val="accent1"/>
+          </a:effectRef>
+          <a:fontRef idx="minor">
+            <a:schemeClr val="lt1"/>
+          </a:fontRef>
+        </p:style>
+        <p:txBody>
+          <a:bodyPr rtlCol="0" anchor="ctr"/>
+          <a:lstStyle/>
+          <a:p>
+            <a:pPr algn="ctr"/>
+          </a:p>
+        </p:txBody>
+      </p:sp>
+      <p:pic>
+        <p:nvPicPr>
+          <p:cNvPr id="7" name="Picture 6" descr="03-what-you-built.png"/>
+          <p:cNvPicPr>
+            <a:picLocks noChangeAspect="1"/>
+          </p:cNvPicPr>
+          <p:nvPr/>
+        </p:nvPicPr>
+        <p:blipFill>
+          <a:blip r:embed="rId3"/>
+          <a:stretch>
+            <a:fillRect/>
+          </a:stretch>
+        </p:blipFill>
+        <p:spPr>
+          <a:xfrm>
+            <a:off x="3483779" y="2532888"/>
+            <a:ext cx="5224137" cy="3392424"/>
+          </a:xfrm>
+          <a:prstGeom prst="rect">
+            <a:avLst/>
+          </a:prstGeom>
+        </p:spPr>
+      </p:pic>
+      <p:cxnSp>
+        <p:nvCxnSpPr>
+          <p:cNvPr id="8" name="Connector 7"/>
+          <p:cNvCxnSpPr/>
+          <p:nvPr/>
+        </p:nvCxnSpPr>
+        <p:spPr>
+          <a:xfrm>
+            <a:off x="841248" y="6437376"/>
+            <a:ext cx="10509199" cy="0"/>
+          </a:xfrm>
+          <a:prstGeom prst="bentConnector3">
+            <a:avLst/>
+          </a:prstGeom>
+          <a:ln w="12700">
+            <a:solidFill>
+              <a:srgbClr val="DDE1E6"/>
+            </a:solidFill>
+          </a:ln>
+          <a:effectLst/>
+        </p:spPr>
+        <p:style>
+          <a:lnRef idx="2">
+            <a:schemeClr val="accent1"/>
+          </a:lnRef>
+          <a:fillRef idx="0">
+            <a:schemeClr val="accent1"/>
+          </a:fillRef>
+          <a:effectRef idx="1">
+            <a:schemeClr val="accent1"/>
+          </a:effectRef>
+          <a:fontRef idx="minor">
+            <a:schemeClr val="tx1"/>
+          </a:fontRef>
+        </p:style>
+      </p:cxnSp>
+      <p:sp>
+        <p:nvSpPr>
+          <p:cNvPr id="9" name="TextBox 8"/>
+          <p:cNvSpPr txBox="1"/>
+          <p:nvPr/>
+        </p:nvSpPr>
+        <p:spPr>
+          <a:xfrm>
+            <a:off x="841248" y="6473952"/>
+            <a:ext cx="7315200" cy="274320"/>
+          </a:xfrm>
+          <a:prstGeom prst="rect">
+            <a:avLst/>
+          </a:prstGeom>
+          <a:noFill/>
+        </p:spPr>
+        <p:txBody>
+          <a:bodyPr wrap="square" anchor="t" lIns="0" rIns="0" tIns="0" bIns="0">
+            <a:spAutoFit/>
+          </a:bodyPr>
+          <a:lstStyle/>
+          <a:p>
+            <a:pPr algn="l">
+              <a:lnSpc>
+                <a:spcPct val="106000"/>
+              </a:lnSpc>
+              <a:spcBef>
+                <a:spcPts val="0"/>
+              </a:spcBef>
+              <a:spcAft>
+                <a:spcPts val="0"/>
+              </a:spcAft>
+            </a:pPr>
+            <a:r>
+              <a:rPr sz="950" b="0">
+                <a:solidFill>
+                  <a:srgbClr val="8A9099"/>
+                </a:solidFill>
+                <a:latin typeface="Red Hat Text"/>
+              </a:rPr>
+              <a:t>CONFIDENTIAL</a:t>
+            </a:r>
+          </a:p>
+        </p:txBody>
+      </p:sp>
+      <p:sp>
+        <p:nvSpPr>
+          <p:cNvPr id="10" name="TextBox 9"/>
+          <p:cNvSpPr txBox="1"/>
+          <p:nvPr/>
+        </p:nvSpPr>
+        <p:spPr>
+          <a:xfrm>
+            <a:off x="10801807" y="6473952"/>
+            <a:ext cx="548640" cy="274320"/>
+          </a:xfrm>
+          <a:prstGeom prst="rect">
+            <a:avLst/>
+          </a:prstGeom>
+          <a:noFill/>
+        </p:spPr>
+        <p:txBody>
+          <a:bodyPr wrap="square" anchor="t" lIns="0" rIns="0" tIns="0" bIns="0">
+            <a:spAutoFit/>
+          </a:bodyPr>
+          <a:lstStyle/>
+          <a:p>
+            <a:pPr algn="r">
+              <a:lnSpc>
+                <a:spcPct val="106000"/>
+              </a:lnSpc>
+              <a:spcBef>
+                <a:spcPts val="0"/>
+              </a:spcBef>
+              <a:spcAft>
+                <a:spcPts val="0"/>
+              </a:spcAft>
+            </a:pPr>
+            <a:r>
+              <a:rPr sz="950" b="0">
+                <a:solidFill>
+                  <a:srgbClr val="8A9099"/>
+                </a:solidFill>
+                <a:latin typeface="Red Hat Text"/>
+              </a:rPr>
+              <a:t>9</a:t>
+            </a:r>
+          </a:p>
+        </p:txBody>
+      </p:sp>
+    </p:spTree>
+  </p:cSld>
+  <p:clrMapOvr>
+    <a:masterClrMapping/>
+  </p:clrMapOvr>
+</p:sld>
+</file>
+
 <file path=ppt/slides/slide2.xml><?xml version="1.0" encoding="utf-8"?>
 <p:sld xmlns:a="http://schemas.openxmlformats.org/drawingml/2006/main" xmlns:p="http://schemas.openxmlformats.org/presentationml/2006/main" xmlns:r="http://schemas.openxmlformats.org/officeDocument/2006/relationships">
   <p:cSld>
@@ -4423,11 +4860,11 @@
         <p:spPr>
           <a:xfrm>
             <a:off x="841248" y="2395728"/>
-            <a:ext cx="5715000" cy="530352"/>
+            <a:ext cx="5138928" cy="786384"/>
           </a:xfrm>
           <a:prstGeom prst="roundRect">
             <a:avLst>
-              <a:gd name="adj" fmla="val 6000"/>
+              <a:gd name="adj" fmla="val 7000"/>
             </a:avLst>
           </a:prstGeom>
           <a:solidFill>
@@ -4462,9 +4899,55 @@
           </a:p>
         </p:txBody>
       </p:sp>
+      <p:sp>
+        <p:nvSpPr>
+          <p:cNvPr id="7" name="Rounded Rectangle 6"/>
+          <p:cNvSpPr/>
+          <p:nvPr/>
+        </p:nvSpPr>
+        <p:spPr>
+          <a:xfrm>
+            <a:off x="987552" y="2532888"/>
+            <a:ext cx="512064" cy="512064"/>
+          </a:xfrm>
+          <a:prstGeom prst="roundRect">
+            <a:avLst>
+              <a:gd name="adj" fmla="val 26000"/>
+            </a:avLst>
+          </a:prstGeom>
+          <a:solidFill>
+            <a:srgbClr val="EE0000"/>
+          </a:solidFill>
+          <a:ln>
+            <a:noFill/>
+          </a:ln>
+          <a:effectLst/>
+        </p:spPr>
+        <p:style>
+          <a:lnRef idx="1">
+            <a:schemeClr val="accent1"/>
+          </a:lnRef>
+          <a:fillRef idx="3">
+            <a:schemeClr val="accent1"/>
+          </a:fillRef>
+          <a:effectRef idx="2">
+            <a:schemeClr val="accent1"/>
+          </a:effectRef>
+          <a:fontRef idx="minor">
+            <a:schemeClr val="lt1"/>
+          </a:fontRef>
+        </p:style>
+        <p:txBody>
+          <a:bodyPr rtlCol="0" anchor="ctr"/>
+          <a:lstStyle/>
+          <a:p>
+            <a:pPr algn="ctr"/>
+          </a:p>
+        </p:txBody>
+      </p:sp>
       <p:pic>
         <p:nvPicPr>
-          <p:cNvPr id="7" name="Picture 6" descr="check_steel.png"/>
+          <p:cNvPr id="8" name="Picture 7" descr="check_white.png"/>
           <p:cNvPicPr>
             <a:picLocks noChangeAspect="1"/>
           </p:cNvPicPr>
@@ -4478,8 +4961,8 @@
         </p:blipFill>
         <p:spPr>
           <a:xfrm>
-            <a:off x="987552" y="2542032"/>
-            <a:ext cx="237744" cy="237744"/>
+            <a:off x="1110447" y="2655783"/>
+            <a:ext cx="266273" cy="266273"/>
           </a:xfrm>
           <a:prstGeom prst="rect">
             <a:avLst/>
@@ -4488,14 +4971,14 @@
       </p:pic>
       <p:sp>
         <p:nvSpPr>
-          <p:cNvPr id="8" name="TextBox 7"/>
+          <p:cNvPr id="9" name="TextBox 8"/>
           <p:cNvSpPr txBox="1"/>
           <p:nvPr/>
         </p:nvSpPr>
         <p:spPr>
           <a:xfrm>
-            <a:off x="1353312" y="2395728"/>
-            <a:ext cx="5029200" cy="530352"/>
+            <a:off x="1627632" y="2395728"/>
+            <a:ext cx="4206240" cy="786384"/>
           </a:xfrm>
           <a:prstGeom prst="rect">
             <a:avLst/>
@@ -4520,7 +5003,7 @@
               </a:spcAft>
             </a:pPr>
             <a:r>
-              <a:rPr sz="1200" b="0">
+              <a:rPr sz="1150" b="0">
                 <a:solidFill>
                   <a:srgbClr val="1A1A1A"/>
                 </a:solidFill>
@@ -4533,18 +5016,18 @@
       </p:sp>
       <p:sp>
         <p:nvSpPr>
-          <p:cNvPr id="9" name="Rounded Rectangle 8"/>
+          <p:cNvPr id="10" name="Rounded Rectangle 9"/>
           <p:cNvSpPr/>
           <p:nvPr/>
         </p:nvSpPr>
         <p:spPr>
           <a:xfrm>
-            <a:off x="841248" y="2999232"/>
-            <a:ext cx="5715000" cy="530352"/>
+            <a:off x="6254496" y="2395728"/>
+            <a:ext cx="5138928" cy="786384"/>
           </a:xfrm>
           <a:prstGeom prst="roundRect">
             <a:avLst>
-              <a:gd name="adj" fmla="val 6000"/>
+              <a:gd name="adj" fmla="val 7000"/>
             </a:avLst>
           </a:prstGeom>
           <a:solidFill>
@@ -4579,9 +5062,55 @@
           </a:p>
         </p:txBody>
       </p:sp>
+      <p:sp>
+        <p:nvSpPr>
+          <p:cNvPr id="11" name="Rounded Rectangle 10"/>
+          <p:cNvSpPr/>
+          <p:nvPr/>
+        </p:nvSpPr>
+        <p:spPr>
+          <a:xfrm>
+            <a:off x="6400800" y="2532888"/>
+            <a:ext cx="512064" cy="512064"/>
+          </a:xfrm>
+          <a:prstGeom prst="roundRect">
+            <a:avLst>
+              <a:gd name="adj" fmla="val 26000"/>
+            </a:avLst>
+          </a:prstGeom>
+          <a:solidFill>
+            <a:srgbClr val="EE0000"/>
+          </a:solidFill>
+          <a:ln>
+            <a:noFill/>
+          </a:ln>
+          <a:effectLst/>
+        </p:spPr>
+        <p:style>
+          <a:lnRef idx="1">
+            <a:schemeClr val="accent1"/>
+          </a:lnRef>
+          <a:fillRef idx="3">
+            <a:schemeClr val="accent1"/>
+          </a:fillRef>
+          <a:effectRef idx="2">
+            <a:schemeClr val="accent1"/>
+          </a:effectRef>
+          <a:fontRef idx="minor">
+            <a:schemeClr val="lt1"/>
+          </a:fontRef>
+        </p:style>
+        <p:txBody>
+          <a:bodyPr rtlCol="0" anchor="ctr"/>
+          <a:lstStyle/>
+          <a:p>
+            <a:pPr algn="ctr"/>
+          </a:p>
+        </p:txBody>
+      </p:sp>
       <p:pic>
         <p:nvPicPr>
-          <p:cNvPr id="10" name="Picture 9" descr="check_steel.png"/>
+          <p:cNvPr id="12" name="Picture 11" descr="check_white.png"/>
           <p:cNvPicPr>
             <a:picLocks noChangeAspect="1"/>
           </p:cNvPicPr>
@@ -4595,8 +5124,8 @@
         </p:blipFill>
         <p:spPr>
           <a:xfrm>
-            <a:off x="987552" y="3145536"/>
-            <a:ext cx="237744" cy="237744"/>
+            <a:off x="6523695" y="2655783"/>
+            <a:ext cx="266273" cy="266273"/>
           </a:xfrm>
           <a:prstGeom prst="rect">
             <a:avLst/>
@@ -4605,14 +5134,14 @@
       </p:pic>
       <p:sp>
         <p:nvSpPr>
-          <p:cNvPr id="11" name="TextBox 10"/>
+          <p:cNvPr id="13" name="TextBox 12"/>
           <p:cNvSpPr txBox="1"/>
           <p:nvPr/>
         </p:nvSpPr>
         <p:spPr>
           <a:xfrm>
-            <a:off x="1353312" y="2999232"/>
-            <a:ext cx="5029200" cy="530352"/>
+            <a:off x="7040880" y="2395728"/>
+            <a:ext cx="4206240" cy="786384"/>
           </a:xfrm>
           <a:prstGeom prst="rect">
             <a:avLst/>
@@ -4637,7 +5166,7 @@
               </a:spcAft>
             </a:pPr>
             <a:r>
-              <a:rPr sz="1200" b="0">
+              <a:rPr sz="1150" b="0">
                 <a:solidFill>
                   <a:srgbClr val="1A1A1A"/>
                 </a:solidFill>
@@ -4650,18 +5179,18 @@
       </p:sp>
       <p:sp>
         <p:nvSpPr>
-          <p:cNvPr id="12" name="Rounded Rectangle 11"/>
+          <p:cNvPr id="14" name="Rounded Rectangle 13"/>
           <p:cNvSpPr/>
           <p:nvPr/>
         </p:nvSpPr>
         <p:spPr>
           <a:xfrm>
-            <a:off x="841248" y="3602736"/>
-            <a:ext cx="5715000" cy="530352"/>
+            <a:off x="841248" y="3328416"/>
+            <a:ext cx="5138928" cy="786384"/>
           </a:xfrm>
           <a:prstGeom prst="roundRect">
             <a:avLst>
-              <a:gd name="adj" fmla="val 6000"/>
+              <a:gd name="adj" fmla="val 7000"/>
             </a:avLst>
           </a:prstGeom>
           <a:solidFill>
@@ -4696,9 +5225,55 @@
           </a:p>
         </p:txBody>
       </p:sp>
+      <p:sp>
+        <p:nvSpPr>
+          <p:cNvPr id="15" name="Rounded Rectangle 14"/>
+          <p:cNvSpPr/>
+          <p:nvPr/>
+        </p:nvSpPr>
+        <p:spPr>
+          <a:xfrm>
+            <a:off x="987552" y="3465576"/>
+            <a:ext cx="512064" cy="512064"/>
+          </a:xfrm>
+          <a:prstGeom prst="roundRect">
+            <a:avLst>
+              <a:gd name="adj" fmla="val 26000"/>
+            </a:avLst>
+          </a:prstGeom>
+          <a:solidFill>
+            <a:srgbClr val="EE0000"/>
+          </a:solidFill>
+          <a:ln>
+            <a:noFill/>
+          </a:ln>
+          <a:effectLst/>
+        </p:spPr>
+        <p:style>
+          <a:lnRef idx="1">
+            <a:schemeClr val="accent1"/>
+          </a:lnRef>
+          <a:fillRef idx="3">
+            <a:schemeClr val="accent1"/>
+          </a:fillRef>
+          <a:effectRef idx="2">
+            <a:schemeClr val="accent1"/>
+          </a:effectRef>
+          <a:fontRef idx="minor">
+            <a:schemeClr val="lt1"/>
+          </a:fontRef>
+        </p:style>
+        <p:txBody>
+          <a:bodyPr rtlCol="0" anchor="ctr"/>
+          <a:lstStyle/>
+          <a:p>
+            <a:pPr algn="ctr"/>
+          </a:p>
+        </p:txBody>
+      </p:sp>
       <p:pic>
         <p:nvPicPr>
-          <p:cNvPr id="13" name="Picture 12" descr="check_steel.png"/>
+          <p:cNvPr id="16" name="Picture 15" descr="check_white.png"/>
           <p:cNvPicPr>
             <a:picLocks noChangeAspect="1"/>
           </p:cNvPicPr>
@@ -4712,8 +5287,8 @@
         </p:blipFill>
         <p:spPr>
           <a:xfrm>
-            <a:off x="987552" y="3749040"/>
-            <a:ext cx="237744" cy="237744"/>
+            <a:off x="1110447" y="3588471"/>
+            <a:ext cx="266273" cy="266273"/>
           </a:xfrm>
           <a:prstGeom prst="rect">
             <a:avLst/>
@@ -4722,14 +5297,14 @@
       </p:pic>
       <p:sp>
         <p:nvSpPr>
-          <p:cNvPr id="14" name="TextBox 13"/>
+          <p:cNvPr id="17" name="TextBox 16"/>
           <p:cNvSpPr txBox="1"/>
           <p:nvPr/>
         </p:nvSpPr>
         <p:spPr>
           <a:xfrm>
-            <a:off x="1353312" y="3602736"/>
-            <a:ext cx="5029200" cy="530352"/>
+            <a:off x="1627632" y="3328416"/>
+            <a:ext cx="4206240" cy="786384"/>
           </a:xfrm>
           <a:prstGeom prst="rect">
             <a:avLst/>
@@ -4754,7 +5329,7 @@
               </a:spcAft>
             </a:pPr>
             <a:r>
-              <a:rPr sz="1200" b="0">
+              <a:rPr sz="1150" b="0">
                 <a:solidFill>
                   <a:srgbClr val="1A1A1A"/>
                 </a:solidFill>
@@ -4767,18 +5342,18 @@
       </p:sp>
       <p:sp>
         <p:nvSpPr>
-          <p:cNvPr id="15" name="Rounded Rectangle 14"/>
+          <p:cNvPr id="18" name="Rounded Rectangle 17"/>
           <p:cNvSpPr/>
           <p:nvPr/>
         </p:nvSpPr>
         <p:spPr>
           <a:xfrm>
-            <a:off x="841248" y="4206240"/>
-            <a:ext cx="5715000" cy="530352"/>
+            <a:off x="6254496" y="3328416"/>
+            <a:ext cx="5138928" cy="786384"/>
           </a:xfrm>
           <a:prstGeom prst="roundRect">
             <a:avLst>
-              <a:gd name="adj" fmla="val 6000"/>
+              <a:gd name="adj" fmla="val 7000"/>
             </a:avLst>
           </a:prstGeom>
           <a:solidFill>
@@ -4813,9 +5388,55 @@
           </a:p>
         </p:txBody>
       </p:sp>
+      <p:sp>
+        <p:nvSpPr>
+          <p:cNvPr id="19" name="Rounded Rectangle 18"/>
+          <p:cNvSpPr/>
+          <p:nvPr/>
+        </p:nvSpPr>
+        <p:spPr>
+          <a:xfrm>
+            <a:off x="6400800" y="3465576"/>
+            <a:ext cx="512064" cy="512064"/>
+          </a:xfrm>
+          <a:prstGeom prst="roundRect">
+            <a:avLst>
+              <a:gd name="adj" fmla="val 26000"/>
+            </a:avLst>
+          </a:prstGeom>
+          <a:solidFill>
+            <a:srgbClr val="EE0000"/>
+          </a:solidFill>
+          <a:ln>
+            <a:noFill/>
+          </a:ln>
+          <a:effectLst/>
+        </p:spPr>
+        <p:style>
+          <a:lnRef idx="1">
+            <a:schemeClr val="accent1"/>
+          </a:lnRef>
+          <a:fillRef idx="3">
+            <a:schemeClr val="accent1"/>
+          </a:fillRef>
+          <a:effectRef idx="2">
+            <a:schemeClr val="accent1"/>
+          </a:effectRef>
+          <a:fontRef idx="minor">
+            <a:schemeClr val="lt1"/>
+          </a:fontRef>
+        </p:style>
+        <p:txBody>
+          <a:bodyPr rtlCol="0" anchor="ctr"/>
+          <a:lstStyle/>
+          <a:p>
+            <a:pPr algn="ctr"/>
+          </a:p>
+        </p:txBody>
+      </p:sp>
       <p:pic>
         <p:nvPicPr>
-          <p:cNvPr id="16" name="Picture 15" descr="check_steel.png"/>
+          <p:cNvPr id="20" name="Picture 19" descr="check_white.png"/>
           <p:cNvPicPr>
             <a:picLocks noChangeAspect="1"/>
           </p:cNvPicPr>
@@ -4829,8 +5450,8 @@
         </p:blipFill>
         <p:spPr>
           <a:xfrm>
-            <a:off x="987552" y="4352544"/>
-            <a:ext cx="237744" cy="237744"/>
+            <a:off x="6523695" y="3588471"/>
+            <a:ext cx="266273" cy="266273"/>
           </a:xfrm>
           <a:prstGeom prst="rect">
             <a:avLst/>
@@ -4839,14 +5460,14 @@
       </p:pic>
       <p:sp>
         <p:nvSpPr>
-          <p:cNvPr id="17" name="TextBox 16"/>
+          <p:cNvPr id="21" name="TextBox 20"/>
           <p:cNvSpPr txBox="1"/>
           <p:nvPr/>
         </p:nvSpPr>
         <p:spPr>
           <a:xfrm>
-            <a:off x="1353312" y="4206240"/>
-            <a:ext cx="5029200" cy="530352"/>
+            <a:off x="7040880" y="3328416"/>
+            <a:ext cx="4206240" cy="786384"/>
           </a:xfrm>
           <a:prstGeom prst="rect">
             <a:avLst/>
@@ -4871,7 +5492,7 @@
               </a:spcAft>
             </a:pPr>
             <a:r>
-              <a:rPr sz="1200" b="0">
+              <a:rPr sz="1150" b="0">
                 <a:solidFill>
                   <a:srgbClr val="1A1A1A"/>
                 </a:solidFill>
@@ -4884,18 +5505,18 @@
       </p:sp>
       <p:sp>
         <p:nvSpPr>
-          <p:cNvPr id="18" name="Rounded Rectangle 17"/>
+          <p:cNvPr id="22" name="Rounded Rectangle 21"/>
           <p:cNvSpPr/>
           <p:nvPr/>
         </p:nvSpPr>
         <p:spPr>
           <a:xfrm>
-            <a:off x="841248" y="4809744"/>
-            <a:ext cx="5715000" cy="530352"/>
+            <a:off x="841248" y="4261104"/>
+            <a:ext cx="5138928" cy="786384"/>
           </a:xfrm>
           <a:prstGeom prst="roundRect">
             <a:avLst>
-              <a:gd name="adj" fmla="val 6000"/>
+              <a:gd name="adj" fmla="val 7000"/>
             </a:avLst>
           </a:prstGeom>
           <a:solidFill>
@@ -4930,9 +5551,55 @@
           </a:p>
         </p:txBody>
       </p:sp>
+      <p:sp>
+        <p:nvSpPr>
+          <p:cNvPr id="23" name="Rounded Rectangle 22"/>
+          <p:cNvSpPr/>
+          <p:nvPr/>
+        </p:nvSpPr>
+        <p:spPr>
+          <a:xfrm>
+            <a:off x="987552" y="4398264"/>
+            <a:ext cx="512064" cy="512064"/>
+          </a:xfrm>
+          <a:prstGeom prst="roundRect">
+            <a:avLst>
+              <a:gd name="adj" fmla="val 26000"/>
+            </a:avLst>
+          </a:prstGeom>
+          <a:solidFill>
+            <a:srgbClr val="EE0000"/>
+          </a:solidFill>
+          <a:ln>
+            <a:noFill/>
+          </a:ln>
+          <a:effectLst/>
+        </p:spPr>
+        <p:style>
+          <a:lnRef idx="1">
+            <a:schemeClr val="accent1"/>
+          </a:lnRef>
+          <a:fillRef idx="3">
+            <a:schemeClr val="accent1"/>
+          </a:fillRef>
+          <a:effectRef idx="2">
+            <a:schemeClr val="accent1"/>
+          </a:effectRef>
+          <a:fontRef idx="minor">
+            <a:schemeClr val="lt1"/>
+          </a:fontRef>
+        </p:style>
+        <p:txBody>
+          <a:bodyPr rtlCol="0" anchor="ctr"/>
+          <a:lstStyle/>
+          <a:p>
+            <a:pPr algn="ctr"/>
+          </a:p>
+        </p:txBody>
+      </p:sp>
       <p:pic>
         <p:nvPicPr>
-          <p:cNvPr id="19" name="Picture 18" descr="check_steel.png"/>
+          <p:cNvPr id="24" name="Picture 23" descr="check_white.png"/>
           <p:cNvPicPr>
             <a:picLocks noChangeAspect="1"/>
           </p:cNvPicPr>
@@ -4946,8 +5613,8 @@
         </p:blipFill>
         <p:spPr>
           <a:xfrm>
-            <a:off x="987552" y="4956048"/>
-            <a:ext cx="237744" cy="237744"/>
+            <a:off x="1110447" y="4521159"/>
+            <a:ext cx="266273" cy="266273"/>
           </a:xfrm>
           <a:prstGeom prst="rect">
             <a:avLst/>
@@ -4956,14 +5623,14 @@
       </p:pic>
       <p:sp>
         <p:nvSpPr>
-          <p:cNvPr id="20" name="TextBox 19"/>
+          <p:cNvPr id="25" name="TextBox 24"/>
           <p:cNvSpPr txBox="1"/>
           <p:nvPr/>
         </p:nvSpPr>
         <p:spPr>
           <a:xfrm>
-            <a:off x="1353312" y="4809744"/>
-            <a:ext cx="5029200" cy="530352"/>
+            <a:off x="1627632" y="4261104"/>
+            <a:ext cx="4206240" cy="786384"/>
           </a:xfrm>
           <a:prstGeom prst="rect">
             <a:avLst/>
@@ -4988,221 +5655,13 @@
               </a:spcAft>
             </a:pPr>
             <a:r>
-              <a:rPr sz="1200" b="0">
+              <a:rPr sz="1150" b="0">
                 <a:solidFill>
                   <a:srgbClr val="1A1A1A"/>
                 </a:solidFill>
                 <a:latin typeface="Red Hat Text"/>
               </a:rPr>
               <a:t>Consumers SUBSCRIBE; the producer never learns who's listening</a:t>
-            </a:r>
-          </a:p>
-        </p:txBody>
-      </p:sp>
-      <p:sp>
-        <p:nvSpPr>
-          <p:cNvPr id="21" name="Rounded Rectangle 20"/>
-          <p:cNvSpPr/>
-          <p:nvPr/>
-        </p:nvSpPr>
-        <p:spPr>
-          <a:xfrm>
-            <a:off x="6812280" y="2395728"/>
-            <a:ext cx="4538167" cy="2944368"/>
-          </a:xfrm>
-          <a:prstGeom prst="roundRect">
-            <a:avLst>
-              <a:gd name="adj" fmla="val 4000"/>
-            </a:avLst>
-          </a:prstGeom>
-          <a:solidFill>
-            <a:srgbClr val="FFFFFF"/>
-          </a:solidFill>
-          <a:ln w="15240">
-            <a:solidFill>
-              <a:srgbClr val="DDE1E6"/>
-            </a:solidFill>
-          </a:ln>
-          <a:effectLst/>
-        </p:spPr>
-        <p:style>
-          <a:lnRef idx="1">
-            <a:schemeClr val="accent1"/>
-          </a:lnRef>
-          <a:fillRef idx="3">
-            <a:schemeClr val="accent1"/>
-          </a:fillRef>
-          <a:effectRef idx="2">
-            <a:schemeClr val="accent1"/>
-          </a:effectRef>
-          <a:fontRef idx="minor">
-            <a:schemeClr val="lt1"/>
-          </a:fontRef>
-        </p:style>
-        <p:txBody>
-          <a:bodyPr rtlCol="0" anchor="ctr"/>
-          <a:lstStyle/>
-          <a:p>
-            <a:pPr algn="ctr"/>
-          </a:p>
-        </p:txBody>
-      </p:sp>
-      <p:sp>
-        <p:nvSpPr>
-          <p:cNvPr id="22" name="Rounded Rectangle 21"/>
-          <p:cNvSpPr/>
-          <p:nvPr/>
-        </p:nvSpPr>
-        <p:spPr>
-          <a:xfrm>
-            <a:off x="7013448" y="2596896"/>
-            <a:ext cx="1298448" cy="310896"/>
-          </a:xfrm>
-          <a:prstGeom prst="roundRect">
-            <a:avLst>
-              <a:gd name="adj" fmla="val 50000"/>
-            </a:avLst>
-          </a:prstGeom>
-          <a:solidFill>
-            <a:srgbClr val="FCECEC"/>
-          </a:solidFill>
-          <a:ln>
-            <a:noFill/>
-          </a:ln>
-          <a:effectLst/>
-        </p:spPr>
-        <p:style>
-          <a:lnRef idx="1">
-            <a:schemeClr val="accent1"/>
-          </a:lnRef>
-          <a:fillRef idx="3">
-            <a:schemeClr val="accent1"/>
-          </a:fillRef>
-          <a:effectRef idx="2">
-            <a:schemeClr val="accent1"/>
-          </a:effectRef>
-          <a:fontRef idx="minor">
-            <a:schemeClr val="lt1"/>
-          </a:fontRef>
-        </p:style>
-        <p:txBody>
-          <a:bodyPr rtlCol="0" anchor="ctr"/>
-          <a:lstStyle/>
-          <a:p>
-            <a:pPr algn="ctr"/>
-          </a:p>
-        </p:txBody>
-      </p:sp>
-      <p:sp>
-        <p:nvSpPr>
-          <p:cNvPr id="23" name="TextBox 22"/>
-          <p:cNvSpPr txBox="1"/>
-          <p:nvPr/>
-        </p:nvSpPr>
-        <p:spPr>
-          <a:xfrm>
-            <a:off x="7013448" y="2596896"/>
-            <a:ext cx="1298448" cy="310896"/>
-          </a:xfrm>
-          <a:prstGeom prst="rect">
-            <a:avLst/>
-          </a:prstGeom>
-          <a:noFill/>
-        </p:spPr>
-        <p:txBody>
-          <a:bodyPr wrap="none" anchor="ctr" lIns="0" rIns="0" tIns="0" bIns="0">
-            <a:spAutoFit/>
-          </a:bodyPr>
-          <a:lstStyle/>
-          <a:p>
-            <a:pPr algn="ctr">
-              <a:lnSpc>
-                <a:spcPct val="106000"/>
-              </a:lnSpc>
-              <a:spcBef>
-                <a:spcPts val="0"/>
-              </a:spcBef>
-              <a:spcAft>
-                <a:spcPts val="0"/>
-              </a:spcAft>
-            </a:pPr>
-            <a:r>
-              <a:rPr sz="850" b="1">
-                <a:solidFill>
-                  <a:srgbClr val="B80000"/>
-                </a:solidFill>
-                <a:latin typeface="Red Hat Display"/>
-              </a:rPr>
-              <a:t>MEDIA PASS</a:t>
-            </a:r>
-          </a:p>
-        </p:txBody>
-      </p:sp>
-      <p:pic>
-        <p:nvPicPr>
-          <p:cNvPr id="24" name="Picture 23" descr="eye_slate.png"/>
-          <p:cNvPicPr>
-            <a:picLocks noChangeAspect="1"/>
-          </p:cNvPicPr>
-          <p:nvPr/>
-        </p:nvPicPr>
-        <p:blipFill>
-          <a:blip r:embed="rId4"/>
-          <a:stretch>
-            <a:fillRect/>
-          </a:stretch>
-        </p:blipFill>
-        <p:spPr>
-          <a:xfrm>
-            <a:off x="8843619" y="3108960"/>
-            <a:ext cx="475488" cy="475488"/>
-          </a:xfrm>
-          <a:prstGeom prst="rect">
-            <a:avLst/>
-          </a:prstGeom>
-        </p:spPr>
-      </p:pic>
-      <p:sp>
-        <p:nvSpPr>
-          <p:cNvPr id="25" name="TextBox 24"/>
-          <p:cNvSpPr txBox="1"/>
-          <p:nvPr/>
-        </p:nvSpPr>
-        <p:spPr>
-          <a:xfrm>
-            <a:off x="7050024" y="3721608"/>
-            <a:ext cx="4062679" cy="1481328"/>
-          </a:xfrm>
-          <a:prstGeom prst="rect">
-            <a:avLst/>
-          </a:prstGeom>
-          <a:noFill/>
-        </p:spPr>
-        <p:txBody>
-          <a:bodyPr wrap="square" anchor="t" lIns="0" rIns="0" tIns="0" bIns="0">
-            <a:spAutoFit/>
-          </a:bodyPr>
-          <a:lstStyle/>
-          <a:p>
-            <a:pPr algn="l">
-              <a:lnSpc>
-                <a:spcPct val="120000"/>
-              </a:lnSpc>
-              <a:spcBef>
-                <a:spcPts val="0"/>
-              </a:spcBef>
-              <a:spcAft>
-                <a:spcPts val="0"/>
-              </a:spcAft>
-            </a:pPr>
-            <a:r>
-              <a:rPr sz="950" b="0">
-                <a:solidFill>
-                  <a:srgbClr val="8A9099"/>
-                </a:solidFill>
-                <a:latin typeface="Red Hat Text"/>
-              </a:rPr>
-              <a:t>Left panel "Direct calls": a claims box with four arrows fanning out to fraud/audit/notify/investigations, each arrow labeled with an address, the whole thing tangled and tinted red ("coupled: producer knows every consumer"). Right panel "Eventing": the claims box emits one arrow to a Broker hub; four consumers hang off the broker via labeled triggers, green ("decoupled: producer knows nothing"). A big equals-sign-turned-arrow between the panels.</a:t>
             </a:r>
           </a:p>
         </p:txBody>
@@ -5555,7 +6014,7 @@
         <p:spPr>
           <a:xfrm>
             <a:off x="841248" y="2670048"/>
-            <a:ext cx="5715000" cy="530352"/>
+            <a:ext cx="4160520" cy="475488"/>
           </a:xfrm>
           <a:prstGeom prst="roundRect">
             <a:avLst>
@@ -5610,8 +6069,8 @@
         </p:blipFill>
         <p:spPr>
           <a:xfrm>
-            <a:off x="987552" y="2816352"/>
-            <a:ext cx="237744" cy="237744"/>
+            <a:off x="969264" y="2807208"/>
+            <a:ext cx="201168" cy="201168"/>
           </a:xfrm>
           <a:prstGeom prst="rect">
             <a:avLst/>
@@ -5626,8 +6085,8 @@
         </p:nvSpPr>
         <p:spPr>
           <a:xfrm>
-            <a:off x="1353312" y="2670048"/>
-            <a:ext cx="5029200" cy="530352"/>
+            <a:off x="1280160" y="2670048"/>
+            <a:ext cx="3593591" cy="475488"/>
           </a:xfrm>
           <a:prstGeom prst="rect">
             <a:avLst/>
@@ -5652,7 +6111,7 @@
               </a:spcAft>
             </a:pPr>
             <a:r>
-              <a:rPr sz="1200" b="0">
+              <a:rPr sz="1050" b="0">
                 <a:solidFill>
                   <a:srgbClr val="1A1A1A"/>
                 </a:solidFill>
@@ -5671,8 +6130,8 @@
         </p:nvSpPr>
         <p:spPr>
           <a:xfrm>
-            <a:off x="841248" y="3273552"/>
-            <a:ext cx="5715000" cy="530352"/>
+            <a:off x="841248" y="3218688"/>
+            <a:ext cx="4160520" cy="475488"/>
           </a:xfrm>
           <a:prstGeom prst="roundRect">
             <a:avLst>
@@ -5727,8 +6186,8 @@
         </p:blipFill>
         <p:spPr>
           <a:xfrm>
-            <a:off x="987552" y="3419856"/>
-            <a:ext cx="237744" cy="237744"/>
+            <a:off x="969264" y="3355848"/>
+            <a:ext cx="201168" cy="201168"/>
           </a:xfrm>
           <a:prstGeom prst="rect">
             <a:avLst/>
@@ -5743,8 +6202,8 @@
         </p:nvSpPr>
         <p:spPr>
           <a:xfrm>
-            <a:off x="1353312" y="3273552"/>
-            <a:ext cx="5029200" cy="530352"/>
+            <a:off x="1280160" y="3218688"/>
+            <a:ext cx="3593591" cy="475488"/>
           </a:xfrm>
           <a:prstGeom prst="rect">
             <a:avLst/>
@@ -5769,7 +6228,7 @@
               </a:spcAft>
             </a:pPr>
             <a:r>
-              <a:rPr sz="1200" b="0">
+              <a:rPr sz="1050" b="0">
                 <a:solidFill>
                   <a:srgbClr val="1A1A1A"/>
                 </a:solidFill>
@@ -5788,8 +6247,8 @@
         </p:nvSpPr>
         <p:spPr>
           <a:xfrm>
-            <a:off x="841248" y="3877056"/>
-            <a:ext cx="5715000" cy="530352"/>
+            <a:off x="841248" y="3767328"/>
+            <a:ext cx="4160520" cy="475488"/>
           </a:xfrm>
           <a:prstGeom prst="roundRect">
             <a:avLst>
@@ -5844,8 +6303,8 @@
         </p:blipFill>
         <p:spPr>
           <a:xfrm>
-            <a:off x="987552" y="4023360"/>
-            <a:ext cx="237744" cy="237744"/>
+            <a:off x="969264" y="3904487"/>
+            <a:ext cx="201168" cy="201168"/>
           </a:xfrm>
           <a:prstGeom prst="rect">
             <a:avLst/>
@@ -5860,8 +6319,8 @@
         </p:nvSpPr>
         <p:spPr>
           <a:xfrm>
-            <a:off x="1353312" y="3877056"/>
-            <a:ext cx="5029200" cy="530352"/>
+            <a:off x="1280160" y="3767328"/>
+            <a:ext cx="3593591" cy="475488"/>
           </a:xfrm>
           <a:prstGeom prst="rect">
             <a:avLst/>
@@ -5886,7 +6345,7 @@
               </a:spcAft>
             </a:pPr>
             <a:r>
-              <a:rPr sz="1200" b="0">
+              <a:rPr sz="1050" b="0">
                 <a:solidFill>
                   <a:srgbClr val="1A1A1A"/>
                 </a:solidFill>
@@ -5905,8 +6364,8 @@
         </p:nvSpPr>
         <p:spPr>
           <a:xfrm>
-            <a:off x="841248" y="4480560"/>
-            <a:ext cx="5715000" cy="530352"/>
+            <a:off x="841248" y="4315968"/>
+            <a:ext cx="4160520" cy="475488"/>
           </a:xfrm>
           <a:prstGeom prst="roundRect">
             <a:avLst>
@@ -5961,8 +6420,8 @@
         </p:blipFill>
         <p:spPr>
           <a:xfrm>
-            <a:off x="987552" y="4626864"/>
-            <a:ext cx="237744" cy="237744"/>
+            <a:off x="969264" y="4453127"/>
+            <a:ext cx="201168" cy="201168"/>
           </a:xfrm>
           <a:prstGeom prst="rect">
             <a:avLst/>
@@ -5977,8 +6436,8 @@
         </p:nvSpPr>
         <p:spPr>
           <a:xfrm>
-            <a:off x="1353312" y="4480560"/>
-            <a:ext cx="5029200" cy="530352"/>
+            <a:off x="1280160" y="4315968"/>
+            <a:ext cx="3593591" cy="475488"/>
           </a:xfrm>
           <a:prstGeom prst="rect">
             <a:avLst/>
@@ -6003,7 +6462,7 @@
               </a:spcAft>
             </a:pPr>
             <a:r>
-              <a:rPr sz="1200" b="0">
+              <a:rPr sz="1050" b="0">
                 <a:solidFill>
                   <a:srgbClr val="1A1A1A"/>
                 </a:solidFill>
@@ -6022,8 +6481,8 @@
         </p:nvSpPr>
         <p:spPr>
           <a:xfrm>
-            <a:off x="841248" y="5084064"/>
-            <a:ext cx="5715000" cy="530352"/>
+            <a:off x="841248" y="4864607"/>
+            <a:ext cx="4160520" cy="475488"/>
           </a:xfrm>
           <a:prstGeom prst="roundRect">
             <a:avLst>
@@ -6078,8 +6537,8 @@
         </p:blipFill>
         <p:spPr>
           <a:xfrm>
-            <a:off x="987552" y="5230368"/>
-            <a:ext cx="237744" cy="237744"/>
+            <a:off x="969264" y="5001767"/>
+            <a:ext cx="201168" cy="201168"/>
           </a:xfrm>
           <a:prstGeom prst="rect">
             <a:avLst/>
@@ -6094,8 +6553,8 @@
         </p:nvSpPr>
         <p:spPr>
           <a:xfrm>
-            <a:off x="1353312" y="5084064"/>
-            <a:ext cx="5029200" cy="530352"/>
+            <a:off x="1280160" y="4864607"/>
+            <a:ext cx="3593591" cy="475488"/>
           </a:xfrm>
           <a:prstGeom prst="rect">
             <a:avLst/>
@@ -6120,7 +6579,7 @@
               </a:spcAft>
             </a:pPr>
             <a:r>
-              <a:rPr sz="1200" b="0">
+              <a:rPr sz="1050" b="0">
                 <a:solidFill>
                   <a:srgbClr val="1A1A1A"/>
                 </a:solidFill>
@@ -6139,8 +6598,8 @@
         </p:nvSpPr>
         <p:spPr>
           <a:xfrm>
-            <a:off x="6812280" y="2670048"/>
-            <a:ext cx="4538167" cy="2944368"/>
+            <a:off x="5385816" y="2670048"/>
+            <a:ext cx="4875624" cy="3383280"/>
           </a:xfrm>
           <a:prstGeom prst="roundRect">
             <a:avLst>
@@ -6179,100 +6638,9 @@
           </a:p>
         </p:txBody>
       </p:sp>
-      <p:sp>
-        <p:nvSpPr>
-          <p:cNvPr id="23" name="Rounded Rectangle 22"/>
-          <p:cNvSpPr/>
-          <p:nvPr/>
-        </p:nvSpPr>
-        <p:spPr>
-          <a:xfrm>
-            <a:off x="7013448" y="2871216"/>
-            <a:ext cx="1298448" cy="310896"/>
-          </a:xfrm>
-          <a:prstGeom prst="roundRect">
-            <a:avLst>
-              <a:gd name="adj" fmla="val 50000"/>
-            </a:avLst>
-          </a:prstGeom>
-          <a:solidFill>
-            <a:srgbClr val="FCECEC"/>
-          </a:solidFill>
-          <a:ln>
-            <a:noFill/>
-          </a:ln>
-          <a:effectLst/>
-        </p:spPr>
-        <p:style>
-          <a:lnRef idx="1">
-            <a:schemeClr val="accent1"/>
-          </a:lnRef>
-          <a:fillRef idx="3">
-            <a:schemeClr val="accent1"/>
-          </a:fillRef>
-          <a:effectRef idx="2">
-            <a:schemeClr val="accent1"/>
-          </a:effectRef>
-          <a:fontRef idx="minor">
-            <a:schemeClr val="lt1"/>
-          </a:fontRef>
-        </p:style>
-        <p:txBody>
-          <a:bodyPr rtlCol="0" anchor="ctr"/>
-          <a:lstStyle/>
-          <a:p>
-            <a:pPr algn="ctr"/>
-          </a:p>
-        </p:txBody>
-      </p:sp>
-      <p:sp>
-        <p:nvSpPr>
-          <p:cNvPr id="24" name="TextBox 23"/>
-          <p:cNvSpPr txBox="1"/>
-          <p:nvPr/>
-        </p:nvSpPr>
-        <p:spPr>
-          <a:xfrm>
-            <a:off x="7013448" y="2871216"/>
-            <a:ext cx="1298448" cy="310896"/>
-          </a:xfrm>
-          <a:prstGeom prst="rect">
-            <a:avLst/>
-          </a:prstGeom>
-          <a:noFill/>
-        </p:spPr>
-        <p:txBody>
-          <a:bodyPr wrap="none" anchor="ctr" lIns="0" rIns="0" tIns="0" bIns="0">
-            <a:spAutoFit/>
-          </a:bodyPr>
-          <a:lstStyle/>
-          <a:p>
-            <a:pPr algn="ctr">
-              <a:lnSpc>
-                <a:spcPct val="106000"/>
-              </a:lnSpc>
-              <a:spcBef>
-                <a:spcPts val="0"/>
-              </a:spcBef>
-              <a:spcAft>
-                <a:spcPts val="0"/>
-              </a:spcAft>
-            </a:pPr>
-            <a:r>
-              <a:rPr sz="850" b="1">
-                <a:solidFill>
-                  <a:srgbClr val="B80000"/>
-                </a:solidFill>
-                <a:latin typeface="Red Hat Display"/>
-              </a:rPr>
-              <a:t>MEDIA PASS</a:t>
-            </a:r>
-          </a:p>
-        </p:txBody>
-      </p:sp>
       <p:pic>
         <p:nvPicPr>
-          <p:cNvPr id="25" name="Picture 24" descr="eye_slate.png"/>
+          <p:cNvPr id="23" name="Picture 22" descr="01-eventing-model.png"/>
           <p:cNvPicPr>
             <a:picLocks noChangeAspect="1"/>
           </p:cNvPicPr>
@@ -6286,62 +6654,17 @@
         </p:blipFill>
         <p:spPr>
           <a:xfrm>
-            <a:off x="8843619" y="3383280"/>
-            <a:ext cx="475488" cy="475488"/>
+            <a:off x="5532120" y="2816352"/>
+            <a:ext cx="4583016" cy="3090672"/>
           </a:xfrm>
           <a:prstGeom prst="rect">
             <a:avLst/>
           </a:prstGeom>
         </p:spPr>
       </p:pic>
-      <p:sp>
-        <p:nvSpPr>
-          <p:cNvPr id="26" name="TextBox 25"/>
-          <p:cNvSpPr txBox="1"/>
-          <p:nvPr/>
-        </p:nvSpPr>
-        <p:spPr>
-          <a:xfrm>
-            <a:off x="7050024" y="3995928"/>
-            <a:ext cx="4062679" cy="1481328"/>
-          </a:xfrm>
-          <a:prstGeom prst="rect">
-            <a:avLst/>
-          </a:prstGeom>
-          <a:noFill/>
-        </p:spPr>
-        <p:txBody>
-          <a:bodyPr wrap="square" anchor="t" lIns="0" rIns="0" tIns="0" bIns="0">
-            <a:spAutoFit/>
-          </a:bodyPr>
-          <a:lstStyle/>
-          <a:p>
-            <a:pPr algn="l">
-              <a:lnSpc>
-                <a:spcPct val="120000"/>
-              </a:lnSpc>
-              <a:spcBef>
-                <a:spcPts val="0"/>
-              </a:spcBef>
-              <a:spcAft>
-                <a:spcPts val="0"/>
-              </a:spcAft>
-            </a:pPr>
-            <a:r>
-              <a:rPr sz="950" b="0">
-                <a:solidFill>
-                  <a:srgbClr val="8A9099"/>
-                </a:solidFill>
-                <a:latin typeface="Red Hat Text"/>
-              </a:rPr>
-              <a:t>The concept diagram eventing-deep-dive-...-01-eventing-model.svg — amber PingSource + a "you: POST" actor both feeding a blue Broker; three green triggers (catch-all, filter type, filter claimpriority) each to the light-blue consumer; a dashed edge to the dead-letter sink. Inset card: the CloudEvents envelope (type/source/id/specversion + Data), with `claimpriority: high` flagged as an "extension attribute → routable."</a:t>
-            </a:r>
-          </a:p>
-        </p:txBody>
-      </p:sp>
       <p:cxnSp>
         <p:nvCxnSpPr>
-          <p:cNvPr id="27" name="Connector 26"/>
+          <p:cNvPr id="24" name="Connector 23"/>
           <p:cNvCxnSpPr/>
           <p:nvPr/>
         </p:nvCxnSpPr>
@@ -6377,7 +6700,7 @@
       </p:cxnSp>
       <p:sp>
         <p:nvSpPr>
-          <p:cNvPr id="28" name="TextBox 27"/>
+          <p:cNvPr id="25" name="TextBox 24"/>
           <p:cNvSpPr txBox="1"/>
           <p:nvPr/>
         </p:nvSpPr>
@@ -6422,7 +6745,7 @@
       </p:sp>
       <p:sp>
         <p:nvSpPr>
-          <p:cNvPr id="29" name="TextBox 28"/>
+          <p:cNvPr id="26" name="TextBox 25"/>
           <p:cNvSpPr txBox="1"/>
           <p:nvPr/>
         </p:nvSpPr>
@@ -6642,11 +6965,11 @@
         <p:spPr>
           <a:xfrm>
             <a:off x="841248" y="2395728"/>
-            <a:ext cx="5715000" cy="530352"/>
+            <a:ext cx="5138928" cy="786384"/>
           </a:xfrm>
           <a:prstGeom prst="roundRect">
             <a:avLst>
-              <a:gd name="adj" fmla="val 6000"/>
+              <a:gd name="adj" fmla="val 7000"/>
             </a:avLst>
           </a:prstGeom>
           <a:solidFill>
@@ -6681,9 +7004,55 @@
           </a:p>
         </p:txBody>
       </p:sp>
+      <p:sp>
+        <p:nvSpPr>
+          <p:cNvPr id="7" name="Rounded Rectangle 6"/>
+          <p:cNvSpPr/>
+          <p:nvPr/>
+        </p:nvSpPr>
+        <p:spPr>
+          <a:xfrm>
+            <a:off x="987552" y="2532888"/>
+            <a:ext cx="512064" cy="512064"/>
+          </a:xfrm>
+          <a:prstGeom prst="roundRect">
+            <a:avLst>
+              <a:gd name="adj" fmla="val 26000"/>
+            </a:avLst>
+          </a:prstGeom>
+          <a:solidFill>
+            <a:srgbClr val="EE0000"/>
+          </a:solidFill>
+          <a:ln>
+            <a:noFill/>
+          </a:ln>
+          <a:effectLst/>
+        </p:spPr>
+        <p:style>
+          <a:lnRef idx="1">
+            <a:schemeClr val="accent1"/>
+          </a:lnRef>
+          <a:fillRef idx="3">
+            <a:schemeClr val="accent1"/>
+          </a:fillRef>
+          <a:effectRef idx="2">
+            <a:schemeClr val="accent1"/>
+          </a:effectRef>
+          <a:fontRef idx="minor">
+            <a:schemeClr val="lt1"/>
+          </a:fontRef>
+        </p:style>
+        <p:txBody>
+          <a:bodyPr rtlCol="0" anchor="ctr"/>
+          <a:lstStyle/>
+          <a:p>
+            <a:pPr algn="ctr"/>
+          </a:p>
+        </p:txBody>
+      </p:sp>
       <p:pic>
         <p:nvPicPr>
-          <p:cNvPr id="7" name="Picture 6" descr="check_steel.png"/>
+          <p:cNvPr id="8" name="Picture 7" descr="check_white.png"/>
           <p:cNvPicPr>
             <a:picLocks noChangeAspect="1"/>
           </p:cNvPicPr>
@@ -6697,8 +7066,8 @@
         </p:blipFill>
         <p:spPr>
           <a:xfrm>
-            <a:off x="987552" y="2542032"/>
-            <a:ext cx="237744" cy="237744"/>
+            <a:off x="1110447" y="2655783"/>
+            <a:ext cx="266273" cy="266273"/>
           </a:xfrm>
           <a:prstGeom prst="rect">
             <a:avLst/>
@@ -6707,14 +7076,14 @@
       </p:pic>
       <p:sp>
         <p:nvSpPr>
-          <p:cNvPr id="8" name="TextBox 7"/>
+          <p:cNvPr id="9" name="TextBox 8"/>
           <p:cNvSpPr txBox="1"/>
           <p:nvPr/>
         </p:nvSpPr>
         <p:spPr>
           <a:xfrm>
-            <a:off x="1353312" y="2395728"/>
-            <a:ext cx="5029200" cy="530352"/>
+            <a:off x="1627632" y="2395728"/>
+            <a:ext cx="4206240" cy="786384"/>
           </a:xfrm>
           <a:prstGeom prst="rect">
             <a:avLst/>
@@ -6739,7 +7108,7 @@
               </a:spcAft>
             </a:pPr>
             <a:r>
-              <a:rPr sz="1200" b="0">
+              <a:rPr sz="1150" b="0">
                 <a:solidFill>
                   <a:srgbClr val="1A1A1A"/>
                 </a:solidFill>
@@ -6752,18 +7121,18 @@
       </p:sp>
       <p:sp>
         <p:nvSpPr>
-          <p:cNvPr id="9" name="Rounded Rectangle 8"/>
+          <p:cNvPr id="10" name="Rounded Rectangle 9"/>
           <p:cNvSpPr/>
           <p:nvPr/>
         </p:nvSpPr>
         <p:spPr>
           <a:xfrm>
-            <a:off x="841248" y="2999232"/>
-            <a:ext cx="5715000" cy="530352"/>
+            <a:off x="6254496" y="2395728"/>
+            <a:ext cx="5138928" cy="786384"/>
           </a:xfrm>
           <a:prstGeom prst="roundRect">
             <a:avLst>
-              <a:gd name="adj" fmla="val 6000"/>
+              <a:gd name="adj" fmla="val 7000"/>
             </a:avLst>
           </a:prstGeom>
           <a:solidFill>
@@ -6798,9 +7167,55 @@
           </a:p>
         </p:txBody>
       </p:sp>
+      <p:sp>
+        <p:nvSpPr>
+          <p:cNvPr id="11" name="Rounded Rectangle 10"/>
+          <p:cNvSpPr/>
+          <p:nvPr/>
+        </p:nvSpPr>
+        <p:spPr>
+          <a:xfrm>
+            <a:off x="6400800" y="2532888"/>
+            <a:ext cx="512064" cy="512064"/>
+          </a:xfrm>
+          <a:prstGeom prst="roundRect">
+            <a:avLst>
+              <a:gd name="adj" fmla="val 26000"/>
+            </a:avLst>
+          </a:prstGeom>
+          <a:solidFill>
+            <a:srgbClr val="EE0000"/>
+          </a:solidFill>
+          <a:ln>
+            <a:noFill/>
+          </a:ln>
+          <a:effectLst/>
+        </p:spPr>
+        <p:style>
+          <a:lnRef idx="1">
+            <a:schemeClr val="accent1"/>
+          </a:lnRef>
+          <a:fillRef idx="3">
+            <a:schemeClr val="accent1"/>
+          </a:fillRef>
+          <a:effectRef idx="2">
+            <a:schemeClr val="accent1"/>
+          </a:effectRef>
+          <a:fontRef idx="minor">
+            <a:schemeClr val="lt1"/>
+          </a:fontRef>
+        </p:style>
+        <p:txBody>
+          <a:bodyPr rtlCol="0" anchor="ctr"/>
+          <a:lstStyle/>
+          <a:p>
+            <a:pPr algn="ctr"/>
+          </a:p>
+        </p:txBody>
+      </p:sp>
       <p:pic>
         <p:nvPicPr>
-          <p:cNvPr id="10" name="Picture 9" descr="check_steel.png"/>
+          <p:cNvPr id="12" name="Picture 11" descr="check_white.png"/>
           <p:cNvPicPr>
             <a:picLocks noChangeAspect="1"/>
           </p:cNvPicPr>
@@ -6814,8 +7229,8 @@
         </p:blipFill>
         <p:spPr>
           <a:xfrm>
-            <a:off x="987552" y="3145536"/>
-            <a:ext cx="237744" cy="237744"/>
+            <a:off x="6523695" y="2655783"/>
+            <a:ext cx="266273" cy="266273"/>
           </a:xfrm>
           <a:prstGeom prst="rect">
             <a:avLst/>
@@ -6824,14 +7239,14 @@
       </p:pic>
       <p:sp>
         <p:nvSpPr>
-          <p:cNvPr id="11" name="TextBox 10"/>
+          <p:cNvPr id="13" name="TextBox 12"/>
           <p:cNvSpPr txBox="1"/>
           <p:nvPr/>
         </p:nvSpPr>
         <p:spPr>
           <a:xfrm>
-            <a:off x="1353312" y="2999232"/>
-            <a:ext cx="5029200" cy="530352"/>
+            <a:off x="7040880" y="2395728"/>
+            <a:ext cx="4206240" cy="786384"/>
           </a:xfrm>
           <a:prstGeom prst="rect">
             <a:avLst/>
@@ -6856,7 +7271,7 @@
               </a:spcAft>
             </a:pPr>
             <a:r>
-              <a:rPr sz="1200" b="0">
+              <a:rPr sz="1150" b="0">
                 <a:solidFill>
                   <a:srgbClr val="1A1A1A"/>
                 </a:solidFill>
@@ -6869,18 +7284,18 @@
       </p:sp>
       <p:sp>
         <p:nvSpPr>
-          <p:cNvPr id="12" name="Rounded Rectangle 11"/>
+          <p:cNvPr id="14" name="Rounded Rectangle 13"/>
           <p:cNvSpPr/>
           <p:nvPr/>
         </p:nvSpPr>
         <p:spPr>
           <a:xfrm>
-            <a:off x="841248" y="3602736"/>
-            <a:ext cx="5715000" cy="530352"/>
+            <a:off x="841248" y="3328416"/>
+            <a:ext cx="5138928" cy="786384"/>
           </a:xfrm>
           <a:prstGeom prst="roundRect">
             <a:avLst>
-              <a:gd name="adj" fmla="val 6000"/>
+              <a:gd name="adj" fmla="val 7000"/>
             </a:avLst>
           </a:prstGeom>
           <a:solidFill>
@@ -6915,9 +7330,55 @@
           </a:p>
         </p:txBody>
       </p:sp>
+      <p:sp>
+        <p:nvSpPr>
+          <p:cNvPr id="15" name="Rounded Rectangle 14"/>
+          <p:cNvSpPr/>
+          <p:nvPr/>
+        </p:nvSpPr>
+        <p:spPr>
+          <a:xfrm>
+            <a:off x="987552" y="3465576"/>
+            <a:ext cx="512064" cy="512064"/>
+          </a:xfrm>
+          <a:prstGeom prst="roundRect">
+            <a:avLst>
+              <a:gd name="adj" fmla="val 26000"/>
+            </a:avLst>
+          </a:prstGeom>
+          <a:solidFill>
+            <a:srgbClr val="EE0000"/>
+          </a:solidFill>
+          <a:ln>
+            <a:noFill/>
+          </a:ln>
+          <a:effectLst/>
+        </p:spPr>
+        <p:style>
+          <a:lnRef idx="1">
+            <a:schemeClr val="accent1"/>
+          </a:lnRef>
+          <a:fillRef idx="3">
+            <a:schemeClr val="accent1"/>
+          </a:fillRef>
+          <a:effectRef idx="2">
+            <a:schemeClr val="accent1"/>
+          </a:effectRef>
+          <a:fontRef idx="minor">
+            <a:schemeClr val="lt1"/>
+          </a:fontRef>
+        </p:style>
+        <p:txBody>
+          <a:bodyPr rtlCol="0" anchor="ctr"/>
+          <a:lstStyle/>
+          <a:p>
+            <a:pPr algn="ctr"/>
+          </a:p>
+        </p:txBody>
+      </p:sp>
       <p:pic>
         <p:nvPicPr>
-          <p:cNvPr id="13" name="Picture 12" descr="check_steel.png"/>
+          <p:cNvPr id="16" name="Picture 15" descr="check_white.png"/>
           <p:cNvPicPr>
             <a:picLocks noChangeAspect="1"/>
           </p:cNvPicPr>
@@ -6931,8 +7392,8 @@
         </p:blipFill>
         <p:spPr>
           <a:xfrm>
-            <a:off x="987552" y="3749040"/>
-            <a:ext cx="237744" cy="237744"/>
+            <a:off x="1110447" y="3588471"/>
+            <a:ext cx="266273" cy="266273"/>
           </a:xfrm>
           <a:prstGeom prst="rect">
             <a:avLst/>
@@ -6941,14 +7402,14 @@
       </p:pic>
       <p:sp>
         <p:nvSpPr>
-          <p:cNvPr id="14" name="TextBox 13"/>
+          <p:cNvPr id="17" name="TextBox 16"/>
           <p:cNvSpPr txBox="1"/>
           <p:nvPr/>
         </p:nvSpPr>
         <p:spPr>
           <a:xfrm>
-            <a:off x="1353312" y="3602736"/>
-            <a:ext cx="5029200" cy="530352"/>
+            <a:off x="1627632" y="3328416"/>
+            <a:ext cx="4206240" cy="786384"/>
           </a:xfrm>
           <a:prstGeom prst="rect">
             <a:avLst/>
@@ -6973,7 +7434,7 @@
               </a:spcAft>
             </a:pPr>
             <a:r>
-              <a:rPr sz="1200" b="0">
+              <a:rPr sz="1150" b="0">
                 <a:solidFill>
                   <a:srgbClr val="1A1A1A"/>
                 </a:solidFill>
@@ -6986,18 +7447,18 @@
       </p:sp>
       <p:sp>
         <p:nvSpPr>
-          <p:cNvPr id="15" name="Rounded Rectangle 14"/>
+          <p:cNvPr id="18" name="Rounded Rectangle 17"/>
           <p:cNvSpPr/>
           <p:nvPr/>
         </p:nvSpPr>
         <p:spPr>
           <a:xfrm>
-            <a:off x="841248" y="4206240"/>
-            <a:ext cx="5715000" cy="530352"/>
+            <a:off x="6254496" y="3328416"/>
+            <a:ext cx="5138928" cy="786384"/>
           </a:xfrm>
           <a:prstGeom prst="roundRect">
             <a:avLst>
-              <a:gd name="adj" fmla="val 6000"/>
+              <a:gd name="adj" fmla="val 7000"/>
             </a:avLst>
           </a:prstGeom>
           <a:solidFill>
@@ -7032,9 +7493,55 @@
           </a:p>
         </p:txBody>
       </p:sp>
+      <p:sp>
+        <p:nvSpPr>
+          <p:cNvPr id="19" name="Rounded Rectangle 18"/>
+          <p:cNvSpPr/>
+          <p:nvPr/>
+        </p:nvSpPr>
+        <p:spPr>
+          <a:xfrm>
+            <a:off x="6400800" y="3465576"/>
+            <a:ext cx="512064" cy="512064"/>
+          </a:xfrm>
+          <a:prstGeom prst="roundRect">
+            <a:avLst>
+              <a:gd name="adj" fmla="val 26000"/>
+            </a:avLst>
+          </a:prstGeom>
+          <a:solidFill>
+            <a:srgbClr val="EE0000"/>
+          </a:solidFill>
+          <a:ln>
+            <a:noFill/>
+          </a:ln>
+          <a:effectLst/>
+        </p:spPr>
+        <p:style>
+          <a:lnRef idx="1">
+            <a:schemeClr val="accent1"/>
+          </a:lnRef>
+          <a:fillRef idx="3">
+            <a:schemeClr val="accent1"/>
+          </a:fillRef>
+          <a:effectRef idx="2">
+            <a:schemeClr val="accent1"/>
+          </a:effectRef>
+          <a:fontRef idx="minor">
+            <a:schemeClr val="lt1"/>
+          </a:fontRef>
+        </p:style>
+        <p:txBody>
+          <a:bodyPr rtlCol="0" anchor="ctr"/>
+          <a:lstStyle/>
+          <a:p>
+            <a:pPr algn="ctr"/>
+          </a:p>
+        </p:txBody>
+      </p:sp>
       <p:pic>
         <p:nvPicPr>
-          <p:cNvPr id="16" name="Picture 15" descr="check_steel.png"/>
+          <p:cNvPr id="20" name="Picture 19" descr="check_white.png"/>
           <p:cNvPicPr>
             <a:picLocks noChangeAspect="1"/>
           </p:cNvPicPr>
@@ -7048,8 +7555,8 @@
         </p:blipFill>
         <p:spPr>
           <a:xfrm>
-            <a:off x="987552" y="4352544"/>
-            <a:ext cx="237744" cy="237744"/>
+            <a:off x="6523695" y="3588471"/>
+            <a:ext cx="266273" cy="266273"/>
           </a:xfrm>
           <a:prstGeom prst="rect">
             <a:avLst/>
@@ -7058,14 +7565,14 @@
       </p:pic>
       <p:sp>
         <p:nvSpPr>
-          <p:cNvPr id="17" name="TextBox 16"/>
+          <p:cNvPr id="21" name="TextBox 20"/>
           <p:cNvSpPr txBox="1"/>
           <p:nvPr/>
         </p:nvSpPr>
         <p:spPr>
           <a:xfrm>
-            <a:off x="1353312" y="4206240"/>
-            <a:ext cx="5029200" cy="530352"/>
+            <a:off x="7040880" y="3328416"/>
+            <a:ext cx="4206240" cy="786384"/>
           </a:xfrm>
           <a:prstGeom prst="rect">
             <a:avLst/>
@@ -7090,7 +7597,7 @@
               </a:spcAft>
             </a:pPr>
             <a:r>
-              <a:rPr sz="1200" b="0">
+              <a:rPr sz="1150" b="0">
                 <a:solidFill>
                   <a:srgbClr val="1A1A1A"/>
                 </a:solidFill>
@@ -7103,18 +7610,18 @@
       </p:sp>
       <p:sp>
         <p:nvSpPr>
-          <p:cNvPr id="18" name="Rounded Rectangle 17"/>
+          <p:cNvPr id="22" name="Rounded Rectangle 21"/>
           <p:cNvSpPr/>
           <p:nvPr/>
         </p:nvSpPr>
         <p:spPr>
           <a:xfrm>
-            <a:off x="841248" y="4809744"/>
-            <a:ext cx="5715000" cy="530352"/>
+            <a:off x="841248" y="4261104"/>
+            <a:ext cx="5138928" cy="786384"/>
           </a:xfrm>
           <a:prstGeom prst="roundRect">
             <a:avLst>
-              <a:gd name="adj" fmla="val 6000"/>
+              <a:gd name="adj" fmla="val 7000"/>
             </a:avLst>
           </a:prstGeom>
           <a:solidFill>
@@ -7149,9 +7656,55 @@
           </a:p>
         </p:txBody>
       </p:sp>
+      <p:sp>
+        <p:nvSpPr>
+          <p:cNvPr id="23" name="Rounded Rectangle 22"/>
+          <p:cNvSpPr/>
+          <p:nvPr/>
+        </p:nvSpPr>
+        <p:spPr>
+          <a:xfrm>
+            <a:off x="987552" y="4398264"/>
+            <a:ext cx="512064" cy="512064"/>
+          </a:xfrm>
+          <a:prstGeom prst="roundRect">
+            <a:avLst>
+              <a:gd name="adj" fmla="val 26000"/>
+            </a:avLst>
+          </a:prstGeom>
+          <a:solidFill>
+            <a:srgbClr val="EE0000"/>
+          </a:solidFill>
+          <a:ln>
+            <a:noFill/>
+          </a:ln>
+          <a:effectLst/>
+        </p:spPr>
+        <p:style>
+          <a:lnRef idx="1">
+            <a:schemeClr val="accent1"/>
+          </a:lnRef>
+          <a:fillRef idx="3">
+            <a:schemeClr val="accent1"/>
+          </a:fillRef>
+          <a:effectRef idx="2">
+            <a:schemeClr val="accent1"/>
+          </a:effectRef>
+          <a:fontRef idx="minor">
+            <a:schemeClr val="lt1"/>
+          </a:fontRef>
+        </p:style>
+        <p:txBody>
+          <a:bodyPr rtlCol="0" anchor="ctr"/>
+          <a:lstStyle/>
+          <a:p>
+            <a:pPr algn="ctr"/>
+          </a:p>
+        </p:txBody>
+      </p:sp>
       <p:pic>
         <p:nvPicPr>
-          <p:cNvPr id="19" name="Picture 18" descr="check_steel.png"/>
+          <p:cNvPr id="24" name="Picture 23" descr="check_white.png"/>
           <p:cNvPicPr>
             <a:picLocks noChangeAspect="1"/>
           </p:cNvPicPr>
@@ -7165,8 +7718,8 @@
         </p:blipFill>
         <p:spPr>
           <a:xfrm>
-            <a:off x="987552" y="4956048"/>
-            <a:ext cx="237744" cy="237744"/>
+            <a:off x="1110447" y="4521159"/>
+            <a:ext cx="266273" cy="266273"/>
           </a:xfrm>
           <a:prstGeom prst="rect">
             <a:avLst/>
@@ -7175,14 +7728,14 @@
       </p:pic>
       <p:sp>
         <p:nvSpPr>
-          <p:cNvPr id="20" name="TextBox 19"/>
+          <p:cNvPr id="25" name="TextBox 24"/>
           <p:cNvSpPr txBox="1"/>
           <p:nvPr/>
         </p:nvSpPr>
         <p:spPr>
           <a:xfrm>
-            <a:off x="1353312" y="4809744"/>
-            <a:ext cx="5029200" cy="530352"/>
+            <a:off x="1627632" y="4261104"/>
+            <a:ext cx="4206240" cy="786384"/>
           </a:xfrm>
           <a:prstGeom prst="rect">
             <a:avLst/>
@@ -7207,221 +7760,13 @@
               </a:spcAft>
             </a:pPr>
             <a:r>
-              <a:rPr sz="1200" b="0">
+              <a:rPr sz="1150" b="0">
                 <a:solidFill>
                   <a:srgbClr val="1A1A1A"/>
                 </a:solidFill>
                 <a:latin typeface="Red Hat Text"/>
               </a:rPr>
               <a:t>A broker is built ON a channel — it's a choice of abstraction, not two systems</a:t>
-            </a:r>
-          </a:p>
-        </p:txBody>
-      </p:sp>
-      <p:sp>
-        <p:nvSpPr>
-          <p:cNvPr id="21" name="Rounded Rectangle 20"/>
-          <p:cNvSpPr/>
-          <p:nvPr/>
-        </p:nvSpPr>
-        <p:spPr>
-          <a:xfrm>
-            <a:off x="6812280" y="2395728"/>
-            <a:ext cx="4538167" cy="2944368"/>
-          </a:xfrm>
-          <a:prstGeom prst="roundRect">
-            <a:avLst>
-              <a:gd name="adj" fmla="val 4000"/>
-            </a:avLst>
-          </a:prstGeom>
-          <a:solidFill>
-            <a:srgbClr val="FFFFFF"/>
-          </a:solidFill>
-          <a:ln w="15240">
-            <a:solidFill>
-              <a:srgbClr val="DDE1E6"/>
-            </a:solidFill>
-          </a:ln>
-          <a:effectLst/>
-        </p:spPr>
-        <p:style>
-          <a:lnRef idx="1">
-            <a:schemeClr val="accent1"/>
-          </a:lnRef>
-          <a:fillRef idx="3">
-            <a:schemeClr val="accent1"/>
-          </a:fillRef>
-          <a:effectRef idx="2">
-            <a:schemeClr val="accent1"/>
-          </a:effectRef>
-          <a:fontRef idx="minor">
-            <a:schemeClr val="lt1"/>
-          </a:fontRef>
-        </p:style>
-        <p:txBody>
-          <a:bodyPr rtlCol="0" anchor="ctr"/>
-          <a:lstStyle/>
-          <a:p>
-            <a:pPr algn="ctr"/>
-          </a:p>
-        </p:txBody>
-      </p:sp>
-      <p:sp>
-        <p:nvSpPr>
-          <p:cNvPr id="22" name="Rounded Rectangle 21"/>
-          <p:cNvSpPr/>
-          <p:nvPr/>
-        </p:nvSpPr>
-        <p:spPr>
-          <a:xfrm>
-            <a:off x="7013448" y="2596896"/>
-            <a:ext cx="1298448" cy="310896"/>
-          </a:xfrm>
-          <a:prstGeom prst="roundRect">
-            <a:avLst>
-              <a:gd name="adj" fmla="val 50000"/>
-            </a:avLst>
-          </a:prstGeom>
-          <a:solidFill>
-            <a:srgbClr val="FCECEC"/>
-          </a:solidFill>
-          <a:ln>
-            <a:noFill/>
-          </a:ln>
-          <a:effectLst/>
-        </p:spPr>
-        <p:style>
-          <a:lnRef idx="1">
-            <a:schemeClr val="accent1"/>
-          </a:lnRef>
-          <a:fillRef idx="3">
-            <a:schemeClr val="accent1"/>
-          </a:fillRef>
-          <a:effectRef idx="2">
-            <a:schemeClr val="accent1"/>
-          </a:effectRef>
-          <a:fontRef idx="minor">
-            <a:schemeClr val="lt1"/>
-          </a:fontRef>
-        </p:style>
-        <p:txBody>
-          <a:bodyPr rtlCol="0" anchor="ctr"/>
-          <a:lstStyle/>
-          <a:p>
-            <a:pPr algn="ctr"/>
-          </a:p>
-        </p:txBody>
-      </p:sp>
-      <p:sp>
-        <p:nvSpPr>
-          <p:cNvPr id="23" name="TextBox 22"/>
-          <p:cNvSpPr txBox="1"/>
-          <p:nvPr/>
-        </p:nvSpPr>
-        <p:spPr>
-          <a:xfrm>
-            <a:off x="7013448" y="2596896"/>
-            <a:ext cx="1298448" cy="310896"/>
-          </a:xfrm>
-          <a:prstGeom prst="rect">
-            <a:avLst/>
-          </a:prstGeom>
-          <a:noFill/>
-        </p:spPr>
-        <p:txBody>
-          <a:bodyPr wrap="none" anchor="ctr" lIns="0" rIns="0" tIns="0" bIns="0">
-            <a:spAutoFit/>
-          </a:bodyPr>
-          <a:lstStyle/>
-          <a:p>
-            <a:pPr algn="ctr">
-              <a:lnSpc>
-                <a:spcPct val="106000"/>
-              </a:lnSpc>
-              <a:spcBef>
-                <a:spcPts val="0"/>
-              </a:spcBef>
-              <a:spcAft>
-                <a:spcPts val="0"/>
-              </a:spcAft>
-            </a:pPr>
-            <a:r>
-              <a:rPr sz="850" b="1">
-                <a:solidFill>
-                  <a:srgbClr val="B80000"/>
-                </a:solidFill>
-                <a:latin typeface="Red Hat Display"/>
-              </a:rPr>
-              <a:t>MEDIA PASS</a:t>
-            </a:r>
-          </a:p>
-        </p:txBody>
-      </p:sp>
-      <p:pic>
-        <p:nvPicPr>
-          <p:cNvPr id="24" name="Picture 23" descr="eye_slate.png"/>
-          <p:cNvPicPr>
-            <a:picLocks noChangeAspect="1"/>
-          </p:cNvPicPr>
-          <p:nvPr/>
-        </p:nvPicPr>
-        <p:blipFill>
-          <a:blip r:embed="rId4"/>
-          <a:stretch>
-            <a:fillRect/>
-          </a:stretch>
-        </p:blipFill>
-        <p:spPr>
-          <a:xfrm>
-            <a:off x="8843619" y="3108960"/>
-            <a:ext cx="475488" cy="475488"/>
-          </a:xfrm>
-          <a:prstGeom prst="rect">
-            <a:avLst/>
-          </a:prstGeom>
-        </p:spPr>
-      </p:pic>
-      <p:sp>
-        <p:nvSpPr>
-          <p:cNvPr id="25" name="TextBox 24"/>
-          <p:cNvSpPr txBox="1"/>
-          <p:nvPr/>
-        </p:nvSpPr>
-        <p:spPr>
-          <a:xfrm>
-            <a:off x="7050024" y="3721608"/>
-            <a:ext cx="4062679" cy="1481328"/>
-          </a:xfrm>
-          <a:prstGeom prst="rect">
-            <a:avLst/>
-          </a:prstGeom>
-          <a:noFill/>
-        </p:spPr>
-        <p:txBody>
-          <a:bodyPr wrap="square" anchor="t" lIns="0" rIns="0" tIns="0" bIns="0">
-            <a:spAutoFit/>
-          </a:bodyPr>
-          <a:lstStyle/>
-          <a:p>
-            <a:pPr algn="l">
-              <a:lnSpc>
-                <a:spcPct val="120000"/>
-              </a:lnSpc>
-              <a:spcBef>
-                <a:spcPts val="0"/>
-              </a:spcBef>
-              <a:spcAft>
-                <a:spcPts val="0"/>
-              </a:spcAft>
-            </a:pPr>
-            <a:r>
-              <a:rPr sz="950" b="0">
-                <a:solidFill>
-                  <a:srgbClr val="8A9099"/>
-                </a:solidFill>
-                <a:latin typeface="Red Hat Text"/>
-              </a:rPr>
-              <a:t>Two side-by-side diagrams. Left "Broker + Trigger": a hub with three triggers, each labeled with a different filter, fanning to three distinct consumers ("filtered fan-out"). Right "Channel + Subscription": a straight pipe with three inline subscribers in sequence ("ordered, no filter"). A footer decision line: "distributing to many, filtered → Broker · linear pipeline → Channel."</a:t>
             </a:r>
           </a:p>
         </p:txBody>
@@ -7774,11 +8119,11 @@
         <p:spPr>
           <a:xfrm>
             <a:off x="841248" y="2670048"/>
-            <a:ext cx="5715000" cy="530352"/>
+            <a:ext cx="5138928" cy="786384"/>
           </a:xfrm>
           <a:prstGeom prst="roundRect">
             <a:avLst>
-              <a:gd name="adj" fmla="val 6000"/>
+              <a:gd name="adj" fmla="val 7000"/>
             </a:avLst>
           </a:prstGeom>
           <a:solidFill>
@@ -7813,9 +8158,55 @@
           </a:p>
         </p:txBody>
       </p:sp>
+      <p:sp>
+        <p:nvSpPr>
+          <p:cNvPr id="8" name="Rounded Rectangle 7"/>
+          <p:cNvSpPr/>
+          <p:nvPr/>
+        </p:nvSpPr>
+        <p:spPr>
+          <a:xfrm>
+            <a:off x="987552" y="2807208"/>
+            <a:ext cx="512064" cy="512064"/>
+          </a:xfrm>
+          <a:prstGeom prst="roundRect">
+            <a:avLst>
+              <a:gd name="adj" fmla="val 26000"/>
+            </a:avLst>
+          </a:prstGeom>
+          <a:solidFill>
+            <a:srgbClr val="EE0000"/>
+          </a:solidFill>
+          <a:ln>
+            <a:noFill/>
+          </a:ln>
+          <a:effectLst/>
+        </p:spPr>
+        <p:style>
+          <a:lnRef idx="1">
+            <a:schemeClr val="accent1"/>
+          </a:lnRef>
+          <a:fillRef idx="3">
+            <a:schemeClr val="accent1"/>
+          </a:fillRef>
+          <a:effectRef idx="2">
+            <a:schemeClr val="accent1"/>
+          </a:effectRef>
+          <a:fontRef idx="minor">
+            <a:schemeClr val="lt1"/>
+          </a:fontRef>
+        </p:style>
+        <p:txBody>
+          <a:bodyPr rtlCol="0" anchor="ctr"/>
+          <a:lstStyle/>
+          <a:p>
+            <a:pPr algn="ctr"/>
+          </a:p>
+        </p:txBody>
+      </p:sp>
       <p:pic>
         <p:nvPicPr>
-          <p:cNvPr id="8" name="Picture 7" descr="check_steel.png"/>
+          <p:cNvPr id="9" name="Picture 8" descr="check_white.png"/>
           <p:cNvPicPr>
             <a:picLocks noChangeAspect="1"/>
           </p:cNvPicPr>
@@ -7829,8 +8220,8 @@
         </p:blipFill>
         <p:spPr>
           <a:xfrm>
-            <a:off x="987552" y="2816352"/>
-            <a:ext cx="237744" cy="237744"/>
+            <a:off x="1110447" y="2930103"/>
+            <a:ext cx="266273" cy="266273"/>
           </a:xfrm>
           <a:prstGeom prst="rect">
             <a:avLst/>
@@ -7839,14 +8230,14 @@
       </p:pic>
       <p:sp>
         <p:nvSpPr>
-          <p:cNvPr id="9" name="TextBox 8"/>
+          <p:cNvPr id="10" name="TextBox 9"/>
           <p:cNvSpPr txBox="1"/>
           <p:nvPr/>
         </p:nvSpPr>
         <p:spPr>
           <a:xfrm>
-            <a:off x="1353312" y="2670048"/>
-            <a:ext cx="5029200" cy="530352"/>
+            <a:off x="1627632" y="2670048"/>
+            <a:ext cx="4206240" cy="786384"/>
           </a:xfrm>
           <a:prstGeom prst="rect">
             <a:avLst/>
@@ -7871,7 +8262,7 @@
               </a:spcAft>
             </a:pPr>
             <a:r>
-              <a:rPr sz="1200" b="0">
+              <a:rPr sz="1150" b="0">
                 <a:solidFill>
                   <a:srgbClr val="1A1A1A"/>
                 </a:solidFill>
@@ -7884,18 +8275,18 @@
       </p:sp>
       <p:sp>
         <p:nvSpPr>
-          <p:cNvPr id="10" name="Rounded Rectangle 9"/>
+          <p:cNvPr id="11" name="Rounded Rectangle 10"/>
           <p:cNvSpPr/>
           <p:nvPr/>
         </p:nvSpPr>
         <p:spPr>
           <a:xfrm>
-            <a:off x="841248" y="3273552"/>
-            <a:ext cx="5715000" cy="530352"/>
+            <a:off x="6254496" y="2670048"/>
+            <a:ext cx="5138928" cy="786384"/>
           </a:xfrm>
           <a:prstGeom prst="roundRect">
             <a:avLst>
-              <a:gd name="adj" fmla="val 6000"/>
+              <a:gd name="adj" fmla="val 7000"/>
             </a:avLst>
           </a:prstGeom>
           <a:solidFill>
@@ -7930,9 +8321,55 @@
           </a:p>
         </p:txBody>
       </p:sp>
+      <p:sp>
+        <p:nvSpPr>
+          <p:cNvPr id="12" name="Rounded Rectangle 11"/>
+          <p:cNvSpPr/>
+          <p:nvPr/>
+        </p:nvSpPr>
+        <p:spPr>
+          <a:xfrm>
+            <a:off x="6400800" y="2807208"/>
+            <a:ext cx="512064" cy="512064"/>
+          </a:xfrm>
+          <a:prstGeom prst="roundRect">
+            <a:avLst>
+              <a:gd name="adj" fmla="val 26000"/>
+            </a:avLst>
+          </a:prstGeom>
+          <a:solidFill>
+            <a:srgbClr val="EE0000"/>
+          </a:solidFill>
+          <a:ln>
+            <a:noFill/>
+          </a:ln>
+          <a:effectLst/>
+        </p:spPr>
+        <p:style>
+          <a:lnRef idx="1">
+            <a:schemeClr val="accent1"/>
+          </a:lnRef>
+          <a:fillRef idx="3">
+            <a:schemeClr val="accent1"/>
+          </a:fillRef>
+          <a:effectRef idx="2">
+            <a:schemeClr val="accent1"/>
+          </a:effectRef>
+          <a:fontRef idx="minor">
+            <a:schemeClr val="lt1"/>
+          </a:fontRef>
+        </p:style>
+        <p:txBody>
+          <a:bodyPr rtlCol="0" anchor="ctr"/>
+          <a:lstStyle/>
+          <a:p>
+            <a:pPr algn="ctr"/>
+          </a:p>
+        </p:txBody>
+      </p:sp>
       <p:pic>
         <p:nvPicPr>
-          <p:cNvPr id="11" name="Picture 10" descr="check_steel.png"/>
+          <p:cNvPr id="13" name="Picture 12" descr="check_white.png"/>
           <p:cNvPicPr>
             <a:picLocks noChangeAspect="1"/>
           </p:cNvPicPr>
@@ -7946,8 +8383,8 @@
         </p:blipFill>
         <p:spPr>
           <a:xfrm>
-            <a:off x="987552" y="3419856"/>
-            <a:ext cx="237744" cy="237744"/>
+            <a:off x="6523695" y="2930103"/>
+            <a:ext cx="266273" cy="266273"/>
           </a:xfrm>
           <a:prstGeom prst="rect">
             <a:avLst/>
@@ -7956,14 +8393,14 @@
       </p:pic>
       <p:sp>
         <p:nvSpPr>
-          <p:cNvPr id="12" name="TextBox 11"/>
+          <p:cNvPr id="14" name="TextBox 13"/>
           <p:cNvSpPr txBox="1"/>
           <p:nvPr/>
         </p:nvSpPr>
         <p:spPr>
           <a:xfrm>
-            <a:off x="1353312" y="3273552"/>
-            <a:ext cx="5029200" cy="530352"/>
+            <a:off x="7040880" y="2670048"/>
+            <a:ext cx="4206240" cy="786384"/>
           </a:xfrm>
           <a:prstGeom prst="rect">
             <a:avLst/>
@@ -7988,7 +8425,7 @@
               </a:spcAft>
             </a:pPr>
             <a:r>
-              <a:rPr sz="1200" b="0">
+              <a:rPr sz="1150" b="0">
                 <a:solidFill>
                   <a:srgbClr val="1A1A1A"/>
                 </a:solidFill>
@@ -8001,18 +8438,18 @@
       </p:sp>
       <p:sp>
         <p:nvSpPr>
-          <p:cNvPr id="13" name="Rounded Rectangle 12"/>
+          <p:cNvPr id="15" name="Rounded Rectangle 14"/>
           <p:cNvSpPr/>
           <p:nvPr/>
         </p:nvSpPr>
         <p:spPr>
           <a:xfrm>
-            <a:off x="841248" y="3877056"/>
-            <a:ext cx="5715000" cy="530352"/>
+            <a:off x="841248" y="3602736"/>
+            <a:ext cx="5138928" cy="786384"/>
           </a:xfrm>
           <a:prstGeom prst="roundRect">
             <a:avLst>
-              <a:gd name="adj" fmla="val 6000"/>
+              <a:gd name="adj" fmla="val 7000"/>
             </a:avLst>
           </a:prstGeom>
           <a:solidFill>
@@ -8047,9 +8484,55 @@
           </a:p>
         </p:txBody>
       </p:sp>
+      <p:sp>
+        <p:nvSpPr>
+          <p:cNvPr id="16" name="Rounded Rectangle 15"/>
+          <p:cNvSpPr/>
+          <p:nvPr/>
+        </p:nvSpPr>
+        <p:spPr>
+          <a:xfrm>
+            <a:off x="987552" y="3739896"/>
+            <a:ext cx="512064" cy="512064"/>
+          </a:xfrm>
+          <a:prstGeom prst="roundRect">
+            <a:avLst>
+              <a:gd name="adj" fmla="val 26000"/>
+            </a:avLst>
+          </a:prstGeom>
+          <a:solidFill>
+            <a:srgbClr val="EE0000"/>
+          </a:solidFill>
+          <a:ln>
+            <a:noFill/>
+          </a:ln>
+          <a:effectLst/>
+        </p:spPr>
+        <p:style>
+          <a:lnRef idx="1">
+            <a:schemeClr val="accent1"/>
+          </a:lnRef>
+          <a:fillRef idx="3">
+            <a:schemeClr val="accent1"/>
+          </a:fillRef>
+          <a:effectRef idx="2">
+            <a:schemeClr val="accent1"/>
+          </a:effectRef>
+          <a:fontRef idx="minor">
+            <a:schemeClr val="lt1"/>
+          </a:fontRef>
+        </p:style>
+        <p:txBody>
+          <a:bodyPr rtlCol="0" anchor="ctr"/>
+          <a:lstStyle/>
+          <a:p>
+            <a:pPr algn="ctr"/>
+          </a:p>
+        </p:txBody>
+      </p:sp>
       <p:pic>
         <p:nvPicPr>
-          <p:cNvPr id="14" name="Picture 13" descr="check_steel.png"/>
+          <p:cNvPr id="17" name="Picture 16" descr="check_white.png"/>
           <p:cNvPicPr>
             <a:picLocks noChangeAspect="1"/>
           </p:cNvPicPr>
@@ -8063,8 +8546,8 @@
         </p:blipFill>
         <p:spPr>
           <a:xfrm>
-            <a:off x="987552" y="4023360"/>
-            <a:ext cx="237744" cy="237744"/>
+            <a:off x="1110447" y="3862791"/>
+            <a:ext cx="266273" cy="266273"/>
           </a:xfrm>
           <a:prstGeom prst="rect">
             <a:avLst/>
@@ -8073,14 +8556,14 @@
       </p:pic>
       <p:sp>
         <p:nvSpPr>
-          <p:cNvPr id="15" name="TextBox 14"/>
+          <p:cNvPr id="18" name="TextBox 17"/>
           <p:cNvSpPr txBox="1"/>
           <p:nvPr/>
         </p:nvSpPr>
         <p:spPr>
           <a:xfrm>
-            <a:off x="1353312" y="3877056"/>
-            <a:ext cx="5029200" cy="530352"/>
+            <a:off x="1627632" y="3602736"/>
+            <a:ext cx="4206240" cy="786384"/>
           </a:xfrm>
           <a:prstGeom prst="rect">
             <a:avLst/>
@@ -8105,7 +8588,7 @@
               </a:spcAft>
             </a:pPr>
             <a:r>
-              <a:rPr sz="1200" b="0">
+              <a:rPr sz="1150" b="0">
                 <a:solidFill>
                   <a:srgbClr val="1A1A1A"/>
                 </a:solidFill>
@@ -8118,18 +8601,18 @@
       </p:sp>
       <p:sp>
         <p:nvSpPr>
-          <p:cNvPr id="16" name="Rounded Rectangle 15"/>
+          <p:cNvPr id="19" name="Rounded Rectangle 18"/>
           <p:cNvSpPr/>
           <p:nvPr/>
         </p:nvSpPr>
         <p:spPr>
           <a:xfrm>
-            <a:off x="841248" y="4480560"/>
-            <a:ext cx="5715000" cy="530352"/>
+            <a:off x="6254496" y="3602736"/>
+            <a:ext cx="5138928" cy="786384"/>
           </a:xfrm>
           <a:prstGeom prst="roundRect">
             <a:avLst>
-              <a:gd name="adj" fmla="val 6000"/>
+              <a:gd name="adj" fmla="val 7000"/>
             </a:avLst>
           </a:prstGeom>
           <a:solidFill>
@@ -8164,9 +8647,55 @@
           </a:p>
         </p:txBody>
       </p:sp>
+      <p:sp>
+        <p:nvSpPr>
+          <p:cNvPr id="20" name="Rounded Rectangle 19"/>
+          <p:cNvSpPr/>
+          <p:nvPr/>
+        </p:nvSpPr>
+        <p:spPr>
+          <a:xfrm>
+            <a:off x="6400800" y="3739896"/>
+            <a:ext cx="512064" cy="512064"/>
+          </a:xfrm>
+          <a:prstGeom prst="roundRect">
+            <a:avLst>
+              <a:gd name="adj" fmla="val 26000"/>
+            </a:avLst>
+          </a:prstGeom>
+          <a:solidFill>
+            <a:srgbClr val="EE0000"/>
+          </a:solidFill>
+          <a:ln>
+            <a:noFill/>
+          </a:ln>
+          <a:effectLst/>
+        </p:spPr>
+        <p:style>
+          <a:lnRef idx="1">
+            <a:schemeClr val="accent1"/>
+          </a:lnRef>
+          <a:fillRef idx="3">
+            <a:schemeClr val="accent1"/>
+          </a:fillRef>
+          <a:effectRef idx="2">
+            <a:schemeClr val="accent1"/>
+          </a:effectRef>
+          <a:fontRef idx="minor">
+            <a:schemeClr val="lt1"/>
+          </a:fontRef>
+        </p:style>
+        <p:txBody>
+          <a:bodyPr rtlCol="0" anchor="ctr"/>
+          <a:lstStyle/>
+          <a:p>
+            <a:pPr algn="ctr"/>
+          </a:p>
+        </p:txBody>
+      </p:sp>
       <p:pic>
         <p:nvPicPr>
-          <p:cNvPr id="17" name="Picture 16" descr="check_steel.png"/>
+          <p:cNvPr id="21" name="Picture 20" descr="check_white.png"/>
           <p:cNvPicPr>
             <a:picLocks noChangeAspect="1"/>
           </p:cNvPicPr>
@@ -8180,8 +8709,8 @@
         </p:blipFill>
         <p:spPr>
           <a:xfrm>
-            <a:off x="987552" y="4626864"/>
-            <a:ext cx="237744" cy="237744"/>
+            <a:off x="6523695" y="3862791"/>
+            <a:ext cx="266273" cy="266273"/>
           </a:xfrm>
           <a:prstGeom prst="rect">
             <a:avLst/>
@@ -8190,14 +8719,14 @@
       </p:pic>
       <p:sp>
         <p:nvSpPr>
-          <p:cNvPr id="18" name="TextBox 17"/>
+          <p:cNvPr id="22" name="TextBox 21"/>
           <p:cNvSpPr txBox="1"/>
           <p:nvPr/>
         </p:nvSpPr>
         <p:spPr>
           <a:xfrm>
-            <a:off x="1353312" y="4480560"/>
-            <a:ext cx="5029200" cy="530352"/>
+            <a:off x="7040880" y="3602736"/>
+            <a:ext cx="4206240" cy="786384"/>
           </a:xfrm>
           <a:prstGeom prst="rect">
             <a:avLst/>
@@ -8222,7 +8751,7 @@
               </a:spcAft>
             </a:pPr>
             <a:r>
-              <a:rPr sz="1200" b="0">
+              <a:rPr sz="1150" b="0">
                 <a:solidFill>
                   <a:srgbClr val="1A1A1A"/>
                 </a:solidFill>
@@ -8235,18 +8764,18 @@
       </p:sp>
       <p:sp>
         <p:nvSpPr>
-          <p:cNvPr id="19" name="Rounded Rectangle 18"/>
+          <p:cNvPr id="23" name="Rounded Rectangle 22"/>
           <p:cNvSpPr/>
           <p:nvPr/>
         </p:nvSpPr>
         <p:spPr>
           <a:xfrm>
-            <a:off x="841248" y="5084064"/>
-            <a:ext cx="5715000" cy="530352"/>
+            <a:off x="841248" y="4535424"/>
+            <a:ext cx="5138928" cy="786384"/>
           </a:xfrm>
           <a:prstGeom prst="roundRect">
             <a:avLst>
-              <a:gd name="adj" fmla="val 6000"/>
+              <a:gd name="adj" fmla="val 7000"/>
             </a:avLst>
           </a:prstGeom>
           <a:solidFill>
@@ -8281,9 +8810,55 @@
           </a:p>
         </p:txBody>
       </p:sp>
+      <p:sp>
+        <p:nvSpPr>
+          <p:cNvPr id="24" name="Rounded Rectangle 23"/>
+          <p:cNvSpPr/>
+          <p:nvPr/>
+        </p:nvSpPr>
+        <p:spPr>
+          <a:xfrm>
+            <a:off x="987552" y="4672584"/>
+            <a:ext cx="512064" cy="512064"/>
+          </a:xfrm>
+          <a:prstGeom prst="roundRect">
+            <a:avLst>
+              <a:gd name="adj" fmla="val 26000"/>
+            </a:avLst>
+          </a:prstGeom>
+          <a:solidFill>
+            <a:srgbClr val="EE0000"/>
+          </a:solidFill>
+          <a:ln>
+            <a:noFill/>
+          </a:ln>
+          <a:effectLst/>
+        </p:spPr>
+        <p:style>
+          <a:lnRef idx="1">
+            <a:schemeClr val="accent1"/>
+          </a:lnRef>
+          <a:fillRef idx="3">
+            <a:schemeClr val="accent1"/>
+          </a:fillRef>
+          <a:effectRef idx="2">
+            <a:schemeClr val="accent1"/>
+          </a:effectRef>
+          <a:fontRef idx="minor">
+            <a:schemeClr val="lt1"/>
+          </a:fontRef>
+        </p:style>
+        <p:txBody>
+          <a:bodyPr rtlCol="0" anchor="ctr"/>
+          <a:lstStyle/>
+          <a:p>
+            <a:pPr algn="ctr"/>
+          </a:p>
+        </p:txBody>
+      </p:sp>
       <p:pic>
         <p:nvPicPr>
-          <p:cNvPr id="20" name="Picture 19" descr="check_steel.png"/>
+          <p:cNvPr id="25" name="Picture 24" descr="check_white.png"/>
           <p:cNvPicPr>
             <a:picLocks noChangeAspect="1"/>
           </p:cNvPicPr>
@@ -8297,8 +8872,8 @@
         </p:blipFill>
         <p:spPr>
           <a:xfrm>
-            <a:off x="987552" y="5230368"/>
-            <a:ext cx="237744" cy="237744"/>
+            <a:off x="1110447" y="4795479"/>
+            <a:ext cx="266273" cy="266273"/>
           </a:xfrm>
           <a:prstGeom prst="rect">
             <a:avLst/>
@@ -8307,14 +8882,14 @@
       </p:pic>
       <p:sp>
         <p:nvSpPr>
-          <p:cNvPr id="21" name="TextBox 20"/>
+          <p:cNvPr id="26" name="TextBox 25"/>
           <p:cNvSpPr txBox="1"/>
           <p:nvPr/>
         </p:nvSpPr>
         <p:spPr>
           <a:xfrm>
-            <a:off x="1353312" y="5084064"/>
-            <a:ext cx="5029200" cy="530352"/>
+            <a:off x="1627632" y="4535424"/>
+            <a:ext cx="4206240" cy="786384"/>
           </a:xfrm>
           <a:prstGeom prst="rect">
             <a:avLst/>
@@ -8339,221 +8914,13 @@
               </a:spcAft>
             </a:pPr>
             <a:r>
-              <a:rPr sz="1200" b="0">
+              <a:rPr sz="1150" b="0">
                 <a:solidFill>
                   <a:srgbClr val="1A1A1A"/>
                 </a:solidFill>
                 <a:latin typeface="Red Hat Text"/>
               </a:rPr>
               <a:t>Change routing by editing a trigger — never by redeploying an app</a:t>
-            </a:r>
-          </a:p>
-        </p:txBody>
-      </p:sp>
-      <p:sp>
-        <p:nvSpPr>
-          <p:cNvPr id="22" name="Rounded Rectangle 21"/>
-          <p:cNvSpPr/>
-          <p:nvPr/>
-        </p:nvSpPr>
-        <p:spPr>
-          <a:xfrm>
-            <a:off x="6812280" y="2670048"/>
-            <a:ext cx="4538167" cy="2944368"/>
-          </a:xfrm>
-          <a:prstGeom prst="roundRect">
-            <a:avLst>
-              <a:gd name="adj" fmla="val 4000"/>
-            </a:avLst>
-          </a:prstGeom>
-          <a:solidFill>
-            <a:srgbClr val="FFFFFF"/>
-          </a:solidFill>
-          <a:ln w="15240">
-            <a:solidFill>
-              <a:srgbClr val="DDE1E6"/>
-            </a:solidFill>
-          </a:ln>
-          <a:effectLst/>
-        </p:spPr>
-        <p:style>
-          <a:lnRef idx="1">
-            <a:schemeClr val="accent1"/>
-          </a:lnRef>
-          <a:fillRef idx="3">
-            <a:schemeClr val="accent1"/>
-          </a:fillRef>
-          <a:effectRef idx="2">
-            <a:schemeClr val="accent1"/>
-          </a:effectRef>
-          <a:fontRef idx="minor">
-            <a:schemeClr val="lt1"/>
-          </a:fontRef>
-        </p:style>
-        <p:txBody>
-          <a:bodyPr rtlCol="0" anchor="ctr"/>
-          <a:lstStyle/>
-          <a:p>
-            <a:pPr algn="ctr"/>
-          </a:p>
-        </p:txBody>
-      </p:sp>
-      <p:sp>
-        <p:nvSpPr>
-          <p:cNvPr id="23" name="Rounded Rectangle 22"/>
-          <p:cNvSpPr/>
-          <p:nvPr/>
-        </p:nvSpPr>
-        <p:spPr>
-          <a:xfrm>
-            <a:off x="7013448" y="2871216"/>
-            <a:ext cx="1298448" cy="310896"/>
-          </a:xfrm>
-          <a:prstGeom prst="roundRect">
-            <a:avLst>
-              <a:gd name="adj" fmla="val 50000"/>
-            </a:avLst>
-          </a:prstGeom>
-          <a:solidFill>
-            <a:srgbClr val="FCECEC"/>
-          </a:solidFill>
-          <a:ln>
-            <a:noFill/>
-          </a:ln>
-          <a:effectLst/>
-        </p:spPr>
-        <p:style>
-          <a:lnRef idx="1">
-            <a:schemeClr val="accent1"/>
-          </a:lnRef>
-          <a:fillRef idx="3">
-            <a:schemeClr val="accent1"/>
-          </a:fillRef>
-          <a:effectRef idx="2">
-            <a:schemeClr val="accent1"/>
-          </a:effectRef>
-          <a:fontRef idx="minor">
-            <a:schemeClr val="lt1"/>
-          </a:fontRef>
-        </p:style>
-        <p:txBody>
-          <a:bodyPr rtlCol="0" anchor="ctr"/>
-          <a:lstStyle/>
-          <a:p>
-            <a:pPr algn="ctr"/>
-          </a:p>
-        </p:txBody>
-      </p:sp>
-      <p:sp>
-        <p:nvSpPr>
-          <p:cNvPr id="24" name="TextBox 23"/>
-          <p:cNvSpPr txBox="1"/>
-          <p:nvPr/>
-        </p:nvSpPr>
-        <p:spPr>
-          <a:xfrm>
-            <a:off x="7013448" y="2871216"/>
-            <a:ext cx="1298448" cy="310896"/>
-          </a:xfrm>
-          <a:prstGeom prst="rect">
-            <a:avLst/>
-          </a:prstGeom>
-          <a:noFill/>
-        </p:spPr>
-        <p:txBody>
-          <a:bodyPr wrap="none" anchor="ctr" lIns="0" rIns="0" tIns="0" bIns="0">
-            <a:spAutoFit/>
-          </a:bodyPr>
-          <a:lstStyle/>
-          <a:p>
-            <a:pPr algn="ctr">
-              <a:lnSpc>
-                <a:spcPct val="106000"/>
-              </a:lnSpc>
-              <a:spcBef>
-                <a:spcPts val="0"/>
-              </a:spcBef>
-              <a:spcAft>
-                <a:spcPts val="0"/>
-              </a:spcAft>
-            </a:pPr>
-            <a:r>
-              <a:rPr sz="850" b="1">
-                <a:solidFill>
-                  <a:srgbClr val="B80000"/>
-                </a:solidFill>
-                <a:latin typeface="Red Hat Display"/>
-              </a:rPr>
-              <a:t>MEDIA PASS</a:t>
-            </a:r>
-          </a:p>
-        </p:txBody>
-      </p:sp>
-      <p:pic>
-        <p:nvPicPr>
-          <p:cNvPr id="25" name="Picture 24" descr="eye_slate.png"/>
-          <p:cNvPicPr>
-            <a:picLocks noChangeAspect="1"/>
-          </p:cNvPicPr>
-          <p:nvPr/>
-        </p:nvPicPr>
-        <p:blipFill>
-          <a:blip r:embed="rId4"/>
-          <a:stretch>
-            <a:fillRect/>
-          </a:stretch>
-        </p:blipFill>
-        <p:spPr>
-          <a:xfrm>
-            <a:off x="8843619" y="3383280"/>
-            <a:ext cx="475488" cy="475488"/>
-          </a:xfrm>
-          <a:prstGeom prst="rect">
-            <a:avLst/>
-          </a:prstGeom>
-        </p:spPr>
-      </p:pic>
-      <p:sp>
-        <p:nvSpPr>
-          <p:cNvPr id="26" name="TextBox 25"/>
-          <p:cNvSpPr txBox="1"/>
-          <p:nvPr/>
-        </p:nvSpPr>
-        <p:spPr>
-          <a:xfrm>
-            <a:off x="7050024" y="3995928"/>
-            <a:ext cx="4062679" cy="1481328"/>
-          </a:xfrm>
-          <a:prstGeom prst="rect">
-            <a:avLst/>
-          </a:prstGeom>
-          <a:noFill/>
-        </p:spPr>
-        <p:txBody>
-          <a:bodyPr wrap="square" anchor="t" lIns="0" rIns="0" tIns="0" bIns="0">
-            <a:spAutoFit/>
-          </a:bodyPr>
-          <a:lstStyle/>
-          <a:p>
-            <a:pPr algn="l">
-              <a:lnSpc>
-                <a:spcPct val="120000"/>
-              </a:lnSpc>
-              <a:spcBef>
-                <a:spcPts val="0"/>
-              </a:spcBef>
-              <a:spcAft>
-                <a:spcPts val="0"/>
-              </a:spcAft>
-            </a:pPr>
-            <a:r>
-              <a:rPr sz="950" b="0">
-                <a:solidFill>
-                  <a:srgbClr val="8A9099"/>
-                </a:solidFill>
-                <a:latin typeface="Red Hat Text"/>
-              </a:rPr>
-              <a:t>One broker with three triggers (catch-all / filter:type / filter:claimpriority) to one consumer. Three event chips drop in — "submitted" (lights 2 triggers), "rejected" (lights 1), "submitted+high" (lights 3) — each annotated with its display count. A callout on the rejected chip: "202 from the broker, but DROPPED by both filters."</a:t>
             </a:r>
           </a:p>
         </p:txBody>
@@ -8906,11 +9273,11 @@
         <p:spPr>
           <a:xfrm>
             <a:off x="841248" y="2670048"/>
-            <a:ext cx="5715000" cy="530352"/>
+            <a:ext cx="5138928" cy="786384"/>
           </a:xfrm>
           <a:prstGeom prst="roundRect">
             <a:avLst>
-              <a:gd name="adj" fmla="val 6000"/>
+              <a:gd name="adj" fmla="val 7000"/>
             </a:avLst>
           </a:prstGeom>
           <a:solidFill>
@@ -8945,9 +9312,55 @@
           </a:p>
         </p:txBody>
       </p:sp>
+      <p:sp>
+        <p:nvSpPr>
+          <p:cNvPr id="8" name="Rounded Rectangle 7"/>
+          <p:cNvSpPr/>
+          <p:nvPr/>
+        </p:nvSpPr>
+        <p:spPr>
+          <a:xfrm>
+            <a:off x="987552" y="2807208"/>
+            <a:ext cx="512064" cy="512064"/>
+          </a:xfrm>
+          <a:prstGeom prst="roundRect">
+            <a:avLst>
+              <a:gd name="adj" fmla="val 26000"/>
+            </a:avLst>
+          </a:prstGeom>
+          <a:solidFill>
+            <a:srgbClr val="EE0000"/>
+          </a:solidFill>
+          <a:ln>
+            <a:noFill/>
+          </a:ln>
+          <a:effectLst/>
+        </p:spPr>
+        <p:style>
+          <a:lnRef idx="1">
+            <a:schemeClr val="accent1"/>
+          </a:lnRef>
+          <a:fillRef idx="3">
+            <a:schemeClr val="accent1"/>
+          </a:fillRef>
+          <a:effectRef idx="2">
+            <a:schemeClr val="accent1"/>
+          </a:effectRef>
+          <a:fontRef idx="minor">
+            <a:schemeClr val="lt1"/>
+          </a:fontRef>
+        </p:style>
+        <p:txBody>
+          <a:bodyPr rtlCol="0" anchor="ctr"/>
+          <a:lstStyle/>
+          <a:p>
+            <a:pPr algn="ctr"/>
+          </a:p>
+        </p:txBody>
+      </p:sp>
       <p:pic>
         <p:nvPicPr>
-          <p:cNvPr id="8" name="Picture 7" descr="check_steel.png"/>
+          <p:cNvPr id="9" name="Picture 8" descr="check_white.png"/>
           <p:cNvPicPr>
             <a:picLocks noChangeAspect="1"/>
           </p:cNvPicPr>
@@ -8961,8 +9374,8 @@
         </p:blipFill>
         <p:spPr>
           <a:xfrm>
-            <a:off x="987552" y="2816352"/>
-            <a:ext cx="237744" cy="237744"/>
+            <a:off x="1110447" y="2930103"/>
+            <a:ext cx="266273" cy="266273"/>
           </a:xfrm>
           <a:prstGeom prst="rect">
             <a:avLst/>
@@ -8971,14 +9384,14 @@
       </p:pic>
       <p:sp>
         <p:nvSpPr>
-          <p:cNvPr id="9" name="TextBox 8"/>
+          <p:cNvPr id="10" name="TextBox 9"/>
           <p:cNvSpPr txBox="1"/>
           <p:nvPr/>
         </p:nvSpPr>
         <p:spPr>
           <a:xfrm>
-            <a:off x="1353312" y="2670048"/>
-            <a:ext cx="5029200" cy="530352"/>
+            <a:off x="1627632" y="2670048"/>
+            <a:ext cx="4206240" cy="786384"/>
           </a:xfrm>
           <a:prstGeom prst="rect">
             <a:avLst/>
@@ -9003,7 +9416,7 @@
               </a:spcAft>
             </a:pPr>
             <a:r>
-              <a:rPr sz="1200" b="0">
+              <a:rPr sz="1150" b="0">
                 <a:solidFill>
                   <a:srgbClr val="1A1A1A"/>
                 </a:solidFill>
@@ -9016,18 +9429,18 @@
       </p:sp>
       <p:sp>
         <p:nvSpPr>
-          <p:cNvPr id="10" name="Rounded Rectangle 9"/>
+          <p:cNvPr id="11" name="Rounded Rectangle 10"/>
           <p:cNvSpPr/>
           <p:nvPr/>
         </p:nvSpPr>
         <p:spPr>
           <a:xfrm>
-            <a:off x="841248" y="3273552"/>
-            <a:ext cx="5715000" cy="530352"/>
+            <a:off x="6254496" y="2670048"/>
+            <a:ext cx="5138928" cy="786384"/>
           </a:xfrm>
           <a:prstGeom prst="roundRect">
             <a:avLst>
-              <a:gd name="adj" fmla="val 6000"/>
+              <a:gd name="adj" fmla="val 7000"/>
             </a:avLst>
           </a:prstGeom>
           <a:solidFill>
@@ -9062,9 +9475,55 @@
           </a:p>
         </p:txBody>
       </p:sp>
+      <p:sp>
+        <p:nvSpPr>
+          <p:cNvPr id="12" name="Rounded Rectangle 11"/>
+          <p:cNvSpPr/>
+          <p:nvPr/>
+        </p:nvSpPr>
+        <p:spPr>
+          <a:xfrm>
+            <a:off x="6400800" y="2807208"/>
+            <a:ext cx="512064" cy="512064"/>
+          </a:xfrm>
+          <a:prstGeom prst="roundRect">
+            <a:avLst>
+              <a:gd name="adj" fmla="val 26000"/>
+            </a:avLst>
+          </a:prstGeom>
+          <a:solidFill>
+            <a:srgbClr val="EE0000"/>
+          </a:solidFill>
+          <a:ln>
+            <a:noFill/>
+          </a:ln>
+          <a:effectLst/>
+        </p:spPr>
+        <p:style>
+          <a:lnRef idx="1">
+            <a:schemeClr val="accent1"/>
+          </a:lnRef>
+          <a:fillRef idx="3">
+            <a:schemeClr val="accent1"/>
+          </a:fillRef>
+          <a:effectRef idx="2">
+            <a:schemeClr val="accent1"/>
+          </a:effectRef>
+          <a:fontRef idx="minor">
+            <a:schemeClr val="lt1"/>
+          </a:fontRef>
+        </p:style>
+        <p:txBody>
+          <a:bodyPr rtlCol="0" anchor="ctr"/>
+          <a:lstStyle/>
+          <a:p>
+            <a:pPr algn="ctr"/>
+          </a:p>
+        </p:txBody>
+      </p:sp>
       <p:pic>
         <p:nvPicPr>
-          <p:cNvPr id="11" name="Picture 10" descr="check_steel.png"/>
+          <p:cNvPr id="13" name="Picture 12" descr="check_white.png"/>
           <p:cNvPicPr>
             <a:picLocks noChangeAspect="1"/>
           </p:cNvPicPr>
@@ -9078,8 +9537,8 @@
         </p:blipFill>
         <p:spPr>
           <a:xfrm>
-            <a:off x="987552" y="3419856"/>
-            <a:ext cx="237744" cy="237744"/>
+            <a:off x="6523695" y="2930103"/>
+            <a:ext cx="266273" cy="266273"/>
           </a:xfrm>
           <a:prstGeom prst="rect">
             <a:avLst/>
@@ -9088,14 +9547,14 @@
       </p:pic>
       <p:sp>
         <p:nvSpPr>
-          <p:cNvPr id="12" name="TextBox 11"/>
+          <p:cNvPr id="14" name="TextBox 13"/>
           <p:cNvSpPr txBox="1"/>
           <p:nvPr/>
         </p:nvSpPr>
         <p:spPr>
           <a:xfrm>
-            <a:off x="1353312" y="3273552"/>
-            <a:ext cx="5029200" cy="530352"/>
+            <a:off x="7040880" y="2670048"/>
+            <a:ext cx="4206240" cy="786384"/>
           </a:xfrm>
           <a:prstGeom prst="rect">
             <a:avLst/>
@@ -9120,7 +9579,7 @@
               </a:spcAft>
             </a:pPr>
             <a:r>
-              <a:rPr sz="1200" b="0">
+              <a:rPr sz="1150" b="0">
                 <a:solidFill>
                   <a:srgbClr val="1A1A1A"/>
                 </a:solidFill>
@@ -9133,18 +9592,18 @@
       </p:sp>
       <p:sp>
         <p:nvSpPr>
-          <p:cNvPr id="13" name="Rounded Rectangle 12"/>
+          <p:cNvPr id="15" name="Rounded Rectangle 14"/>
           <p:cNvSpPr/>
           <p:nvPr/>
         </p:nvSpPr>
         <p:spPr>
           <a:xfrm>
-            <a:off x="841248" y="3877056"/>
-            <a:ext cx="5715000" cy="530352"/>
+            <a:off x="841248" y="3602736"/>
+            <a:ext cx="5138928" cy="786384"/>
           </a:xfrm>
           <a:prstGeom prst="roundRect">
             <a:avLst>
-              <a:gd name="adj" fmla="val 6000"/>
+              <a:gd name="adj" fmla="val 7000"/>
             </a:avLst>
           </a:prstGeom>
           <a:solidFill>
@@ -9179,9 +9638,55 @@
           </a:p>
         </p:txBody>
       </p:sp>
+      <p:sp>
+        <p:nvSpPr>
+          <p:cNvPr id="16" name="Rounded Rectangle 15"/>
+          <p:cNvSpPr/>
+          <p:nvPr/>
+        </p:nvSpPr>
+        <p:spPr>
+          <a:xfrm>
+            <a:off x="987552" y="3739896"/>
+            <a:ext cx="512064" cy="512064"/>
+          </a:xfrm>
+          <a:prstGeom prst="roundRect">
+            <a:avLst>
+              <a:gd name="adj" fmla="val 26000"/>
+            </a:avLst>
+          </a:prstGeom>
+          <a:solidFill>
+            <a:srgbClr val="EE0000"/>
+          </a:solidFill>
+          <a:ln>
+            <a:noFill/>
+          </a:ln>
+          <a:effectLst/>
+        </p:spPr>
+        <p:style>
+          <a:lnRef idx="1">
+            <a:schemeClr val="accent1"/>
+          </a:lnRef>
+          <a:fillRef idx="3">
+            <a:schemeClr val="accent1"/>
+          </a:fillRef>
+          <a:effectRef idx="2">
+            <a:schemeClr val="accent1"/>
+          </a:effectRef>
+          <a:fontRef idx="minor">
+            <a:schemeClr val="lt1"/>
+          </a:fontRef>
+        </p:style>
+        <p:txBody>
+          <a:bodyPr rtlCol="0" anchor="ctr"/>
+          <a:lstStyle/>
+          <a:p>
+            <a:pPr algn="ctr"/>
+          </a:p>
+        </p:txBody>
+      </p:sp>
       <p:pic>
         <p:nvPicPr>
-          <p:cNvPr id="14" name="Picture 13" descr="check_steel.png"/>
+          <p:cNvPr id="17" name="Picture 16" descr="check_white.png"/>
           <p:cNvPicPr>
             <a:picLocks noChangeAspect="1"/>
           </p:cNvPicPr>
@@ -9195,8 +9700,8 @@
         </p:blipFill>
         <p:spPr>
           <a:xfrm>
-            <a:off x="987552" y="4023360"/>
-            <a:ext cx="237744" cy="237744"/>
+            <a:off x="1110447" y="3862791"/>
+            <a:ext cx="266273" cy="266273"/>
           </a:xfrm>
           <a:prstGeom prst="rect">
             <a:avLst/>
@@ -9205,14 +9710,14 @@
       </p:pic>
       <p:sp>
         <p:nvSpPr>
-          <p:cNvPr id="15" name="TextBox 14"/>
+          <p:cNvPr id="18" name="TextBox 17"/>
           <p:cNvSpPr txBox="1"/>
           <p:nvPr/>
         </p:nvSpPr>
         <p:spPr>
           <a:xfrm>
-            <a:off x="1353312" y="3877056"/>
-            <a:ext cx="5029200" cy="530352"/>
+            <a:off x="1627632" y="3602736"/>
+            <a:ext cx="4206240" cy="786384"/>
           </a:xfrm>
           <a:prstGeom prst="rect">
             <a:avLst/>
@@ -9237,7 +9742,7 @@
               </a:spcAft>
             </a:pPr>
             <a:r>
-              <a:rPr sz="1200" b="0">
+              <a:rPr sz="1150" b="0">
                 <a:solidFill>
                   <a:srgbClr val="1A1A1A"/>
                 </a:solidFill>
@@ -9250,18 +9755,18 @@
       </p:sp>
       <p:sp>
         <p:nvSpPr>
-          <p:cNvPr id="16" name="Rounded Rectangle 15"/>
+          <p:cNvPr id="19" name="Rounded Rectangle 18"/>
           <p:cNvSpPr/>
           <p:nvPr/>
         </p:nvSpPr>
         <p:spPr>
           <a:xfrm>
-            <a:off x="841248" y="4480560"/>
-            <a:ext cx="5715000" cy="530352"/>
+            <a:off x="6254496" y="3602736"/>
+            <a:ext cx="5138928" cy="786384"/>
           </a:xfrm>
           <a:prstGeom prst="roundRect">
             <a:avLst>
-              <a:gd name="adj" fmla="val 6000"/>
+              <a:gd name="adj" fmla="val 7000"/>
             </a:avLst>
           </a:prstGeom>
           <a:solidFill>
@@ -9296,9 +9801,55 @@
           </a:p>
         </p:txBody>
       </p:sp>
+      <p:sp>
+        <p:nvSpPr>
+          <p:cNvPr id="20" name="Rounded Rectangle 19"/>
+          <p:cNvSpPr/>
+          <p:nvPr/>
+        </p:nvSpPr>
+        <p:spPr>
+          <a:xfrm>
+            <a:off x="6400800" y="3739896"/>
+            <a:ext cx="512064" cy="512064"/>
+          </a:xfrm>
+          <a:prstGeom prst="roundRect">
+            <a:avLst>
+              <a:gd name="adj" fmla="val 26000"/>
+            </a:avLst>
+          </a:prstGeom>
+          <a:solidFill>
+            <a:srgbClr val="EE0000"/>
+          </a:solidFill>
+          <a:ln>
+            <a:noFill/>
+          </a:ln>
+          <a:effectLst/>
+        </p:spPr>
+        <p:style>
+          <a:lnRef idx="1">
+            <a:schemeClr val="accent1"/>
+          </a:lnRef>
+          <a:fillRef idx="3">
+            <a:schemeClr val="accent1"/>
+          </a:fillRef>
+          <a:effectRef idx="2">
+            <a:schemeClr val="accent1"/>
+          </a:effectRef>
+          <a:fontRef idx="minor">
+            <a:schemeClr val="lt1"/>
+          </a:fontRef>
+        </p:style>
+        <p:txBody>
+          <a:bodyPr rtlCol="0" anchor="ctr"/>
+          <a:lstStyle/>
+          <a:p>
+            <a:pPr algn="ctr"/>
+          </a:p>
+        </p:txBody>
+      </p:sp>
       <p:pic>
         <p:nvPicPr>
-          <p:cNvPr id="17" name="Picture 16" descr="check_steel.png"/>
+          <p:cNvPr id="21" name="Picture 20" descr="check_white.png"/>
           <p:cNvPicPr>
             <a:picLocks noChangeAspect="1"/>
           </p:cNvPicPr>
@@ -9312,8 +9863,8 @@
         </p:blipFill>
         <p:spPr>
           <a:xfrm>
-            <a:off x="987552" y="4626864"/>
-            <a:ext cx="237744" cy="237744"/>
+            <a:off x="6523695" y="3862791"/>
+            <a:ext cx="266273" cy="266273"/>
           </a:xfrm>
           <a:prstGeom prst="rect">
             <a:avLst/>
@@ -9322,14 +9873,14 @@
       </p:pic>
       <p:sp>
         <p:nvSpPr>
-          <p:cNvPr id="18" name="TextBox 17"/>
+          <p:cNvPr id="22" name="TextBox 21"/>
           <p:cNvSpPr txBox="1"/>
           <p:nvPr/>
         </p:nvSpPr>
         <p:spPr>
           <a:xfrm>
-            <a:off x="1353312" y="4480560"/>
-            <a:ext cx="5029200" cy="530352"/>
+            <a:off x="7040880" y="3602736"/>
+            <a:ext cx="4206240" cy="786384"/>
           </a:xfrm>
           <a:prstGeom prst="rect">
             <a:avLst/>
@@ -9354,7 +9905,7 @@
               </a:spcAft>
             </a:pPr>
             <a:r>
-              <a:rPr sz="1200" b="0">
+              <a:rPr sz="1150" b="0">
                 <a:solidFill>
                   <a:srgbClr val="1A1A1A"/>
                 </a:solidFill>
@@ -9367,18 +9918,18 @@
       </p:sp>
       <p:sp>
         <p:nvSpPr>
-          <p:cNvPr id="19" name="Rounded Rectangle 18"/>
+          <p:cNvPr id="23" name="Rounded Rectangle 22"/>
           <p:cNvSpPr/>
           <p:nvPr/>
         </p:nvSpPr>
         <p:spPr>
           <a:xfrm>
-            <a:off x="841248" y="5084064"/>
-            <a:ext cx="5715000" cy="530352"/>
+            <a:off x="841248" y="4535424"/>
+            <a:ext cx="5138928" cy="786384"/>
           </a:xfrm>
           <a:prstGeom prst="roundRect">
             <a:avLst>
-              <a:gd name="adj" fmla="val 6000"/>
+              <a:gd name="adj" fmla="val 7000"/>
             </a:avLst>
           </a:prstGeom>
           <a:solidFill>
@@ -9413,9 +9964,55 @@
           </a:p>
         </p:txBody>
       </p:sp>
+      <p:sp>
+        <p:nvSpPr>
+          <p:cNvPr id="24" name="Rounded Rectangle 23"/>
+          <p:cNvSpPr/>
+          <p:nvPr/>
+        </p:nvSpPr>
+        <p:spPr>
+          <a:xfrm>
+            <a:off x="987552" y="4672584"/>
+            <a:ext cx="512064" cy="512064"/>
+          </a:xfrm>
+          <a:prstGeom prst="roundRect">
+            <a:avLst>
+              <a:gd name="adj" fmla="val 26000"/>
+            </a:avLst>
+          </a:prstGeom>
+          <a:solidFill>
+            <a:srgbClr val="EE0000"/>
+          </a:solidFill>
+          <a:ln>
+            <a:noFill/>
+          </a:ln>
+          <a:effectLst/>
+        </p:spPr>
+        <p:style>
+          <a:lnRef idx="1">
+            <a:schemeClr val="accent1"/>
+          </a:lnRef>
+          <a:fillRef idx="3">
+            <a:schemeClr val="accent1"/>
+          </a:fillRef>
+          <a:effectRef idx="2">
+            <a:schemeClr val="accent1"/>
+          </a:effectRef>
+          <a:fontRef idx="minor">
+            <a:schemeClr val="lt1"/>
+          </a:fontRef>
+        </p:style>
+        <p:txBody>
+          <a:bodyPr rtlCol="0" anchor="ctr"/>
+          <a:lstStyle/>
+          <a:p>
+            <a:pPr algn="ctr"/>
+          </a:p>
+        </p:txBody>
+      </p:sp>
       <p:pic>
         <p:nvPicPr>
-          <p:cNvPr id="20" name="Picture 19" descr="check_steel.png"/>
+          <p:cNvPr id="25" name="Picture 24" descr="check_white.png"/>
           <p:cNvPicPr>
             <a:picLocks noChangeAspect="1"/>
           </p:cNvPicPr>
@@ -9429,8 +10026,8 @@
         </p:blipFill>
         <p:spPr>
           <a:xfrm>
-            <a:off x="987552" y="5230368"/>
-            <a:ext cx="237744" cy="237744"/>
+            <a:off x="1110447" y="4795479"/>
+            <a:ext cx="266273" cy="266273"/>
           </a:xfrm>
           <a:prstGeom prst="rect">
             <a:avLst/>
@@ -9439,14 +10036,14 @@
       </p:pic>
       <p:sp>
         <p:nvSpPr>
-          <p:cNvPr id="21" name="TextBox 20"/>
+          <p:cNvPr id="26" name="TextBox 25"/>
           <p:cNvSpPr txBox="1"/>
           <p:nvPr/>
         </p:nvSpPr>
         <p:spPr>
           <a:xfrm>
-            <a:off x="1353312" y="5084064"/>
-            <a:ext cx="5029200" cy="530352"/>
+            <a:off x="1627632" y="4535424"/>
+            <a:ext cx="4206240" cy="786384"/>
           </a:xfrm>
           <a:prstGeom prst="rect">
             <a:avLst/>
@@ -9471,221 +10068,13 @@
               </a:spcAft>
             </a:pPr>
             <a:r>
-              <a:rPr sz="1200" b="0">
+              <a:rPr sz="1150" b="0">
                 <a:solidFill>
                   <a:srgbClr val="1A1A1A"/>
                 </a:solidFill>
                 <a:latin typeface="Red Hat Text"/>
               </a:rPr>
               <a:t>A DLQ is a diagnosable record — "here are the events we couldn't deliver, and why"</a:t>
-            </a:r>
-          </a:p>
-        </p:txBody>
-      </p:sp>
-      <p:sp>
-        <p:nvSpPr>
-          <p:cNvPr id="22" name="Rounded Rectangle 21"/>
-          <p:cNvSpPr/>
-          <p:nvPr/>
-        </p:nvSpPr>
-        <p:spPr>
-          <a:xfrm>
-            <a:off x="6812280" y="2670048"/>
-            <a:ext cx="4538167" cy="2944368"/>
-          </a:xfrm>
-          <a:prstGeom prst="roundRect">
-            <a:avLst>
-              <a:gd name="adj" fmla="val 4000"/>
-            </a:avLst>
-          </a:prstGeom>
-          <a:solidFill>
-            <a:srgbClr val="FFFFFF"/>
-          </a:solidFill>
-          <a:ln w="15240">
-            <a:solidFill>
-              <a:srgbClr val="DDE1E6"/>
-            </a:solidFill>
-          </a:ln>
-          <a:effectLst/>
-        </p:spPr>
-        <p:style>
-          <a:lnRef idx="1">
-            <a:schemeClr val="accent1"/>
-          </a:lnRef>
-          <a:fillRef idx="3">
-            <a:schemeClr val="accent1"/>
-          </a:fillRef>
-          <a:effectRef idx="2">
-            <a:schemeClr val="accent1"/>
-          </a:effectRef>
-          <a:fontRef idx="minor">
-            <a:schemeClr val="lt1"/>
-          </a:fontRef>
-        </p:style>
-        <p:txBody>
-          <a:bodyPr rtlCol="0" anchor="ctr"/>
-          <a:lstStyle/>
-          <a:p>
-            <a:pPr algn="ctr"/>
-          </a:p>
-        </p:txBody>
-      </p:sp>
-      <p:sp>
-        <p:nvSpPr>
-          <p:cNvPr id="23" name="Rounded Rectangle 22"/>
-          <p:cNvSpPr/>
-          <p:nvPr/>
-        </p:nvSpPr>
-        <p:spPr>
-          <a:xfrm>
-            <a:off x="7013448" y="2871216"/>
-            <a:ext cx="1298448" cy="310896"/>
-          </a:xfrm>
-          <a:prstGeom prst="roundRect">
-            <a:avLst>
-              <a:gd name="adj" fmla="val 50000"/>
-            </a:avLst>
-          </a:prstGeom>
-          <a:solidFill>
-            <a:srgbClr val="FCECEC"/>
-          </a:solidFill>
-          <a:ln>
-            <a:noFill/>
-          </a:ln>
-          <a:effectLst/>
-        </p:spPr>
-        <p:style>
-          <a:lnRef idx="1">
-            <a:schemeClr val="accent1"/>
-          </a:lnRef>
-          <a:fillRef idx="3">
-            <a:schemeClr val="accent1"/>
-          </a:fillRef>
-          <a:effectRef idx="2">
-            <a:schemeClr val="accent1"/>
-          </a:effectRef>
-          <a:fontRef idx="minor">
-            <a:schemeClr val="lt1"/>
-          </a:fontRef>
-        </p:style>
-        <p:txBody>
-          <a:bodyPr rtlCol="0" anchor="ctr"/>
-          <a:lstStyle/>
-          <a:p>
-            <a:pPr algn="ctr"/>
-          </a:p>
-        </p:txBody>
-      </p:sp>
-      <p:sp>
-        <p:nvSpPr>
-          <p:cNvPr id="24" name="TextBox 23"/>
-          <p:cNvSpPr txBox="1"/>
-          <p:nvPr/>
-        </p:nvSpPr>
-        <p:spPr>
-          <a:xfrm>
-            <a:off x="7013448" y="2871216"/>
-            <a:ext cx="1298448" cy="310896"/>
-          </a:xfrm>
-          <a:prstGeom prst="rect">
-            <a:avLst/>
-          </a:prstGeom>
-          <a:noFill/>
-        </p:spPr>
-        <p:txBody>
-          <a:bodyPr wrap="none" anchor="ctr" lIns="0" rIns="0" tIns="0" bIns="0">
-            <a:spAutoFit/>
-          </a:bodyPr>
-          <a:lstStyle/>
-          <a:p>
-            <a:pPr algn="ctr">
-              <a:lnSpc>
-                <a:spcPct val="106000"/>
-              </a:lnSpc>
-              <a:spcBef>
-                <a:spcPts val="0"/>
-              </a:spcBef>
-              <a:spcAft>
-                <a:spcPts val="0"/>
-              </a:spcAft>
-            </a:pPr>
-            <a:r>
-              <a:rPr sz="850" b="1">
-                <a:solidFill>
-                  <a:srgbClr val="B80000"/>
-                </a:solidFill>
-                <a:latin typeface="Red Hat Display"/>
-              </a:rPr>
-              <a:t>MEDIA PASS</a:t>
-            </a:r>
-          </a:p>
-        </p:txBody>
-      </p:sp>
-      <p:pic>
-        <p:nvPicPr>
-          <p:cNvPr id="25" name="Picture 24" descr="eye_slate.png"/>
-          <p:cNvPicPr>
-            <a:picLocks noChangeAspect="1"/>
-          </p:cNvPicPr>
-          <p:nvPr/>
-        </p:nvPicPr>
-        <p:blipFill>
-          <a:blip r:embed="rId4"/>
-          <a:stretch>
-            <a:fillRect/>
-          </a:stretch>
-        </p:blipFill>
-        <p:spPr>
-          <a:xfrm>
-            <a:off x="8843619" y="3383280"/>
-            <a:ext cx="475488" cy="475488"/>
-          </a:xfrm>
-          <a:prstGeom prst="rect">
-            <a:avLst/>
-          </a:prstGeom>
-        </p:spPr>
-      </p:pic>
-      <p:sp>
-        <p:nvSpPr>
-          <p:cNvPr id="26" name="TextBox 25"/>
-          <p:cNvSpPr txBox="1"/>
-          <p:nvPr/>
-        </p:nvSpPr>
-        <p:spPr>
-          <a:xfrm>
-            <a:off x="7050024" y="3995928"/>
-            <a:ext cx="4062679" cy="1481328"/>
-          </a:xfrm>
-          <a:prstGeom prst="rect">
-            <a:avLst/>
-          </a:prstGeom>
-          <a:noFill/>
-        </p:spPr>
-        <p:txBody>
-          <a:bodyPr wrap="square" anchor="t" lIns="0" rIns="0" tIns="0" bIns="0">
-            <a:spAutoFit/>
-          </a:bodyPr>
-          <a:lstStyle/>
-          <a:p>
-            <a:pPr algn="l">
-              <a:lnSpc>
-                <a:spcPct val="120000"/>
-              </a:lnSpc>
-              <a:spcBef>
-                <a:spcPts val="0"/>
-              </a:spcBef>
-              <a:spcAft>
-                <a:spcPts val="0"/>
-              </a:spcAft>
-            </a:pPr>
-            <a:r>
-              <a:rPr sz="950" b="0">
-                <a:solidFill>
-                  <a:srgbClr val="8A9099"/>
-                </a:solidFill>
-                <a:latin typeface="Red Hat Text"/>
-              </a:rPr>
-              <a:t>A trigger→consumer edge with the consumer marked broken (red X). The event bounces: attempt 0, retry 1 (1s), retry 2 (2s), retry 3 (4s), each a small arrow, total "~8s." Then a fat arrow to the dead-letter sink showing the dead event card with `knativeerrorcode: 404` and `knativeerrordest: …/process` highlighted. Caption: "not dropped — dead-lettered, with why."</a:t>
             </a:r>
           </a:p>
         </p:txBody>
@@ -10038,11 +10427,11 @@
         <p:spPr>
           <a:xfrm>
             <a:off x="841248" y="2670048"/>
-            <a:ext cx="5715000" cy="530352"/>
+            <a:ext cx="5138928" cy="786384"/>
           </a:xfrm>
           <a:prstGeom prst="roundRect">
             <a:avLst>
-              <a:gd name="adj" fmla="val 6000"/>
+              <a:gd name="adj" fmla="val 7000"/>
             </a:avLst>
           </a:prstGeom>
           <a:solidFill>
@@ -10077,9 +10466,55 @@
           </a:p>
         </p:txBody>
       </p:sp>
+      <p:sp>
+        <p:nvSpPr>
+          <p:cNvPr id="8" name="Rounded Rectangle 7"/>
+          <p:cNvSpPr/>
+          <p:nvPr/>
+        </p:nvSpPr>
+        <p:spPr>
+          <a:xfrm>
+            <a:off x="987552" y="2807208"/>
+            <a:ext cx="512064" cy="512064"/>
+          </a:xfrm>
+          <a:prstGeom prst="roundRect">
+            <a:avLst>
+              <a:gd name="adj" fmla="val 26000"/>
+            </a:avLst>
+          </a:prstGeom>
+          <a:solidFill>
+            <a:srgbClr val="EE0000"/>
+          </a:solidFill>
+          <a:ln>
+            <a:noFill/>
+          </a:ln>
+          <a:effectLst/>
+        </p:spPr>
+        <p:style>
+          <a:lnRef idx="1">
+            <a:schemeClr val="accent1"/>
+          </a:lnRef>
+          <a:fillRef idx="3">
+            <a:schemeClr val="accent1"/>
+          </a:fillRef>
+          <a:effectRef idx="2">
+            <a:schemeClr val="accent1"/>
+          </a:effectRef>
+          <a:fontRef idx="minor">
+            <a:schemeClr val="lt1"/>
+          </a:fontRef>
+        </p:style>
+        <p:txBody>
+          <a:bodyPr rtlCol="0" anchor="ctr"/>
+          <a:lstStyle/>
+          <a:p>
+            <a:pPr algn="ctr"/>
+          </a:p>
+        </p:txBody>
+      </p:sp>
       <p:pic>
         <p:nvPicPr>
-          <p:cNvPr id="8" name="Picture 7" descr="check_steel.png"/>
+          <p:cNvPr id="9" name="Picture 8" descr="check_white.png"/>
           <p:cNvPicPr>
             <a:picLocks noChangeAspect="1"/>
           </p:cNvPicPr>
@@ -10093,8 +10528,8 @@
         </p:blipFill>
         <p:spPr>
           <a:xfrm>
-            <a:off x="987552" y="2816352"/>
-            <a:ext cx="237744" cy="237744"/>
+            <a:off x="1110447" y="2930103"/>
+            <a:ext cx="266273" cy="266273"/>
           </a:xfrm>
           <a:prstGeom prst="rect">
             <a:avLst/>
@@ -10103,14 +10538,14 @@
       </p:pic>
       <p:sp>
         <p:nvSpPr>
-          <p:cNvPr id="9" name="TextBox 8"/>
+          <p:cNvPr id="10" name="TextBox 9"/>
           <p:cNvSpPr txBox="1"/>
           <p:nvPr/>
         </p:nvSpPr>
         <p:spPr>
           <a:xfrm>
-            <a:off x="1353312" y="2670048"/>
-            <a:ext cx="5029200" cy="530352"/>
+            <a:off x="1627632" y="2670048"/>
+            <a:ext cx="4206240" cy="786384"/>
           </a:xfrm>
           <a:prstGeom prst="rect">
             <a:avLst/>
@@ -10135,7 +10570,7 @@
               </a:spcAft>
             </a:pPr>
             <a:r>
-              <a:rPr sz="1200" b="0">
+              <a:rPr sz="1150" b="0">
                 <a:solidFill>
                   <a:srgbClr val="1A1A1A"/>
                 </a:solidFill>
@@ -10148,18 +10583,18 @@
       </p:sp>
       <p:sp>
         <p:nvSpPr>
-          <p:cNvPr id="10" name="Rounded Rectangle 9"/>
+          <p:cNvPr id="11" name="Rounded Rectangle 10"/>
           <p:cNvSpPr/>
           <p:nvPr/>
         </p:nvSpPr>
         <p:spPr>
           <a:xfrm>
-            <a:off x="841248" y="3273552"/>
-            <a:ext cx="5715000" cy="530352"/>
+            <a:off x="6254496" y="2670048"/>
+            <a:ext cx="5138928" cy="786384"/>
           </a:xfrm>
           <a:prstGeom prst="roundRect">
             <a:avLst>
-              <a:gd name="adj" fmla="val 6000"/>
+              <a:gd name="adj" fmla="val 7000"/>
             </a:avLst>
           </a:prstGeom>
           <a:solidFill>
@@ -10194,9 +10629,55 @@
           </a:p>
         </p:txBody>
       </p:sp>
+      <p:sp>
+        <p:nvSpPr>
+          <p:cNvPr id="12" name="Rounded Rectangle 11"/>
+          <p:cNvSpPr/>
+          <p:nvPr/>
+        </p:nvSpPr>
+        <p:spPr>
+          <a:xfrm>
+            <a:off x="6400800" y="2807208"/>
+            <a:ext cx="512064" cy="512064"/>
+          </a:xfrm>
+          <a:prstGeom prst="roundRect">
+            <a:avLst>
+              <a:gd name="adj" fmla="val 26000"/>
+            </a:avLst>
+          </a:prstGeom>
+          <a:solidFill>
+            <a:srgbClr val="EE0000"/>
+          </a:solidFill>
+          <a:ln>
+            <a:noFill/>
+          </a:ln>
+          <a:effectLst/>
+        </p:spPr>
+        <p:style>
+          <a:lnRef idx="1">
+            <a:schemeClr val="accent1"/>
+          </a:lnRef>
+          <a:fillRef idx="3">
+            <a:schemeClr val="accent1"/>
+          </a:fillRef>
+          <a:effectRef idx="2">
+            <a:schemeClr val="accent1"/>
+          </a:effectRef>
+          <a:fontRef idx="minor">
+            <a:schemeClr val="lt1"/>
+          </a:fontRef>
+        </p:style>
+        <p:txBody>
+          <a:bodyPr rtlCol="0" anchor="ctr"/>
+          <a:lstStyle/>
+          <a:p>
+            <a:pPr algn="ctr"/>
+          </a:p>
+        </p:txBody>
+      </p:sp>
       <p:pic>
         <p:nvPicPr>
-          <p:cNvPr id="11" name="Picture 10" descr="check_steel.png"/>
+          <p:cNvPr id="13" name="Picture 12" descr="check_white.png"/>
           <p:cNvPicPr>
             <a:picLocks noChangeAspect="1"/>
           </p:cNvPicPr>
@@ -10210,8 +10691,8 @@
         </p:blipFill>
         <p:spPr>
           <a:xfrm>
-            <a:off x="987552" y="3419856"/>
-            <a:ext cx="237744" cy="237744"/>
+            <a:off x="6523695" y="2930103"/>
+            <a:ext cx="266273" cy="266273"/>
           </a:xfrm>
           <a:prstGeom prst="rect">
             <a:avLst/>
@@ -10220,14 +10701,14 @@
       </p:pic>
       <p:sp>
         <p:nvSpPr>
-          <p:cNvPr id="12" name="TextBox 11"/>
+          <p:cNvPr id="14" name="TextBox 13"/>
           <p:cNvSpPr txBox="1"/>
           <p:nvPr/>
         </p:nvSpPr>
         <p:spPr>
           <a:xfrm>
-            <a:off x="1353312" y="3273552"/>
-            <a:ext cx="5029200" cy="530352"/>
+            <a:off x="7040880" y="2670048"/>
+            <a:ext cx="4206240" cy="786384"/>
           </a:xfrm>
           <a:prstGeom prst="rect">
             <a:avLst/>
@@ -10252,7 +10733,7 @@
               </a:spcAft>
             </a:pPr>
             <a:r>
-              <a:rPr sz="1200" b="0">
+              <a:rPr sz="1150" b="0">
                 <a:solidFill>
                   <a:srgbClr val="1A1A1A"/>
                 </a:solidFill>
@@ -10265,18 +10746,18 @@
       </p:sp>
       <p:sp>
         <p:nvSpPr>
-          <p:cNvPr id="13" name="Rounded Rectangle 12"/>
+          <p:cNvPr id="15" name="Rounded Rectangle 14"/>
           <p:cNvSpPr/>
           <p:nvPr/>
         </p:nvSpPr>
         <p:spPr>
           <a:xfrm>
-            <a:off x="841248" y="3877056"/>
-            <a:ext cx="5715000" cy="530352"/>
+            <a:off x="841248" y="3602736"/>
+            <a:ext cx="5138928" cy="786384"/>
           </a:xfrm>
           <a:prstGeom prst="roundRect">
             <a:avLst>
-              <a:gd name="adj" fmla="val 6000"/>
+              <a:gd name="adj" fmla="val 7000"/>
             </a:avLst>
           </a:prstGeom>
           <a:solidFill>
@@ -10311,9 +10792,55 @@
           </a:p>
         </p:txBody>
       </p:sp>
+      <p:sp>
+        <p:nvSpPr>
+          <p:cNvPr id="16" name="Rounded Rectangle 15"/>
+          <p:cNvSpPr/>
+          <p:nvPr/>
+        </p:nvSpPr>
+        <p:spPr>
+          <a:xfrm>
+            <a:off x="987552" y="3739896"/>
+            <a:ext cx="512064" cy="512064"/>
+          </a:xfrm>
+          <a:prstGeom prst="roundRect">
+            <a:avLst>
+              <a:gd name="adj" fmla="val 26000"/>
+            </a:avLst>
+          </a:prstGeom>
+          <a:solidFill>
+            <a:srgbClr val="EE0000"/>
+          </a:solidFill>
+          <a:ln>
+            <a:noFill/>
+          </a:ln>
+          <a:effectLst/>
+        </p:spPr>
+        <p:style>
+          <a:lnRef idx="1">
+            <a:schemeClr val="accent1"/>
+          </a:lnRef>
+          <a:fillRef idx="3">
+            <a:schemeClr val="accent1"/>
+          </a:fillRef>
+          <a:effectRef idx="2">
+            <a:schemeClr val="accent1"/>
+          </a:effectRef>
+          <a:fontRef idx="minor">
+            <a:schemeClr val="lt1"/>
+          </a:fontRef>
+        </p:style>
+        <p:txBody>
+          <a:bodyPr rtlCol="0" anchor="ctr"/>
+          <a:lstStyle/>
+          <a:p>
+            <a:pPr algn="ctr"/>
+          </a:p>
+        </p:txBody>
+      </p:sp>
       <p:pic>
         <p:nvPicPr>
-          <p:cNvPr id="14" name="Picture 13" descr="check_steel.png"/>
+          <p:cNvPr id="17" name="Picture 16" descr="check_white.png"/>
           <p:cNvPicPr>
             <a:picLocks noChangeAspect="1"/>
           </p:cNvPicPr>
@@ -10327,8 +10854,8 @@
         </p:blipFill>
         <p:spPr>
           <a:xfrm>
-            <a:off x="987552" y="4023360"/>
-            <a:ext cx="237744" cy="237744"/>
+            <a:off x="1110447" y="3862791"/>
+            <a:ext cx="266273" cy="266273"/>
           </a:xfrm>
           <a:prstGeom prst="rect">
             <a:avLst/>
@@ -10337,14 +10864,14 @@
       </p:pic>
       <p:sp>
         <p:nvSpPr>
-          <p:cNvPr id="15" name="TextBox 14"/>
+          <p:cNvPr id="18" name="TextBox 17"/>
           <p:cNvSpPr txBox="1"/>
           <p:nvPr/>
         </p:nvSpPr>
         <p:spPr>
           <a:xfrm>
-            <a:off x="1353312" y="3877056"/>
-            <a:ext cx="5029200" cy="530352"/>
+            <a:off x="1627632" y="3602736"/>
+            <a:ext cx="4206240" cy="786384"/>
           </a:xfrm>
           <a:prstGeom prst="rect">
             <a:avLst/>
@@ -10369,7 +10896,7 @@
               </a:spcAft>
             </a:pPr>
             <a:r>
-              <a:rPr sz="1200" b="0">
+              <a:rPr sz="1150" b="0">
                 <a:solidFill>
                   <a:srgbClr val="1A1A1A"/>
                 </a:solidFill>
@@ -10382,18 +10909,18 @@
       </p:sp>
       <p:sp>
         <p:nvSpPr>
-          <p:cNvPr id="16" name="Rounded Rectangle 15"/>
+          <p:cNvPr id="19" name="Rounded Rectangle 18"/>
           <p:cNvSpPr/>
           <p:nvPr/>
         </p:nvSpPr>
         <p:spPr>
           <a:xfrm>
-            <a:off x="841248" y="4480560"/>
-            <a:ext cx="5715000" cy="530352"/>
+            <a:off x="6254496" y="3602736"/>
+            <a:ext cx="5138928" cy="786384"/>
           </a:xfrm>
           <a:prstGeom prst="roundRect">
             <a:avLst>
-              <a:gd name="adj" fmla="val 6000"/>
+              <a:gd name="adj" fmla="val 7000"/>
             </a:avLst>
           </a:prstGeom>
           <a:solidFill>
@@ -10428,9 +10955,55 @@
           </a:p>
         </p:txBody>
       </p:sp>
+      <p:sp>
+        <p:nvSpPr>
+          <p:cNvPr id="20" name="Rounded Rectangle 19"/>
+          <p:cNvSpPr/>
+          <p:nvPr/>
+        </p:nvSpPr>
+        <p:spPr>
+          <a:xfrm>
+            <a:off x="6400800" y="3739896"/>
+            <a:ext cx="512064" cy="512064"/>
+          </a:xfrm>
+          <a:prstGeom prst="roundRect">
+            <a:avLst>
+              <a:gd name="adj" fmla="val 26000"/>
+            </a:avLst>
+          </a:prstGeom>
+          <a:solidFill>
+            <a:srgbClr val="EE0000"/>
+          </a:solidFill>
+          <a:ln>
+            <a:noFill/>
+          </a:ln>
+          <a:effectLst/>
+        </p:spPr>
+        <p:style>
+          <a:lnRef idx="1">
+            <a:schemeClr val="accent1"/>
+          </a:lnRef>
+          <a:fillRef idx="3">
+            <a:schemeClr val="accent1"/>
+          </a:fillRef>
+          <a:effectRef idx="2">
+            <a:schemeClr val="accent1"/>
+          </a:effectRef>
+          <a:fontRef idx="minor">
+            <a:schemeClr val="lt1"/>
+          </a:fontRef>
+        </p:style>
+        <p:txBody>
+          <a:bodyPr rtlCol="0" anchor="ctr"/>
+          <a:lstStyle/>
+          <a:p>
+            <a:pPr algn="ctr"/>
+          </a:p>
+        </p:txBody>
+      </p:sp>
       <p:pic>
         <p:nvPicPr>
-          <p:cNvPr id="17" name="Picture 16" descr="check_steel.png"/>
+          <p:cNvPr id="21" name="Picture 20" descr="check_white.png"/>
           <p:cNvPicPr>
             <a:picLocks noChangeAspect="1"/>
           </p:cNvPicPr>
@@ -10444,8 +11017,8 @@
         </p:blipFill>
         <p:spPr>
           <a:xfrm>
-            <a:off x="987552" y="4626864"/>
-            <a:ext cx="237744" cy="237744"/>
+            <a:off x="6523695" y="3862791"/>
+            <a:ext cx="266273" cy="266273"/>
           </a:xfrm>
           <a:prstGeom prst="rect">
             <a:avLst/>
@@ -10454,14 +11027,14 @@
       </p:pic>
       <p:sp>
         <p:nvSpPr>
-          <p:cNvPr id="18" name="TextBox 17"/>
+          <p:cNvPr id="22" name="TextBox 21"/>
           <p:cNvSpPr txBox="1"/>
           <p:nvPr/>
         </p:nvSpPr>
         <p:spPr>
           <a:xfrm>
-            <a:off x="1353312" y="4480560"/>
-            <a:ext cx="5029200" cy="530352"/>
+            <a:off x="7040880" y="3602736"/>
+            <a:ext cx="4206240" cy="786384"/>
           </a:xfrm>
           <a:prstGeom prst="rect">
             <a:avLst/>
@@ -10486,7 +11059,7 @@
               </a:spcAft>
             </a:pPr>
             <a:r>
-              <a:rPr sz="1200" b="0">
+              <a:rPr sz="1150" b="0">
                 <a:solidFill>
                   <a:srgbClr val="1A1A1A"/>
                 </a:solidFill>
@@ -10499,18 +11072,18 @@
       </p:sp>
       <p:sp>
         <p:nvSpPr>
-          <p:cNvPr id="19" name="Rounded Rectangle 18"/>
+          <p:cNvPr id="23" name="Rounded Rectangle 22"/>
           <p:cNvSpPr/>
           <p:nvPr/>
         </p:nvSpPr>
         <p:spPr>
           <a:xfrm>
-            <a:off x="841248" y="5084064"/>
-            <a:ext cx="5715000" cy="530352"/>
+            <a:off x="841248" y="4535424"/>
+            <a:ext cx="5138928" cy="786384"/>
           </a:xfrm>
           <a:prstGeom prst="roundRect">
             <a:avLst>
-              <a:gd name="adj" fmla="val 6000"/>
+              <a:gd name="adj" fmla="val 7000"/>
             </a:avLst>
           </a:prstGeom>
           <a:solidFill>
@@ -10545,9 +11118,55 @@
           </a:p>
         </p:txBody>
       </p:sp>
+      <p:sp>
+        <p:nvSpPr>
+          <p:cNvPr id="24" name="Rounded Rectangle 23"/>
+          <p:cNvSpPr/>
+          <p:nvPr/>
+        </p:nvSpPr>
+        <p:spPr>
+          <a:xfrm>
+            <a:off x="987552" y="4672584"/>
+            <a:ext cx="512064" cy="512064"/>
+          </a:xfrm>
+          <a:prstGeom prst="roundRect">
+            <a:avLst>
+              <a:gd name="adj" fmla="val 26000"/>
+            </a:avLst>
+          </a:prstGeom>
+          <a:solidFill>
+            <a:srgbClr val="EE0000"/>
+          </a:solidFill>
+          <a:ln>
+            <a:noFill/>
+          </a:ln>
+          <a:effectLst/>
+        </p:spPr>
+        <p:style>
+          <a:lnRef idx="1">
+            <a:schemeClr val="accent1"/>
+          </a:lnRef>
+          <a:fillRef idx="3">
+            <a:schemeClr val="accent1"/>
+          </a:fillRef>
+          <a:effectRef idx="2">
+            <a:schemeClr val="accent1"/>
+          </a:effectRef>
+          <a:fontRef idx="minor">
+            <a:schemeClr val="lt1"/>
+          </a:fontRef>
+        </p:style>
+        <p:txBody>
+          <a:bodyPr rtlCol="0" anchor="ctr"/>
+          <a:lstStyle/>
+          <a:p>
+            <a:pPr algn="ctr"/>
+          </a:p>
+        </p:txBody>
+      </p:sp>
       <p:pic>
         <p:nvPicPr>
-          <p:cNvPr id="20" name="Picture 19" descr="check_steel.png"/>
+          <p:cNvPr id="25" name="Picture 24" descr="check_white.png"/>
           <p:cNvPicPr>
             <a:picLocks noChangeAspect="1"/>
           </p:cNvPicPr>
@@ -10561,8 +11180,8 @@
         </p:blipFill>
         <p:spPr>
           <a:xfrm>
-            <a:off x="987552" y="5230368"/>
-            <a:ext cx="237744" cy="237744"/>
+            <a:off x="1110447" y="4795479"/>
+            <a:ext cx="266273" cy="266273"/>
           </a:xfrm>
           <a:prstGeom prst="rect">
             <a:avLst/>
@@ -10571,14 +11190,14 @@
       </p:pic>
       <p:sp>
         <p:nvSpPr>
-          <p:cNvPr id="21" name="TextBox 20"/>
+          <p:cNvPr id="26" name="TextBox 25"/>
           <p:cNvSpPr txBox="1"/>
           <p:nvPr/>
         </p:nvSpPr>
         <p:spPr>
           <a:xfrm>
-            <a:off x="1353312" y="5084064"/>
-            <a:ext cx="5029200" cy="530352"/>
+            <a:off x="1627632" y="4535424"/>
+            <a:ext cx="4206240" cy="786384"/>
           </a:xfrm>
           <a:prstGeom prst="rect">
             <a:avLst/>
@@ -10603,221 +11222,13 @@
               </a:spcAft>
             </a:pPr>
             <a:r>
-              <a:rPr sz="1200" b="0">
+              <a:rPr sz="1150" b="0">
                 <a:solidFill>
                   <a:srgbClr val="1A1A1A"/>
                 </a:solidFill>
                 <a:latin typeface="Red Hat Text"/>
               </a:rPr>
               <a:t>Swapping is a broker-class change; triggers/filters/consumers UNCHANGED</a:t>
-            </a:r>
-          </a:p>
-        </p:txBody>
-      </p:sp>
-      <p:sp>
-        <p:nvSpPr>
-          <p:cNvPr id="22" name="Rounded Rectangle 21"/>
-          <p:cNvSpPr/>
-          <p:nvPr/>
-        </p:nvSpPr>
-        <p:spPr>
-          <a:xfrm>
-            <a:off x="6812280" y="2670048"/>
-            <a:ext cx="4538167" cy="2944368"/>
-          </a:xfrm>
-          <a:prstGeom prst="roundRect">
-            <a:avLst>
-              <a:gd name="adj" fmla="val 4000"/>
-            </a:avLst>
-          </a:prstGeom>
-          <a:solidFill>
-            <a:srgbClr val="FFFFFF"/>
-          </a:solidFill>
-          <a:ln w="15240">
-            <a:solidFill>
-              <a:srgbClr val="DDE1E6"/>
-            </a:solidFill>
-          </a:ln>
-          <a:effectLst/>
-        </p:spPr>
-        <p:style>
-          <a:lnRef idx="1">
-            <a:schemeClr val="accent1"/>
-          </a:lnRef>
-          <a:fillRef idx="3">
-            <a:schemeClr val="accent1"/>
-          </a:fillRef>
-          <a:effectRef idx="2">
-            <a:schemeClr val="accent1"/>
-          </a:effectRef>
-          <a:fontRef idx="minor">
-            <a:schemeClr val="lt1"/>
-          </a:fontRef>
-        </p:style>
-        <p:txBody>
-          <a:bodyPr rtlCol="0" anchor="ctr"/>
-          <a:lstStyle/>
-          <a:p>
-            <a:pPr algn="ctr"/>
-          </a:p>
-        </p:txBody>
-      </p:sp>
-      <p:sp>
-        <p:nvSpPr>
-          <p:cNvPr id="23" name="Rounded Rectangle 22"/>
-          <p:cNvSpPr/>
-          <p:nvPr/>
-        </p:nvSpPr>
-        <p:spPr>
-          <a:xfrm>
-            <a:off x="7013448" y="2871216"/>
-            <a:ext cx="1298448" cy="310896"/>
-          </a:xfrm>
-          <a:prstGeom prst="roundRect">
-            <a:avLst>
-              <a:gd name="adj" fmla="val 50000"/>
-            </a:avLst>
-          </a:prstGeom>
-          <a:solidFill>
-            <a:srgbClr val="FCECEC"/>
-          </a:solidFill>
-          <a:ln>
-            <a:noFill/>
-          </a:ln>
-          <a:effectLst/>
-        </p:spPr>
-        <p:style>
-          <a:lnRef idx="1">
-            <a:schemeClr val="accent1"/>
-          </a:lnRef>
-          <a:fillRef idx="3">
-            <a:schemeClr val="accent1"/>
-          </a:fillRef>
-          <a:effectRef idx="2">
-            <a:schemeClr val="accent1"/>
-          </a:effectRef>
-          <a:fontRef idx="minor">
-            <a:schemeClr val="lt1"/>
-          </a:fontRef>
-        </p:style>
-        <p:txBody>
-          <a:bodyPr rtlCol="0" anchor="ctr"/>
-          <a:lstStyle/>
-          <a:p>
-            <a:pPr algn="ctr"/>
-          </a:p>
-        </p:txBody>
-      </p:sp>
-      <p:sp>
-        <p:nvSpPr>
-          <p:cNvPr id="24" name="TextBox 23"/>
-          <p:cNvSpPr txBox="1"/>
-          <p:nvPr/>
-        </p:nvSpPr>
-        <p:spPr>
-          <a:xfrm>
-            <a:off x="7013448" y="2871216"/>
-            <a:ext cx="1298448" cy="310896"/>
-          </a:xfrm>
-          <a:prstGeom prst="rect">
-            <a:avLst/>
-          </a:prstGeom>
-          <a:noFill/>
-        </p:spPr>
-        <p:txBody>
-          <a:bodyPr wrap="none" anchor="ctr" lIns="0" rIns="0" tIns="0" bIns="0">
-            <a:spAutoFit/>
-          </a:bodyPr>
-          <a:lstStyle/>
-          <a:p>
-            <a:pPr algn="ctr">
-              <a:lnSpc>
-                <a:spcPct val="106000"/>
-              </a:lnSpc>
-              <a:spcBef>
-                <a:spcPts val="0"/>
-              </a:spcBef>
-              <a:spcAft>
-                <a:spcPts val="0"/>
-              </a:spcAft>
-            </a:pPr>
-            <a:r>
-              <a:rPr sz="850" b="1">
-                <a:solidFill>
-                  <a:srgbClr val="B80000"/>
-                </a:solidFill>
-                <a:latin typeface="Red Hat Display"/>
-              </a:rPr>
-              <a:t>MEDIA PASS</a:t>
-            </a:r>
-          </a:p>
-        </p:txBody>
-      </p:sp>
-      <p:pic>
-        <p:nvPicPr>
-          <p:cNvPr id="25" name="Picture 24" descr="eye_slate.png"/>
-          <p:cNvPicPr>
-            <a:picLocks noChangeAspect="1"/>
-          </p:cNvPicPr>
-          <p:nvPr/>
-        </p:nvPicPr>
-        <p:blipFill>
-          <a:blip r:embed="rId4"/>
-          <a:stretch>
-            <a:fillRect/>
-          </a:stretch>
-        </p:blipFill>
-        <p:spPr>
-          <a:xfrm>
-            <a:off x="8843619" y="3383280"/>
-            <a:ext cx="475488" cy="475488"/>
-          </a:xfrm>
-          <a:prstGeom prst="rect">
-            <a:avLst/>
-          </a:prstGeom>
-        </p:spPr>
-      </p:pic>
-      <p:sp>
-        <p:nvSpPr>
-          <p:cNvPr id="26" name="TextBox 25"/>
-          <p:cNvSpPr txBox="1"/>
-          <p:nvPr/>
-        </p:nvSpPr>
-        <p:spPr>
-          <a:xfrm>
-            <a:off x="7050024" y="3995928"/>
-            <a:ext cx="4062679" cy="1481328"/>
-          </a:xfrm>
-          <a:prstGeom prst="rect">
-            <a:avLst/>
-          </a:prstGeom>
-          <a:noFill/>
-        </p:spPr>
-        <p:txBody>
-          <a:bodyPr wrap="square" anchor="t" lIns="0" rIns="0" tIns="0" bIns="0">
-            <a:spAutoFit/>
-          </a:bodyPr>
-          <a:lstStyle/>
-          <a:p>
-            <a:pPr algn="l">
-              <a:lnSpc>
-                <a:spcPct val="120000"/>
-              </a:lnSpc>
-              <a:spcBef>
-                <a:spcPts val="0"/>
-              </a:spcBef>
-              <a:spcAft>
-                <a:spcPts val="0"/>
-              </a:spcAft>
-            </a:pPr>
-            <a:r>
-              <a:rPr sz="950" b="0">
-                <a:solidFill>
-                  <a:srgbClr val="8A9099"/>
-                </a:solidFill>
-                <a:latin typeface="Red Hat Text"/>
-              </a:rPr>
-              <a:t>A two-column table (In-memory | Kafka [ADD-ON]) across rows durability (none | persistent), replay (no | yes), ordering (best-effort | per-partition), cost (free | Streams subscription), reach-for-it-when (dev/best-effort | can't-lose/replay/throughput). A callout arrow between them: "swap = broker class only; triggers + consumers unchanged." A small footnote: "[ADD-ON] = separate Streams subscription."</a:t>
             </a:r>
           </a:p>
         </p:txBody>
@@ -11170,11 +11581,11 @@
         <p:spPr>
           <a:xfrm>
             <a:off x="841248" y="2670048"/>
-            <a:ext cx="5715000" cy="530352"/>
+            <a:ext cx="5138928" cy="786384"/>
           </a:xfrm>
           <a:prstGeom prst="roundRect">
             <a:avLst>
-              <a:gd name="adj" fmla="val 6000"/>
+              <a:gd name="adj" fmla="val 7000"/>
             </a:avLst>
           </a:prstGeom>
           <a:solidFill>
@@ -11209,9 +11620,55 @@
           </a:p>
         </p:txBody>
       </p:sp>
+      <p:sp>
+        <p:nvSpPr>
+          <p:cNvPr id="8" name="Rounded Rectangle 7"/>
+          <p:cNvSpPr/>
+          <p:nvPr/>
+        </p:nvSpPr>
+        <p:spPr>
+          <a:xfrm>
+            <a:off x="987552" y="2807208"/>
+            <a:ext cx="512064" cy="512064"/>
+          </a:xfrm>
+          <a:prstGeom prst="roundRect">
+            <a:avLst>
+              <a:gd name="adj" fmla="val 26000"/>
+            </a:avLst>
+          </a:prstGeom>
+          <a:solidFill>
+            <a:srgbClr val="EE0000"/>
+          </a:solidFill>
+          <a:ln>
+            <a:noFill/>
+          </a:ln>
+          <a:effectLst/>
+        </p:spPr>
+        <p:style>
+          <a:lnRef idx="1">
+            <a:schemeClr val="accent1"/>
+          </a:lnRef>
+          <a:fillRef idx="3">
+            <a:schemeClr val="accent1"/>
+          </a:fillRef>
+          <a:effectRef idx="2">
+            <a:schemeClr val="accent1"/>
+          </a:effectRef>
+          <a:fontRef idx="minor">
+            <a:schemeClr val="lt1"/>
+          </a:fontRef>
+        </p:style>
+        <p:txBody>
+          <a:bodyPr rtlCol="0" anchor="ctr"/>
+          <a:lstStyle/>
+          <a:p>
+            <a:pPr algn="ctr"/>
+          </a:p>
+        </p:txBody>
+      </p:sp>
       <p:pic>
         <p:nvPicPr>
-          <p:cNvPr id="8" name="Picture 7" descr="check_steel.png"/>
+          <p:cNvPr id="9" name="Picture 8" descr="check_white.png"/>
           <p:cNvPicPr>
             <a:picLocks noChangeAspect="1"/>
           </p:cNvPicPr>
@@ -11225,8 +11682,8 @@
         </p:blipFill>
         <p:spPr>
           <a:xfrm>
-            <a:off x="987552" y="2816352"/>
-            <a:ext cx="237744" cy="237744"/>
+            <a:off x="1110447" y="2930103"/>
+            <a:ext cx="266273" cy="266273"/>
           </a:xfrm>
           <a:prstGeom prst="rect">
             <a:avLst/>
@@ -11235,14 +11692,14 @@
       </p:pic>
       <p:sp>
         <p:nvSpPr>
-          <p:cNvPr id="9" name="TextBox 8"/>
+          <p:cNvPr id="10" name="TextBox 9"/>
           <p:cNvSpPr txBox="1"/>
           <p:nvPr/>
         </p:nvSpPr>
         <p:spPr>
           <a:xfrm>
-            <a:off x="1353312" y="2670048"/>
-            <a:ext cx="5029200" cy="530352"/>
+            <a:off x="1627632" y="2670048"/>
+            <a:ext cx="4206240" cy="786384"/>
           </a:xfrm>
           <a:prstGeom prst="rect">
             <a:avLst/>
@@ -11267,7 +11724,7 @@
               </a:spcAft>
             </a:pPr>
             <a:r>
-              <a:rPr sz="1200" b="0">
+              <a:rPr sz="1150" b="0">
                 <a:solidFill>
                   <a:srgbClr val="1A1A1A"/>
                 </a:solidFill>
@@ -11280,18 +11737,18 @@
       </p:sp>
       <p:sp>
         <p:nvSpPr>
-          <p:cNvPr id="10" name="Rounded Rectangle 9"/>
+          <p:cNvPr id="11" name="Rounded Rectangle 10"/>
           <p:cNvSpPr/>
           <p:nvPr/>
         </p:nvSpPr>
         <p:spPr>
           <a:xfrm>
-            <a:off x="841248" y="3273552"/>
-            <a:ext cx="5715000" cy="530352"/>
+            <a:off x="6254496" y="2670048"/>
+            <a:ext cx="5138928" cy="786384"/>
           </a:xfrm>
           <a:prstGeom prst="roundRect">
             <a:avLst>
-              <a:gd name="adj" fmla="val 6000"/>
+              <a:gd name="adj" fmla="val 7000"/>
             </a:avLst>
           </a:prstGeom>
           <a:solidFill>
@@ -11326,9 +11783,55 @@
           </a:p>
         </p:txBody>
       </p:sp>
+      <p:sp>
+        <p:nvSpPr>
+          <p:cNvPr id="12" name="Rounded Rectangle 11"/>
+          <p:cNvSpPr/>
+          <p:nvPr/>
+        </p:nvSpPr>
+        <p:spPr>
+          <a:xfrm>
+            <a:off x="6400800" y="2807208"/>
+            <a:ext cx="512064" cy="512064"/>
+          </a:xfrm>
+          <a:prstGeom prst="roundRect">
+            <a:avLst>
+              <a:gd name="adj" fmla="val 26000"/>
+            </a:avLst>
+          </a:prstGeom>
+          <a:solidFill>
+            <a:srgbClr val="EE0000"/>
+          </a:solidFill>
+          <a:ln>
+            <a:noFill/>
+          </a:ln>
+          <a:effectLst/>
+        </p:spPr>
+        <p:style>
+          <a:lnRef idx="1">
+            <a:schemeClr val="accent1"/>
+          </a:lnRef>
+          <a:fillRef idx="3">
+            <a:schemeClr val="accent1"/>
+          </a:fillRef>
+          <a:effectRef idx="2">
+            <a:schemeClr val="accent1"/>
+          </a:effectRef>
+          <a:fontRef idx="minor">
+            <a:schemeClr val="lt1"/>
+          </a:fontRef>
+        </p:style>
+        <p:txBody>
+          <a:bodyPr rtlCol="0" anchor="ctr"/>
+          <a:lstStyle/>
+          <a:p>
+            <a:pPr algn="ctr"/>
+          </a:p>
+        </p:txBody>
+      </p:sp>
       <p:pic>
         <p:nvPicPr>
-          <p:cNvPr id="11" name="Picture 10" descr="check_steel.png"/>
+          <p:cNvPr id="13" name="Picture 12" descr="check_white.png"/>
           <p:cNvPicPr>
             <a:picLocks noChangeAspect="1"/>
           </p:cNvPicPr>
@@ -11342,8 +11845,8 @@
         </p:blipFill>
         <p:spPr>
           <a:xfrm>
-            <a:off x="987552" y="3419856"/>
-            <a:ext cx="237744" cy="237744"/>
+            <a:off x="6523695" y="2930103"/>
+            <a:ext cx="266273" cy="266273"/>
           </a:xfrm>
           <a:prstGeom prst="rect">
             <a:avLst/>
@@ -11352,14 +11855,14 @@
       </p:pic>
       <p:sp>
         <p:nvSpPr>
-          <p:cNvPr id="12" name="TextBox 11"/>
+          <p:cNvPr id="14" name="TextBox 13"/>
           <p:cNvSpPr txBox="1"/>
           <p:nvPr/>
         </p:nvSpPr>
         <p:spPr>
           <a:xfrm>
-            <a:off x="1353312" y="3273552"/>
-            <a:ext cx="5029200" cy="530352"/>
+            <a:off x="7040880" y="2670048"/>
+            <a:ext cx="4206240" cy="786384"/>
           </a:xfrm>
           <a:prstGeom prst="rect">
             <a:avLst/>
@@ -11384,7 +11887,7 @@
               </a:spcAft>
             </a:pPr>
             <a:r>
-              <a:rPr sz="1200" b="0">
+              <a:rPr sz="1150" b="0">
                 <a:solidFill>
                   <a:srgbClr val="1A1A1A"/>
                 </a:solidFill>
@@ -11397,18 +11900,18 @@
       </p:sp>
       <p:sp>
         <p:nvSpPr>
-          <p:cNvPr id="13" name="Rounded Rectangle 12"/>
+          <p:cNvPr id="15" name="Rounded Rectangle 14"/>
           <p:cNvSpPr/>
           <p:nvPr/>
         </p:nvSpPr>
         <p:spPr>
           <a:xfrm>
-            <a:off x="841248" y="3877056"/>
-            <a:ext cx="5715000" cy="530352"/>
+            <a:off x="841248" y="3602736"/>
+            <a:ext cx="5138928" cy="786384"/>
           </a:xfrm>
           <a:prstGeom prst="roundRect">
             <a:avLst>
-              <a:gd name="adj" fmla="val 6000"/>
+              <a:gd name="adj" fmla="val 7000"/>
             </a:avLst>
           </a:prstGeom>
           <a:solidFill>
@@ -11443,9 +11946,55 @@
           </a:p>
         </p:txBody>
       </p:sp>
+      <p:sp>
+        <p:nvSpPr>
+          <p:cNvPr id="16" name="Rounded Rectangle 15"/>
+          <p:cNvSpPr/>
+          <p:nvPr/>
+        </p:nvSpPr>
+        <p:spPr>
+          <a:xfrm>
+            <a:off x="987552" y="3739896"/>
+            <a:ext cx="512064" cy="512064"/>
+          </a:xfrm>
+          <a:prstGeom prst="roundRect">
+            <a:avLst>
+              <a:gd name="adj" fmla="val 26000"/>
+            </a:avLst>
+          </a:prstGeom>
+          <a:solidFill>
+            <a:srgbClr val="EE0000"/>
+          </a:solidFill>
+          <a:ln>
+            <a:noFill/>
+          </a:ln>
+          <a:effectLst/>
+        </p:spPr>
+        <p:style>
+          <a:lnRef idx="1">
+            <a:schemeClr val="accent1"/>
+          </a:lnRef>
+          <a:fillRef idx="3">
+            <a:schemeClr val="accent1"/>
+          </a:fillRef>
+          <a:effectRef idx="2">
+            <a:schemeClr val="accent1"/>
+          </a:effectRef>
+          <a:fontRef idx="minor">
+            <a:schemeClr val="lt1"/>
+          </a:fontRef>
+        </p:style>
+        <p:txBody>
+          <a:bodyPr rtlCol="0" anchor="ctr"/>
+          <a:lstStyle/>
+          <a:p>
+            <a:pPr algn="ctr"/>
+          </a:p>
+        </p:txBody>
+      </p:sp>
       <p:pic>
         <p:nvPicPr>
-          <p:cNvPr id="14" name="Picture 13" descr="check_steel.png"/>
+          <p:cNvPr id="17" name="Picture 16" descr="check_white.png"/>
           <p:cNvPicPr>
             <a:picLocks noChangeAspect="1"/>
           </p:cNvPicPr>
@@ -11459,8 +12008,8 @@
         </p:blipFill>
         <p:spPr>
           <a:xfrm>
-            <a:off x="987552" y="4023360"/>
-            <a:ext cx="237744" cy="237744"/>
+            <a:off x="1110447" y="3862791"/>
+            <a:ext cx="266273" cy="266273"/>
           </a:xfrm>
           <a:prstGeom prst="rect">
             <a:avLst/>
@@ -11469,14 +12018,14 @@
       </p:pic>
       <p:sp>
         <p:nvSpPr>
-          <p:cNvPr id="15" name="TextBox 14"/>
+          <p:cNvPr id="18" name="TextBox 17"/>
           <p:cNvSpPr txBox="1"/>
           <p:nvPr/>
         </p:nvSpPr>
         <p:spPr>
           <a:xfrm>
-            <a:off x="1353312" y="3877056"/>
-            <a:ext cx="5029200" cy="530352"/>
+            <a:off x="1627632" y="3602736"/>
+            <a:ext cx="4206240" cy="786384"/>
           </a:xfrm>
           <a:prstGeom prst="rect">
             <a:avLst/>
@@ -11501,7 +12050,7 @@
               </a:spcAft>
             </a:pPr>
             <a:r>
-              <a:rPr sz="1200" b="0">
+              <a:rPr sz="1150" b="0">
                 <a:solidFill>
                   <a:srgbClr val="1A1A1A"/>
                 </a:solidFill>
@@ -11514,18 +12063,18 @@
       </p:sp>
       <p:sp>
         <p:nvSpPr>
-          <p:cNvPr id="16" name="Rounded Rectangle 15"/>
+          <p:cNvPr id="19" name="Rounded Rectangle 18"/>
           <p:cNvSpPr/>
           <p:nvPr/>
         </p:nvSpPr>
         <p:spPr>
           <a:xfrm>
-            <a:off x="841248" y="4480560"/>
-            <a:ext cx="5715000" cy="530352"/>
+            <a:off x="6254496" y="3602736"/>
+            <a:ext cx="5138928" cy="786384"/>
           </a:xfrm>
           <a:prstGeom prst="roundRect">
             <a:avLst>
-              <a:gd name="adj" fmla="val 6000"/>
+              <a:gd name="adj" fmla="val 7000"/>
             </a:avLst>
           </a:prstGeom>
           <a:solidFill>
@@ -11560,9 +12109,55 @@
           </a:p>
         </p:txBody>
       </p:sp>
+      <p:sp>
+        <p:nvSpPr>
+          <p:cNvPr id="20" name="Rounded Rectangle 19"/>
+          <p:cNvSpPr/>
+          <p:nvPr/>
+        </p:nvSpPr>
+        <p:spPr>
+          <a:xfrm>
+            <a:off x="6400800" y="3739896"/>
+            <a:ext cx="512064" cy="512064"/>
+          </a:xfrm>
+          <a:prstGeom prst="roundRect">
+            <a:avLst>
+              <a:gd name="adj" fmla="val 26000"/>
+            </a:avLst>
+          </a:prstGeom>
+          <a:solidFill>
+            <a:srgbClr val="EE0000"/>
+          </a:solidFill>
+          <a:ln>
+            <a:noFill/>
+          </a:ln>
+          <a:effectLst/>
+        </p:spPr>
+        <p:style>
+          <a:lnRef idx="1">
+            <a:schemeClr val="accent1"/>
+          </a:lnRef>
+          <a:fillRef idx="3">
+            <a:schemeClr val="accent1"/>
+          </a:fillRef>
+          <a:effectRef idx="2">
+            <a:schemeClr val="accent1"/>
+          </a:effectRef>
+          <a:fontRef idx="minor">
+            <a:schemeClr val="lt1"/>
+          </a:fontRef>
+        </p:style>
+        <p:txBody>
+          <a:bodyPr rtlCol="0" anchor="ctr"/>
+          <a:lstStyle/>
+          <a:p>
+            <a:pPr algn="ctr"/>
+          </a:p>
+        </p:txBody>
+      </p:sp>
       <p:pic>
         <p:nvPicPr>
-          <p:cNvPr id="17" name="Picture 16" descr="check_steel.png"/>
+          <p:cNvPr id="21" name="Picture 20" descr="check_white.png"/>
           <p:cNvPicPr>
             <a:picLocks noChangeAspect="1"/>
           </p:cNvPicPr>
@@ -11576,8 +12171,8 @@
         </p:blipFill>
         <p:spPr>
           <a:xfrm>
-            <a:off x="987552" y="4626864"/>
-            <a:ext cx="237744" cy="237744"/>
+            <a:off x="6523695" y="3862791"/>
+            <a:ext cx="266273" cy="266273"/>
           </a:xfrm>
           <a:prstGeom prst="rect">
             <a:avLst/>
@@ -11586,14 +12181,14 @@
       </p:pic>
       <p:sp>
         <p:nvSpPr>
-          <p:cNvPr id="18" name="TextBox 17"/>
+          <p:cNvPr id="22" name="TextBox 21"/>
           <p:cNvSpPr txBox="1"/>
           <p:nvPr/>
         </p:nvSpPr>
         <p:spPr>
           <a:xfrm>
-            <a:off x="1353312" y="4480560"/>
-            <a:ext cx="5029200" cy="530352"/>
+            <a:off x="7040880" y="3602736"/>
+            <a:ext cx="4206240" cy="786384"/>
           </a:xfrm>
           <a:prstGeom prst="rect">
             <a:avLst/>
@@ -11618,7 +12213,7 @@
               </a:spcAft>
             </a:pPr>
             <a:r>
-              <a:rPr sz="1200" b="0">
+              <a:rPr sz="1150" b="0">
                 <a:solidFill>
                   <a:srgbClr val="1A1A1A"/>
                 </a:solidFill>
@@ -11631,18 +12226,18 @@
       </p:sp>
       <p:sp>
         <p:nvSpPr>
-          <p:cNvPr id="19" name="Rounded Rectangle 18"/>
+          <p:cNvPr id="23" name="Rounded Rectangle 22"/>
           <p:cNvSpPr/>
           <p:nvPr/>
         </p:nvSpPr>
         <p:spPr>
           <a:xfrm>
-            <a:off x="841248" y="5084064"/>
-            <a:ext cx="5715000" cy="530352"/>
+            <a:off x="841248" y="4535424"/>
+            <a:ext cx="5138928" cy="786384"/>
           </a:xfrm>
           <a:prstGeom prst="roundRect">
             <a:avLst>
-              <a:gd name="adj" fmla="val 6000"/>
+              <a:gd name="adj" fmla="val 7000"/>
             </a:avLst>
           </a:prstGeom>
           <a:solidFill>
@@ -11677,9 +12272,55 @@
           </a:p>
         </p:txBody>
       </p:sp>
+      <p:sp>
+        <p:nvSpPr>
+          <p:cNvPr id="24" name="Rounded Rectangle 23"/>
+          <p:cNvSpPr/>
+          <p:nvPr/>
+        </p:nvSpPr>
+        <p:spPr>
+          <a:xfrm>
+            <a:off x="987552" y="4672584"/>
+            <a:ext cx="512064" cy="512064"/>
+          </a:xfrm>
+          <a:prstGeom prst="roundRect">
+            <a:avLst>
+              <a:gd name="adj" fmla="val 26000"/>
+            </a:avLst>
+          </a:prstGeom>
+          <a:solidFill>
+            <a:srgbClr val="EE0000"/>
+          </a:solidFill>
+          <a:ln>
+            <a:noFill/>
+          </a:ln>
+          <a:effectLst/>
+        </p:spPr>
+        <p:style>
+          <a:lnRef idx="1">
+            <a:schemeClr val="accent1"/>
+          </a:lnRef>
+          <a:fillRef idx="3">
+            <a:schemeClr val="accent1"/>
+          </a:fillRef>
+          <a:effectRef idx="2">
+            <a:schemeClr val="accent1"/>
+          </a:effectRef>
+          <a:fontRef idx="minor">
+            <a:schemeClr val="lt1"/>
+          </a:fontRef>
+        </p:style>
+        <p:txBody>
+          <a:bodyPr rtlCol="0" anchor="ctr"/>
+          <a:lstStyle/>
+          <a:p>
+            <a:pPr algn="ctr"/>
+          </a:p>
+        </p:txBody>
+      </p:sp>
       <p:pic>
         <p:nvPicPr>
-          <p:cNvPr id="20" name="Picture 19" descr="check_steel.png"/>
+          <p:cNvPr id="25" name="Picture 24" descr="check_white.png"/>
           <p:cNvPicPr>
             <a:picLocks noChangeAspect="1"/>
           </p:cNvPicPr>
@@ -11693,8 +12334,8 @@
         </p:blipFill>
         <p:spPr>
           <a:xfrm>
-            <a:off x="987552" y="5230368"/>
-            <a:ext cx="237744" cy="237744"/>
+            <a:off x="1110447" y="4795479"/>
+            <a:ext cx="266273" cy="266273"/>
           </a:xfrm>
           <a:prstGeom prst="rect">
             <a:avLst/>
@@ -11703,14 +12344,14 @@
       </p:pic>
       <p:sp>
         <p:nvSpPr>
-          <p:cNvPr id="21" name="TextBox 20"/>
+          <p:cNvPr id="26" name="TextBox 25"/>
           <p:cNvSpPr txBox="1"/>
           <p:nvPr/>
         </p:nvSpPr>
         <p:spPr>
           <a:xfrm>
-            <a:off x="1353312" y="5084064"/>
-            <a:ext cx="5029200" cy="530352"/>
+            <a:off x="1627632" y="4535424"/>
+            <a:ext cx="4206240" cy="786384"/>
           </a:xfrm>
           <a:prstGeom prst="rect">
             <a:avLst/>
@@ -11735,221 +12376,13 @@
               </a:spcAft>
             </a:pPr>
             <a:r>
-              <a:rPr sz="1200" b="0">
+              <a:rPr sz="1150" b="0">
                 <a:solidFill>
                   <a:srgbClr val="1A1A1A"/>
                 </a:solidFill>
                 <a:latin typeface="Red Hat Text"/>
               </a:rPr>
               <a:t>Concept + [ADD-ON] here (a per-user workflow runtime + state DB is real footprint)</a:t>
-            </a:r>
-          </a:p>
-        </p:txBody>
-      </p:sp>
-      <p:sp>
-        <p:nvSpPr>
-          <p:cNvPr id="22" name="Rounded Rectangle 21"/>
-          <p:cNvSpPr/>
-          <p:nvPr/>
-        </p:nvSpPr>
-        <p:spPr>
-          <a:xfrm>
-            <a:off x="6812280" y="2670048"/>
-            <a:ext cx="4538167" cy="2944368"/>
-          </a:xfrm>
-          <a:prstGeom prst="roundRect">
-            <a:avLst>
-              <a:gd name="adj" fmla="val 4000"/>
-            </a:avLst>
-          </a:prstGeom>
-          <a:solidFill>
-            <a:srgbClr val="FFFFFF"/>
-          </a:solidFill>
-          <a:ln w="15240">
-            <a:solidFill>
-              <a:srgbClr val="DDE1E6"/>
-            </a:solidFill>
-          </a:ln>
-          <a:effectLst/>
-        </p:spPr>
-        <p:style>
-          <a:lnRef idx="1">
-            <a:schemeClr val="accent1"/>
-          </a:lnRef>
-          <a:fillRef idx="3">
-            <a:schemeClr val="accent1"/>
-          </a:fillRef>
-          <a:effectRef idx="2">
-            <a:schemeClr val="accent1"/>
-          </a:effectRef>
-          <a:fontRef idx="minor">
-            <a:schemeClr val="lt1"/>
-          </a:fontRef>
-        </p:style>
-        <p:txBody>
-          <a:bodyPr rtlCol="0" anchor="ctr"/>
-          <a:lstStyle/>
-          <a:p>
-            <a:pPr algn="ctr"/>
-          </a:p>
-        </p:txBody>
-      </p:sp>
-      <p:sp>
-        <p:nvSpPr>
-          <p:cNvPr id="23" name="Rounded Rectangle 22"/>
-          <p:cNvSpPr/>
-          <p:nvPr/>
-        </p:nvSpPr>
-        <p:spPr>
-          <a:xfrm>
-            <a:off x="7013448" y="2871216"/>
-            <a:ext cx="1298448" cy="310896"/>
-          </a:xfrm>
-          <a:prstGeom prst="roundRect">
-            <a:avLst>
-              <a:gd name="adj" fmla="val 50000"/>
-            </a:avLst>
-          </a:prstGeom>
-          <a:solidFill>
-            <a:srgbClr val="FCECEC"/>
-          </a:solidFill>
-          <a:ln>
-            <a:noFill/>
-          </a:ln>
-          <a:effectLst/>
-        </p:spPr>
-        <p:style>
-          <a:lnRef idx="1">
-            <a:schemeClr val="accent1"/>
-          </a:lnRef>
-          <a:fillRef idx="3">
-            <a:schemeClr val="accent1"/>
-          </a:fillRef>
-          <a:effectRef idx="2">
-            <a:schemeClr val="accent1"/>
-          </a:effectRef>
-          <a:fontRef idx="minor">
-            <a:schemeClr val="lt1"/>
-          </a:fontRef>
-        </p:style>
-        <p:txBody>
-          <a:bodyPr rtlCol="0" anchor="ctr"/>
-          <a:lstStyle/>
-          <a:p>
-            <a:pPr algn="ctr"/>
-          </a:p>
-        </p:txBody>
-      </p:sp>
-      <p:sp>
-        <p:nvSpPr>
-          <p:cNvPr id="24" name="TextBox 23"/>
-          <p:cNvSpPr txBox="1"/>
-          <p:nvPr/>
-        </p:nvSpPr>
-        <p:spPr>
-          <a:xfrm>
-            <a:off x="7013448" y="2871216"/>
-            <a:ext cx="1298448" cy="310896"/>
-          </a:xfrm>
-          <a:prstGeom prst="rect">
-            <a:avLst/>
-          </a:prstGeom>
-          <a:noFill/>
-        </p:spPr>
-        <p:txBody>
-          <a:bodyPr wrap="none" anchor="ctr" lIns="0" rIns="0" tIns="0" bIns="0">
-            <a:spAutoFit/>
-          </a:bodyPr>
-          <a:lstStyle/>
-          <a:p>
-            <a:pPr algn="ctr">
-              <a:lnSpc>
-                <a:spcPct val="106000"/>
-              </a:lnSpc>
-              <a:spcBef>
-                <a:spcPts val="0"/>
-              </a:spcBef>
-              <a:spcAft>
-                <a:spcPts val="0"/>
-              </a:spcAft>
-            </a:pPr>
-            <a:r>
-              <a:rPr sz="850" b="1">
-                <a:solidFill>
-                  <a:srgbClr val="B80000"/>
-                </a:solidFill>
-                <a:latin typeface="Red Hat Display"/>
-              </a:rPr>
-              <a:t>MEDIA PASS</a:t>
-            </a:r>
-          </a:p>
-        </p:txBody>
-      </p:sp>
-      <p:pic>
-        <p:nvPicPr>
-          <p:cNvPr id="25" name="Picture 24" descr="eye_slate.png"/>
-          <p:cNvPicPr>
-            <a:picLocks noChangeAspect="1"/>
-          </p:cNvPicPr>
-          <p:nvPr/>
-        </p:nvPicPr>
-        <p:blipFill>
-          <a:blip r:embed="rId4"/>
-          <a:stretch>
-            <a:fillRect/>
-          </a:stretch>
-        </p:blipFill>
-        <p:spPr>
-          <a:xfrm>
-            <a:off x="8843619" y="3383280"/>
-            <a:ext cx="475488" cy="475488"/>
-          </a:xfrm>
-          <a:prstGeom prst="rect">
-            <a:avLst/>
-          </a:prstGeom>
-        </p:spPr>
-      </p:pic>
-      <p:sp>
-        <p:nvSpPr>
-          <p:cNvPr id="26" name="TextBox 25"/>
-          <p:cNvSpPr txBox="1"/>
-          <p:nvPr/>
-        </p:nvSpPr>
-        <p:spPr>
-          <a:xfrm>
-            <a:off x="7050024" y="3995928"/>
-            <a:ext cx="4062679" cy="1481328"/>
-          </a:xfrm>
-          <a:prstGeom prst="rect">
-            <a:avLst/>
-          </a:prstGeom>
-          <a:noFill/>
-        </p:spPr>
-        <p:txBody>
-          <a:bodyPr wrap="square" anchor="t" lIns="0" rIns="0" tIns="0" bIns="0">
-            <a:spAutoFit/>
-          </a:bodyPr>
-          <a:lstStyle/>
-          <a:p>
-            <a:pPr algn="l">
-              <a:lnSpc>
-                <a:spcPct val="120000"/>
-              </a:lnSpc>
-              <a:spcBef>
-                <a:spcPts val="0"/>
-              </a:spcBef>
-              <a:spcAft>
-                <a:spcPts val="0"/>
-              </a:spcAft>
-            </a:pPr>
-            <a:r>
-              <a:rPr sz="950" b="0">
-                <a:solidFill>
-                  <a:srgbClr val="8A9099"/>
-                </a:solidFill>
-                <a:latin typeface="Red Hat Text"/>
-              </a:rPr>
-              <a:t>Left "Choreography": three services reacting to a broker independently, no center, labeled "decoupled, but who's tracking the process?" Right "Orchestration": a central SonataFlow workflow node with a flowchart inside (threshold check → auto-approve / → review → timeout branch) calling out to services, labeled "one conductor, queryable per-claim state." Footer: "[ADD-ON] concept — decision &gt; deployment."</a:t>
             </a:r>
           </a:p>
         </p:txBody>
@@ -12302,11 +12735,11 @@
         <p:spPr>
           <a:xfrm>
             <a:off x="841248" y="2670048"/>
-            <a:ext cx="5715000" cy="530352"/>
+            <a:ext cx="5138928" cy="786384"/>
           </a:xfrm>
           <a:prstGeom prst="roundRect">
             <a:avLst>
-              <a:gd name="adj" fmla="val 6000"/>
+              <a:gd name="adj" fmla="val 7000"/>
             </a:avLst>
           </a:prstGeom>
           <a:solidFill>
@@ -12341,9 +12774,55 @@
           </a:p>
         </p:txBody>
       </p:sp>
+      <p:sp>
+        <p:nvSpPr>
+          <p:cNvPr id="8" name="Rounded Rectangle 7"/>
+          <p:cNvSpPr/>
+          <p:nvPr/>
+        </p:nvSpPr>
+        <p:spPr>
+          <a:xfrm>
+            <a:off x="987552" y="2807208"/>
+            <a:ext cx="512064" cy="512064"/>
+          </a:xfrm>
+          <a:prstGeom prst="roundRect">
+            <a:avLst>
+              <a:gd name="adj" fmla="val 26000"/>
+            </a:avLst>
+          </a:prstGeom>
+          <a:solidFill>
+            <a:srgbClr val="EE0000"/>
+          </a:solidFill>
+          <a:ln>
+            <a:noFill/>
+          </a:ln>
+          <a:effectLst/>
+        </p:spPr>
+        <p:style>
+          <a:lnRef idx="1">
+            <a:schemeClr val="accent1"/>
+          </a:lnRef>
+          <a:fillRef idx="3">
+            <a:schemeClr val="accent1"/>
+          </a:fillRef>
+          <a:effectRef idx="2">
+            <a:schemeClr val="accent1"/>
+          </a:effectRef>
+          <a:fontRef idx="minor">
+            <a:schemeClr val="lt1"/>
+          </a:fontRef>
+        </p:style>
+        <p:txBody>
+          <a:bodyPr rtlCol="0" anchor="ctr"/>
+          <a:lstStyle/>
+          <a:p>
+            <a:pPr algn="ctr"/>
+          </a:p>
+        </p:txBody>
+      </p:sp>
       <p:pic>
         <p:nvPicPr>
-          <p:cNvPr id="8" name="Picture 7" descr="check_steel.png"/>
+          <p:cNvPr id="9" name="Picture 8" descr="check_white.png"/>
           <p:cNvPicPr>
             <a:picLocks noChangeAspect="1"/>
           </p:cNvPicPr>
@@ -12357,8 +12836,8 @@
         </p:blipFill>
         <p:spPr>
           <a:xfrm>
-            <a:off x="987552" y="2816352"/>
-            <a:ext cx="237744" cy="237744"/>
+            <a:off x="1110447" y="2930103"/>
+            <a:ext cx="266273" cy="266273"/>
           </a:xfrm>
           <a:prstGeom prst="rect">
             <a:avLst/>
@@ -12367,14 +12846,14 @@
       </p:pic>
       <p:sp>
         <p:nvSpPr>
-          <p:cNvPr id="9" name="TextBox 8"/>
+          <p:cNvPr id="10" name="TextBox 9"/>
           <p:cNvSpPr txBox="1"/>
           <p:nvPr/>
         </p:nvSpPr>
         <p:spPr>
           <a:xfrm>
-            <a:off x="1353312" y="2670048"/>
-            <a:ext cx="5029200" cy="530352"/>
+            <a:off x="1627632" y="2670048"/>
+            <a:ext cx="4206240" cy="786384"/>
           </a:xfrm>
           <a:prstGeom prst="rect">
             <a:avLst/>
@@ -12399,7 +12878,7 @@
               </a:spcAft>
             </a:pPr>
             <a:r>
-              <a:rPr sz="1200" b="0">
+              <a:rPr sz="1150" b="0">
                 <a:solidFill>
                   <a:srgbClr val="1A1A1A"/>
                 </a:solidFill>
@@ -12412,18 +12891,18 @@
       </p:sp>
       <p:sp>
         <p:nvSpPr>
-          <p:cNvPr id="10" name="Rounded Rectangle 9"/>
+          <p:cNvPr id="11" name="Rounded Rectangle 10"/>
           <p:cNvSpPr/>
           <p:nvPr/>
         </p:nvSpPr>
         <p:spPr>
           <a:xfrm>
-            <a:off x="841248" y="3273552"/>
-            <a:ext cx="5715000" cy="530352"/>
+            <a:off x="6254496" y="2670048"/>
+            <a:ext cx="5138928" cy="786384"/>
           </a:xfrm>
           <a:prstGeom prst="roundRect">
             <a:avLst>
-              <a:gd name="adj" fmla="val 6000"/>
+              <a:gd name="adj" fmla="val 7000"/>
             </a:avLst>
           </a:prstGeom>
           <a:solidFill>
@@ -12458,9 +12937,55 @@
           </a:p>
         </p:txBody>
       </p:sp>
+      <p:sp>
+        <p:nvSpPr>
+          <p:cNvPr id="12" name="Rounded Rectangle 11"/>
+          <p:cNvSpPr/>
+          <p:nvPr/>
+        </p:nvSpPr>
+        <p:spPr>
+          <a:xfrm>
+            <a:off x="6400800" y="2807208"/>
+            <a:ext cx="512064" cy="512064"/>
+          </a:xfrm>
+          <a:prstGeom prst="roundRect">
+            <a:avLst>
+              <a:gd name="adj" fmla="val 26000"/>
+            </a:avLst>
+          </a:prstGeom>
+          <a:solidFill>
+            <a:srgbClr val="EE0000"/>
+          </a:solidFill>
+          <a:ln>
+            <a:noFill/>
+          </a:ln>
+          <a:effectLst/>
+        </p:spPr>
+        <p:style>
+          <a:lnRef idx="1">
+            <a:schemeClr val="accent1"/>
+          </a:lnRef>
+          <a:fillRef idx="3">
+            <a:schemeClr val="accent1"/>
+          </a:fillRef>
+          <a:effectRef idx="2">
+            <a:schemeClr val="accent1"/>
+          </a:effectRef>
+          <a:fontRef idx="minor">
+            <a:schemeClr val="lt1"/>
+          </a:fontRef>
+        </p:style>
+        <p:txBody>
+          <a:bodyPr rtlCol="0" anchor="ctr"/>
+          <a:lstStyle/>
+          <a:p>
+            <a:pPr algn="ctr"/>
+          </a:p>
+        </p:txBody>
+      </p:sp>
       <p:pic>
         <p:nvPicPr>
-          <p:cNvPr id="11" name="Picture 10" descr="check_steel.png"/>
+          <p:cNvPr id="13" name="Picture 12" descr="check_white.png"/>
           <p:cNvPicPr>
             <a:picLocks noChangeAspect="1"/>
           </p:cNvPicPr>
@@ -12474,8 +12999,8 @@
         </p:blipFill>
         <p:spPr>
           <a:xfrm>
-            <a:off x="987552" y="3419856"/>
-            <a:ext cx="237744" cy="237744"/>
+            <a:off x="6523695" y="2930103"/>
+            <a:ext cx="266273" cy="266273"/>
           </a:xfrm>
           <a:prstGeom prst="rect">
             <a:avLst/>
@@ -12484,14 +13009,14 @@
       </p:pic>
       <p:sp>
         <p:nvSpPr>
-          <p:cNvPr id="12" name="TextBox 11"/>
+          <p:cNvPr id="14" name="TextBox 13"/>
           <p:cNvSpPr txBox="1"/>
           <p:nvPr/>
         </p:nvSpPr>
         <p:spPr>
           <a:xfrm>
-            <a:off x="1353312" y="3273552"/>
-            <a:ext cx="5029200" cy="530352"/>
+            <a:off x="7040880" y="2670048"/>
+            <a:ext cx="4206240" cy="786384"/>
           </a:xfrm>
           <a:prstGeom prst="rect">
             <a:avLst/>
@@ -12516,7 +13041,7 @@
               </a:spcAft>
             </a:pPr>
             <a:r>
-              <a:rPr sz="1200" b="0">
+              <a:rPr sz="1150" b="0">
                 <a:solidFill>
                   <a:srgbClr val="1A1A1A"/>
                 </a:solidFill>
@@ -12529,18 +13054,18 @@
       </p:sp>
       <p:sp>
         <p:nvSpPr>
-          <p:cNvPr id="13" name="Rounded Rectangle 12"/>
+          <p:cNvPr id="15" name="Rounded Rectangle 14"/>
           <p:cNvSpPr/>
           <p:nvPr/>
         </p:nvSpPr>
         <p:spPr>
           <a:xfrm>
-            <a:off x="841248" y="3877056"/>
-            <a:ext cx="5715000" cy="530352"/>
+            <a:off x="841248" y="3602736"/>
+            <a:ext cx="5138928" cy="786384"/>
           </a:xfrm>
           <a:prstGeom prst="roundRect">
             <a:avLst>
-              <a:gd name="adj" fmla="val 6000"/>
+              <a:gd name="adj" fmla="val 7000"/>
             </a:avLst>
           </a:prstGeom>
           <a:solidFill>
@@ -12575,9 +13100,55 @@
           </a:p>
         </p:txBody>
       </p:sp>
+      <p:sp>
+        <p:nvSpPr>
+          <p:cNvPr id="16" name="Rounded Rectangle 15"/>
+          <p:cNvSpPr/>
+          <p:nvPr/>
+        </p:nvSpPr>
+        <p:spPr>
+          <a:xfrm>
+            <a:off x="987552" y="3739896"/>
+            <a:ext cx="512064" cy="512064"/>
+          </a:xfrm>
+          <a:prstGeom prst="roundRect">
+            <a:avLst>
+              <a:gd name="adj" fmla="val 26000"/>
+            </a:avLst>
+          </a:prstGeom>
+          <a:solidFill>
+            <a:srgbClr val="EE0000"/>
+          </a:solidFill>
+          <a:ln>
+            <a:noFill/>
+          </a:ln>
+          <a:effectLst/>
+        </p:spPr>
+        <p:style>
+          <a:lnRef idx="1">
+            <a:schemeClr val="accent1"/>
+          </a:lnRef>
+          <a:fillRef idx="3">
+            <a:schemeClr val="accent1"/>
+          </a:fillRef>
+          <a:effectRef idx="2">
+            <a:schemeClr val="accent1"/>
+          </a:effectRef>
+          <a:fontRef idx="minor">
+            <a:schemeClr val="lt1"/>
+          </a:fontRef>
+        </p:style>
+        <p:txBody>
+          <a:bodyPr rtlCol="0" anchor="ctr"/>
+          <a:lstStyle/>
+          <a:p>
+            <a:pPr algn="ctr"/>
+          </a:p>
+        </p:txBody>
+      </p:sp>
       <p:pic>
         <p:nvPicPr>
-          <p:cNvPr id="14" name="Picture 13" descr="check_steel.png"/>
+          <p:cNvPr id="17" name="Picture 16" descr="check_white.png"/>
           <p:cNvPicPr>
             <a:picLocks noChangeAspect="1"/>
           </p:cNvPicPr>
@@ -12591,8 +13162,8 @@
         </p:blipFill>
         <p:spPr>
           <a:xfrm>
-            <a:off x="987552" y="4023360"/>
-            <a:ext cx="237744" cy="237744"/>
+            <a:off x="1110447" y="3862791"/>
+            <a:ext cx="266273" cy="266273"/>
           </a:xfrm>
           <a:prstGeom prst="rect">
             <a:avLst/>
@@ -12601,14 +13172,14 @@
       </p:pic>
       <p:sp>
         <p:nvSpPr>
-          <p:cNvPr id="15" name="TextBox 14"/>
+          <p:cNvPr id="18" name="TextBox 17"/>
           <p:cNvSpPr txBox="1"/>
           <p:nvPr/>
         </p:nvSpPr>
         <p:spPr>
           <a:xfrm>
-            <a:off x="1353312" y="3877056"/>
-            <a:ext cx="5029200" cy="530352"/>
+            <a:off x="1627632" y="3602736"/>
+            <a:ext cx="4206240" cy="786384"/>
           </a:xfrm>
           <a:prstGeom prst="rect">
             <a:avLst/>
@@ -12633,7 +13204,7 @@
               </a:spcAft>
             </a:pPr>
             <a:r>
-              <a:rPr sz="1200" b="0">
+              <a:rPr sz="1150" b="0">
                 <a:solidFill>
                   <a:srgbClr val="1A1A1A"/>
                 </a:solidFill>
@@ -12646,18 +13217,18 @@
       </p:sp>
       <p:sp>
         <p:nvSpPr>
-          <p:cNvPr id="16" name="Rounded Rectangle 15"/>
+          <p:cNvPr id="19" name="Rounded Rectangle 18"/>
           <p:cNvSpPr/>
           <p:nvPr/>
         </p:nvSpPr>
         <p:spPr>
           <a:xfrm>
-            <a:off x="841248" y="4480560"/>
-            <a:ext cx="5715000" cy="530352"/>
+            <a:off x="6254496" y="3602736"/>
+            <a:ext cx="5138928" cy="786384"/>
           </a:xfrm>
           <a:prstGeom prst="roundRect">
             <a:avLst>
-              <a:gd name="adj" fmla="val 6000"/>
+              <a:gd name="adj" fmla="val 7000"/>
             </a:avLst>
           </a:prstGeom>
           <a:solidFill>
@@ -12692,9 +13263,55 @@
           </a:p>
         </p:txBody>
       </p:sp>
+      <p:sp>
+        <p:nvSpPr>
+          <p:cNvPr id="20" name="Rounded Rectangle 19"/>
+          <p:cNvSpPr/>
+          <p:nvPr/>
+        </p:nvSpPr>
+        <p:spPr>
+          <a:xfrm>
+            <a:off x="6400800" y="3739896"/>
+            <a:ext cx="512064" cy="512064"/>
+          </a:xfrm>
+          <a:prstGeom prst="roundRect">
+            <a:avLst>
+              <a:gd name="adj" fmla="val 26000"/>
+            </a:avLst>
+          </a:prstGeom>
+          <a:solidFill>
+            <a:srgbClr val="EE0000"/>
+          </a:solidFill>
+          <a:ln>
+            <a:noFill/>
+          </a:ln>
+          <a:effectLst/>
+        </p:spPr>
+        <p:style>
+          <a:lnRef idx="1">
+            <a:schemeClr val="accent1"/>
+          </a:lnRef>
+          <a:fillRef idx="3">
+            <a:schemeClr val="accent1"/>
+          </a:fillRef>
+          <a:effectRef idx="2">
+            <a:schemeClr val="accent1"/>
+          </a:effectRef>
+          <a:fontRef idx="minor">
+            <a:schemeClr val="lt1"/>
+          </a:fontRef>
+        </p:style>
+        <p:txBody>
+          <a:bodyPr rtlCol="0" anchor="ctr"/>
+          <a:lstStyle/>
+          <a:p>
+            <a:pPr algn="ctr"/>
+          </a:p>
+        </p:txBody>
+      </p:sp>
       <p:pic>
         <p:nvPicPr>
-          <p:cNvPr id="17" name="Picture 16" descr="check_steel.png"/>
+          <p:cNvPr id="21" name="Picture 20" descr="check_white.png"/>
           <p:cNvPicPr>
             <a:picLocks noChangeAspect="1"/>
           </p:cNvPicPr>
@@ -12708,8 +13325,8 @@
         </p:blipFill>
         <p:spPr>
           <a:xfrm>
-            <a:off x="987552" y="4626864"/>
-            <a:ext cx="237744" cy="237744"/>
+            <a:off x="6523695" y="3862791"/>
+            <a:ext cx="266273" cy="266273"/>
           </a:xfrm>
           <a:prstGeom prst="rect">
             <a:avLst/>
@@ -12718,14 +13335,14 @@
       </p:pic>
       <p:sp>
         <p:nvSpPr>
-          <p:cNvPr id="18" name="TextBox 17"/>
+          <p:cNvPr id="22" name="TextBox 21"/>
           <p:cNvSpPr txBox="1"/>
           <p:nvPr/>
         </p:nvSpPr>
         <p:spPr>
           <a:xfrm>
-            <a:off x="1353312" y="4480560"/>
-            <a:ext cx="5029200" cy="530352"/>
+            <a:off x="7040880" y="3602736"/>
+            <a:ext cx="4206240" cy="786384"/>
           </a:xfrm>
           <a:prstGeom prst="rect">
             <a:avLst/>
@@ -12750,7 +13367,7 @@
               </a:spcAft>
             </a:pPr>
             <a:r>
-              <a:rPr sz="1200" b="0">
+              <a:rPr sz="1150" b="0">
                 <a:solidFill>
                   <a:srgbClr val="1A1A1A"/>
                 </a:solidFill>
@@ -12763,18 +13380,18 @@
       </p:sp>
       <p:sp>
         <p:nvSpPr>
-          <p:cNvPr id="19" name="Rounded Rectangle 18"/>
+          <p:cNvPr id="23" name="Rounded Rectangle 22"/>
           <p:cNvSpPr/>
           <p:nvPr/>
         </p:nvSpPr>
         <p:spPr>
           <a:xfrm>
-            <a:off x="841248" y="5084064"/>
-            <a:ext cx="5715000" cy="530352"/>
+            <a:off x="841248" y="4535424"/>
+            <a:ext cx="5138928" cy="786384"/>
           </a:xfrm>
           <a:prstGeom prst="roundRect">
             <a:avLst>
-              <a:gd name="adj" fmla="val 6000"/>
+              <a:gd name="adj" fmla="val 7000"/>
             </a:avLst>
           </a:prstGeom>
           <a:solidFill>
@@ -12809,9 +13426,55 @@
           </a:p>
         </p:txBody>
       </p:sp>
+      <p:sp>
+        <p:nvSpPr>
+          <p:cNvPr id="24" name="Rounded Rectangle 23"/>
+          <p:cNvSpPr/>
+          <p:nvPr/>
+        </p:nvSpPr>
+        <p:spPr>
+          <a:xfrm>
+            <a:off x="987552" y="4672584"/>
+            <a:ext cx="512064" cy="512064"/>
+          </a:xfrm>
+          <a:prstGeom prst="roundRect">
+            <a:avLst>
+              <a:gd name="adj" fmla="val 26000"/>
+            </a:avLst>
+          </a:prstGeom>
+          <a:solidFill>
+            <a:srgbClr val="EE0000"/>
+          </a:solidFill>
+          <a:ln>
+            <a:noFill/>
+          </a:ln>
+          <a:effectLst/>
+        </p:spPr>
+        <p:style>
+          <a:lnRef idx="1">
+            <a:schemeClr val="accent1"/>
+          </a:lnRef>
+          <a:fillRef idx="3">
+            <a:schemeClr val="accent1"/>
+          </a:fillRef>
+          <a:effectRef idx="2">
+            <a:schemeClr val="accent1"/>
+          </a:effectRef>
+          <a:fontRef idx="minor">
+            <a:schemeClr val="lt1"/>
+          </a:fontRef>
+        </p:style>
+        <p:txBody>
+          <a:bodyPr rtlCol="0" anchor="ctr"/>
+          <a:lstStyle/>
+          <a:p>
+            <a:pPr algn="ctr"/>
+          </a:p>
+        </p:txBody>
+      </p:sp>
       <p:pic>
         <p:nvPicPr>
-          <p:cNvPr id="20" name="Picture 19" descr="check_steel.png"/>
+          <p:cNvPr id="25" name="Picture 24" descr="check_white.png"/>
           <p:cNvPicPr>
             <a:picLocks noChangeAspect="1"/>
           </p:cNvPicPr>
@@ -12825,8 +13488,8 @@
         </p:blipFill>
         <p:spPr>
           <a:xfrm>
-            <a:off x="987552" y="5230368"/>
-            <a:ext cx="237744" cy="237744"/>
+            <a:off x="1110447" y="4795479"/>
+            <a:ext cx="266273" cy="266273"/>
           </a:xfrm>
           <a:prstGeom prst="rect">
             <a:avLst/>
@@ -12835,14 +13498,14 @@
       </p:pic>
       <p:sp>
         <p:nvSpPr>
-          <p:cNvPr id="21" name="TextBox 20"/>
+          <p:cNvPr id="26" name="TextBox 25"/>
           <p:cNvSpPr txBox="1"/>
           <p:nvPr/>
         </p:nvSpPr>
         <p:spPr>
           <a:xfrm>
-            <a:off x="1353312" y="5084064"/>
-            <a:ext cx="5029200" cy="530352"/>
+            <a:off x="1627632" y="4535424"/>
+            <a:ext cx="4206240" cy="786384"/>
           </a:xfrm>
           <a:prstGeom prst="rect">
             <a:avLst/>
@@ -12867,221 +13530,13 @@
               </a:spcAft>
             </a:pPr>
             <a:r>
-              <a:rPr sz="1200" b="0">
+              <a:rPr sz="1150" b="0">
                 <a:solidFill>
                   <a:srgbClr val="1A1A1A"/>
                 </a:solidFill>
                 <a:latin typeface="Red Hat Text"/>
               </a:rPr>
               <a:t>Map to your org: where does adding a consumer force a producer change? where's a DLQ + alert?</a:t>
-            </a:r>
-          </a:p>
-        </p:txBody>
-      </p:sp>
-      <p:sp>
-        <p:nvSpPr>
-          <p:cNvPr id="22" name="Rounded Rectangle 21"/>
-          <p:cNvSpPr/>
-          <p:nvPr/>
-        </p:nvSpPr>
-        <p:spPr>
-          <a:xfrm>
-            <a:off x="6812280" y="2670048"/>
-            <a:ext cx="4538167" cy="2944368"/>
-          </a:xfrm>
-          <a:prstGeom prst="roundRect">
-            <a:avLst>
-              <a:gd name="adj" fmla="val 4000"/>
-            </a:avLst>
-          </a:prstGeom>
-          <a:solidFill>
-            <a:srgbClr val="FFFFFF"/>
-          </a:solidFill>
-          <a:ln w="15240">
-            <a:solidFill>
-              <a:srgbClr val="DDE1E6"/>
-            </a:solidFill>
-          </a:ln>
-          <a:effectLst/>
-        </p:spPr>
-        <p:style>
-          <a:lnRef idx="1">
-            <a:schemeClr val="accent1"/>
-          </a:lnRef>
-          <a:fillRef idx="3">
-            <a:schemeClr val="accent1"/>
-          </a:fillRef>
-          <a:effectRef idx="2">
-            <a:schemeClr val="accent1"/>
-          </a:effectRef>
-          <a:fontRef idx="minor">
-            <a:schemeClr val="lt1"/>
-          </a:fontRef>
-        </p:style>
-        <p:txBody>
-          <a:bodyPr rtlCol="0" anchor="ctr"/>
-          <a:lstStyle/>
-          <a:p>
-            <a:pPr algn="ctr"/>
-          </a:p>
-        </p:txBody>
-      </p:sp>
-      <p:sp>
-        <p:nvSpPr>
-          <p:cNvPr id="23" name="Rounded Rectangle 22"/>
-          <p:cNvSpPr/>
-          <p:nvPr/>
-        </p:nvSpPr>
-        <p:spPr>
-          <a:xfrm>
-            <a:off x="7013448" y="2871216"/>
-            <a:ext cx="1298448" cy="310896"/>
-          </a:xfrm>
-          <a:prstGeom prst="roundRect">
-            <a:avLst>
-              <a:gd name="adj" fmla="val 50000"/>
-            </a:avLst>
-          </a:prstGeom>
-          <a:solidFill>
-            <a:srgbClr val="FCECEC"/>
-          </a:solidFill>
-          <a:ln>
-            <a:noFill/>
-          </a:ln>
-          <a:effectLst/>
-        </p:spPr>
-        <p:style>
-          <a:lnRef idx="1">
-            <a:schemeClr val="accent1"/>
-          </a:lnRef>
-          <a:fillRef idx="3">
-            <a:schemeClr val="accent1"/>
-          </a:fillRef>
-          <a:effectRef idx="2">
-            <a:schemeClr val="accent1"/>
-          </a:effectRef>
-          <a:fontRef idx="minor">
-            <a:schemeClr val="lt1"/>
-          </a:fontRef>
-        </p:style>
-        <p:txBody>
-          <a:bodyPr rtlCol="0" anchor="ctr"/>
-          <a:lstStyle/>
-          <a:p>
-            <a:pPr algn="ctr"/>
-          </a:p>
-        </p:txBody>
-      </p:sp>
-      <p:sp>
-        <p:nvSpPr>
-          <p:cNvPr id="24" name="TextBox 23"/>
-          <p:cNvSpPr txBox="1"/>
-          <p:nvPr/>
-        </p:nvSpPr>
-        <p:spPr>
-          <a:xfrm>
-            <a:off x="7013448" y="2871216"/>
-            <a:ext cx="1298448" cy="310896"/>
-          </a:xfrm>
-          <a:prstGeom prst="rect">
-            <a:avLst/>
-          </a:prstGeom>
-          <a:noFill/>
-        </p:spPr>
-        <p:txBody>
-          <a:bodyPr wrap="none" anchor="ctr" lIns="0" rIns="0" tIns="0" bIns="0">
-            <a:spAutoFit/>
-          </a:bodyPr>
-          <a:lstStyle/>
-          <a:p>
-            <a:pPr algn="ctr">
-              <a:lnSpc>
-                <a:spcPct val="106000"/>
-              </a:lnSpc>
-              <a:spcBef>
-                <a:spcPts val="0"/>
-              </a:spcBef>
-              <a:spcAft>
-                <a:spcPts val="0"/>
-              </a:spcAft>
-            </a:pPr>
-            <a:r>
-              <a:rPr sz="850" b="1">
-                <a:solidFill>
-                  <a:srgbClr val="B80000"/>
-                </a:solidFill>
-                <a:latin typeface="Red Hat Display"/>
-              </a:rPr>
-              <a:t>MEDIA PASS</a:t>
-            </a:r>
-          </a:p>
-        </p:txBody>
-      </p:sp>
-      <p:pic>
-        <p:nvPicPr>
-          <p:cNvPr id="25" name="Picture 24" descr="eye_slate.png"/>
-          <p:cNvPicPr>
-            <a:picLocks noChangeAspect="1"/>
-          </p:cNvPicPr>
-          <p:nvPr/>
-        </p:nvPicPr>
-        <p:blipFill>
-          <a:blip r:embed="rId4"/>
-          <a:stretch>
-            <a:fillRect/>
-          </a:stretch>
-        </p:blipFill>
-        <p:spPr>
-          <a:xfrm>
-            <a:off x="8843619" y="3383280"/>
-            <a:ext cx="475488" cy="475488"/>
-          </a:xfrm>
-          <a:prstGeom prst="rect">
-            <a:avLst/>
-          </a:prstGeom>
-        </p:spPr>
-      </p:pic>
-      <p:sp>
-        <p:nvSpPr>
-          <p:cNvPr id="26" name="TextBox 25"/>
-          <p:cNvSpPr txBox="1"/>
-          <p:nvPr/>
-        </p:nvSpPr>
-        <p:spPr>
-          <a:xfrm>
-            <a:off x="7050024" y="3995928"/>
-            <a:ext cx="4062679" cy="1481328"/>
-          </a:xfrm>
-          <a:prstGeom prst="rect">
-            <a:avLst/>
-          </a:prstGeom>
-          <a:noFill/>
-        </p:spPr>
-        <p:txBody>
-          <a:bodyPr wrap="square" anchor="t" lIns="0" rIns="0" tIns="0" bIns="0">
-            <a:spAutoFit/>
-          </a:bodyPr>
-          <a:lstStyle/>
-          <a:p>
-            <a:pPr algn="l">
-              <a:lnSpc>
-                <a:spcPct val="120000"/>
-              </a:lnSpc>
-              <a:spcBef>
-                <a:spcPts val="0"/>
-              </a:spcBef>
-              <a:spcAft>
-                <a:spcPts val="0"/>
-              </a:spcAft>
-            </a:pPr>
-            <a:r>
-              <a:rPr sz="950" b="0">
-                <a:solidFill>
-                  <a:srgbClr val="8A9099"/>
-                </a:solidFill>
-                <a:latin typeface="Red Hat Text"/>
-              </a:rPr>
-              <a:t>A "what's it FOR" matrix: rows = need (react+fan-out+filter / ordered pipeline / can't-lose / multi-step process / CI-CD build / bulk work / answer-now), columns = Reach for | Not. Right rail "Map to your org" with the five prompts as check-boxes. Bottom banner pointer: "Pipelines Fundamentals Pipelines · Jobs, Batch &amp; Queued Workloads Jobs+Kueue · Serverless Serverless (the source→broker→trigger taste this module deepened)."</a:t>
             </a:r>
           </a:p>
         </p:txBody>
